--- a/deep_learning/1_ANN/2-ANN-CORE.pptx
+++ b/deep_learning/1_ANN/2-ANN-CORE.pptx
@@ -12,40 +12,40 @@
   </p:handoutMasterIdLst>
   <p:sldIdLst>
     <p:sldId id="256" r:id="rId2"/>
-    <p:sldId id="276" r:id="rId3"/>
-    <p:sldId id="299" r:id="rId4"/>
-    <p:sldId id="300" r:id="rId5"/>
-    <p:sldId id="313" r:id="rId6"/>
-    <p:sldId id="316" r:id="rId7"/>
-    <p:sldId id="317" r:id="rId8"/>
-    <p:sldId id="281" r:id="rId9"/>
-    <p:sldId id="282" r:id="rId10"/>
-    <p:sldId id="301" r:id="rId11"/>
-    <p:sldId id="315" r:id="rId12"/>
-    <p:sldId id="314" r:id="rId13"/>
-    <p:sldId id="290" r:id="rId14"/>
+    <p:sldId id="283" r:id="rId3"/>
+    <p:sldId id="276" r:id="rId4"/>
+    <p:sldId id="299" r:id="rId5"/>
+    <p:sldId id="300" r:id="rId6"/>
+    <p:sldId id="313" r:id="rId7"/>
+    <p:sldId id="316" r:id="rId8"/>
+    <p:sldId id="317" r:id="rId9"/>
+    <p:sldId id="281" r:id="rId10"/>
+    <p:sldId id="282" r:id="rId11"/>
+    <p:sldId id="301" r:id="rId12"/>
+    <p:sldId id="315" r:id="rId13"/>
+    <p:sldId id="314" r:id="rId14"/>
     <p:sldId id="292" r:id="rId15"/>
-    <p:sldId id="293" r:id="rId16"/>
-    <p:sldId id="287" r:id="rId17"/>
-    <p:sldId id="288" r:id="rId18"/>
-    <p:sldId id="296" r:id="rId19"/>
-    <p:sldId id="309" r:id="rId20"/>
-    <p:sldId id="297" r:id="rId21"/>
-    <p:sldId id="302" r:id="rId22"/>
-    <p:sldId id="285" r:id="rId23"/>
-    <p:sldId id="280" r:id="rId24"/>
-    <p:sldId id="308" r:id="rId25"/>
-    <p:sldId id="294" r:id="rId26"/>
-    <p:sldId id="269" r:id="rId27"/>
-    <p:sldId id="298" r:id="rId28"/>
-    <p:sldId id="286" r:id="rId29"/>
-    <p:sldId id="295" r:id="rId30"/>
-    <p:sldId id="283" r:id="rId31"/>
+    <p:sldId id="285" r:id="rId16"/>
+    <p:sldId id="290" r:id="rId17"/>
+    <p:sldId id="287" r:id="rId18"/>
+    <p:sldId id="288" r:id="rId19"/>
+    <p:sldId id="293" r:id="rId20"/>
+    <p:sldId id="296" r:id="rId21"/>
+    <p:sldId id="309" r:id="rId22"/>
+    <p:sldId id="297" r:id="rId23"/>
+    <p:sldId id="302" r:id="rId24"/>
+    <p:sldId id="280" r:id="rId25"/>
+    <p:sldId id="308" r:id="rId26"/>
+    <p:sldId id="294" r:id="rId27"/>
+    <p:sldId id="269" r:id="rId28"/>
+    <p:sldId id="298" r:id="rId29"/>
+    <p:sldId id="286" r:id="rId30"/>
+    <p:sldId id="295" r:id="rId31"/>
     <p:sldId id="279" r:id="rId32"/>
-    <p:sldId id="277" r:id="rId33"/>
-    <p:sldId id="275" r:id="rId34"/>
-    <p:sldId id="311" r:id="rId35"/>
-    <p:sldId id="312" r:id="rId36"/>
+    <p:sldId id="275" r:id="rId33"/>
+    <p:sldId id="311" r:id="rId34"/>
+    <p:sldId id="312" r:id="rId35"/>
+    <p:sldId id="277" r:id="rId36"/>
     <p:sldId id="310" r:id="rId37"/>
     <p:sldId id="278" r:id="rId38"/>
   </p:sldIdLst>
@@ -251,7 +251,7 @@
           <a:p>
             <a:fld id="{7BAEECA8-D063-486F-AE31-5020270C1449}" type="datetimeFigureOut">
               <a:rPr lang="en-US" smtClean="0"/>
-              <a:t>4/4/2026</a:t>
+              <a:t>4/6/2026</a:t>
             </a:fld>
             <a:endParaRPr lang="en-US"/>
           </a:p>
@@ -1836,7 +1836,7 @@
           <a:p>
             <a:fld id="{CB233BD1-3BA8-448D-9D08-7846095EA517}" type="datetimeFigureOut">
               <a:rPr lang="en-US" smtClean="0"/>
-              <a:t>4/4/2026</a:t>
+              <a:t>4/6/2026</a:t>
             </a:fld>
             <a:endParaRPr lang="en-US"/>
           </a:p>
@@ -2250,7 +2250,7 @@
           <a:p>
             <a:fld id="{6383FAE1-13DE-4511-8C1B-C8AFB720664C}" type="datetimeFigureOut">
               <a:rPr lang="en-US" smtClean="0"/>
-              <a:t>4/4/2026</a:t>
+              <a:t>4/6/2026</a:t>
             </a:fld>
             <a:endParaRPr lang="en-US"/>
           </a:p>
@@ -2448,7 +2448,7 @@
           <a:p>
             <a:fld id="{6383FAE1-13DE-4511-8C1B-C8AFB720664C}" type="datetimeFigureOut">
               <a:rPr lang="en-US" smtClean="0"/>
-              <a:t>4/4/2026</a:t>
+              <a:t>4/6/2026</a:t>
             </a:fld>
             <a:endParaRPr lang="en-US"/>
           </a:p>
@@ -2656,7 +2656,7 @@
           <a:p>
             <a:fld id="{6383FAE1-13DE-4511-8C1B-C8AFB720664C}" type="datetimeFigureOut">
               <a:rPr lang="en-US" smtClean="0"/>
-              <a:t>4/4/2026</a:t>
+              <a:t>4/6/2026</a:t>
             </a:fld>
             <a:endParaRPr lang="en-US"/>
           </a:p>
@@ -2854,7 +2854,7 @@
           <a:p>
             <a:fld id="{6383FAE1-13DE-4511-8C1B-C8AFB720664C}" type="datetimeFigureOut">
               <a:rPr lang="en-US" smtClean="0"/>
-              <a:t>4/4/2026</a:t>
+              <a:t>4/6/2026</a:t>
             </a:fld>
             <a:endParaRPr lang="en-US"/>
           </a:p>
@@ -3129,7 +3129,7 @@
           <a:p>
             <a:fld id="{6383FAE1-13DE-4511-8C1B-C8AFB720664C}" type="datetimeFigureOut">
               <a:rPr lang="en-US" smtClean="0"/>
-              <a:t>4/4/2026</a:t>
+              <a:t>4/6/2026</a:t>
             </a:fld>
             <a:endParaRPr lang="en-US"/>
           </a:p>
@@ -3394,7 +3394,7 @@
           <a:p>
             <a:fld id="{6383FAE1-13DE-4511-8C1B-C8AFB720664C}" type="datetimeFigureOut">
               <a:rPr lang="en-US" smtClean="0"/>
-              <a:t>4/4/2026</a:t>
+              <a:t>4/6/2026</a:t>
             </a:fld>
             <a:endParaRPr lang="en-US"/>
           </a:p>
@@ -3806,7 +3806,7 @@
           <a:p>
             <a:fld id="{6383FAE1-13DE-4511-8C1B-C8AFB720664C}" type="datetimeFigureOut">
               <a:rPr lang="en-US" smtClean="0"/>
-              <a:t>4/4/2026</a:t>
+              <a:t>4/6/2026</a:t>
             </a:fld>
             <a:endParaRPr lang="en-US"/>
           </a:p>
@@ -3947,7 +3947,7 @@
           <a:p>
             <a:fld id="{6383FAE1-13DE-4511-8C1B-C8AFB720664C}" type="datetimeFigureOut">
               <a:rPr lang="en-US" smtClean="0"/>
-              <a:t>4/4/2026</a:t>
+              <a:t>4/6/2026</a:t>
             </a:fld>
             <a:endParaRPr lang="en-US"/>
           </a:p>
@@ -4060,7 +4060,7 @@
           <a:p>
             <a:fld id="{6383FAE1-13DE-4511-8C1B-C8AFB720664C}" type="datetimeFigureOut">
               <a:rPr lang="en-US" smtClean="0"/>
-              <a:t>4/4/2026</a:t>
+              <a:t>4/6/2026</a:t>
             </a:fld>
             <a:endParaRPr lang="en-US"/>
           </a:p>
@@ -4371,7 +4371,7 @@
           <a:p>
             <a:fld id="{6383FAE1-13DE-4511-8C1B-C8AFB720664C}" type="datetimeFigureOut">
               <a:rPr lang="en-US" smtClean="0"/>
-              <a:t>4/4/2026</a:t>
+              <a:t>4/6/2026</a:t>
             </a:fld>
             <a:endParaRPr lang="en-US"/>
           </a:p>
@@ -4662,7 +4662,7 @@
           <a:p>
             <a:fld id="{6383FAE1-13DE-4511-8C1B-C8AFB720664C}" type="datetimeFigureOut">
               <a:rPr lang="en-US" smtClean="0"/>
-              <a:t>4/4/2026</a:t>
+              <a:t>4/6/2026</a:t>
             </a:fld>
             <a:endParaRPr lang="en-US"/>
           </a:p>
@@ -4906,7 +4906,7 @@
           <a:p>
             <a:fld id="{6383FAE1-13DE-4511-8C1B-C8AFB720664C}" type="datetimeFigureOut">
               <a:rPr lang="en-US" smtClean="0"/>
-              <a:t>4/4/2026</a:t>
+              <a:t>4/6/2026</a:t>
             </a:fld>
             <a:endParaRPr lang="en-US"/>
           </a:p>
@@ -5551,6 +5551,233 @@
         <p:cNvPr id="1" name="">
           <a:extLst>
             <a:ext uri="{FF2B5EF4-FFF2-40B4-BE49-F238E27FC236}">
+              <a16:creationId xmlns:a16="http://schemas.microsoft.com/office/drawing/2014/main" id="{8A5B7A8B-4B7C-9CB3-BEDC-B7194BAA0671}"/>
+            </a:ext>
+          </a:extLst>
+        </p:cNvPr>
+        <p:cNvGrpSpPr/>
+        <p:nvPr/>
+      </p:nvGrpSpPr>
+      <p:grpSpPr>
+        <a:xfrm>
+          <a:off x="0" y="0"/>
+          <a:ext cx="0" cy="0"/>
+          <a:chOff x="0" y="0"/>
+          <a:chExt cx="0" cy="0"/>
+        </a:xfrm>
+      </p:grpSpPr>
+      <p:sp>
+        <p:nvSpPr>
+          <p:cNvPr id="6" name="TextBox 5">
+            <a:extLst>
+              <a:ext uri="{FF2B5EF4-FFF2-40B4-BE49-F238E27FC236}">
+                <a16:creationId xmlns:a16="http://schemas.microsoft.com/office/drawing/2014/main" id="{BB2F4960-A2C1-266F-5F11-F3F693A037F5}"/>
+              </a:ext>
+            </a:extLst>
+          </p:cNvPr>
+          <p:cNvSpPr txBox="1"/>
+          <p:nvPr/>
+        </p:nvSpPr>
+        <p:spPr>
+          <a:xfrm>
+            <a:off x="201167" y="79414"/>
+            <a:ext cx="11807951" cy="1569660"/>
+          </a:xfrm>
+          <a:prstGeom prst="rect">
+            <a:avLst/>
+          </a:prstGeom>
+          <a:noFill/>
+        </p:spPr>
+        <p:txBody>
+          <a:bodyPr wrap="square">
+            <a:spAutoFit/>
+          </a:bodyPr>
+          <a:lstStyle/>
+          <a:p>
+            <a:r>
+              <a:rPr lang="en-IN" sz="2400" dirty="0">
+                <a:solidFill>
+                  <a:schemeClr val="accent6">
+                    <a:lumMod val="60000"/>
+                    <a:lumOff val="40000"/>
+                  </a:schemeClr>
+                </a:solidFill>
+              </a:rPr>
+              <a:t>For each neuron, the </a:t>
+            </a:r>
+            <a:r>
+              <a:rPr lang="en-IN" sz="2400" b="1" dirty="0">
+                <a:solidFill>
+                  <a:schemeClr val="accent6">
+                    <a:lumMod val="60000"/>
+                    <a:lumOff val="40000"/>
+                  </a:schemeClr>
+                </a:solidFill>
+              </a:rPr>
+              <a:t>process</a:t>
+            </a:r>
+            <a:r>
+              <a:rPr lang="en-IN" sz="2400" dirty="0">
+                <a:solidFill>
+                  <a:schemeClr val="accent6">
+                    <a:lumMod val="60000"/>
+                    <a:lumOff val="40000"/>
+                  </a:schemeClr>
+                </a:solidFill>
+              </a:rPr>
+              <a:t> is</a:t>
+            </a:r>
+          </a:p>
+          <a:p>
+            <a:pPr marL="457200" lvl="0" indent="-457200">
+              <a:buFont typeface="+mj-lt"/>
+              <a:buAutoNum type="arabicPeriod"/>
+            </a:pPr>
+            <a:r>
+              <a:rPr lang="en-IN" sz="2400" dirty="0">
+                <a:solidFill>
+                  <a:schemeClr val="accent4">
+                    <a:lumMod val="60000"/>
+                    <a:lumOff val="40000"/>
+                  </a:schemeClr>
+                </a:solidFill>
+              </a:rPr>
+              <a:t>Take weighted sum of inputs and add a bias term ( i.e. calculate </a:t>
+            </a:r>
+            <a:r>
+              <a:rPr lang="en-IN" sz="2400" b="1" dirty="0">
+                <a:solidFill>
+                  <a:schemeClr val="accent4">
+                    <a:lumMod val="60000"/>
+                    <a:lumOff val="40000"/>
+                  </a:schemeClr>
+                </a:solidFill>
+              </a:rPr>
+              <a:t>Z </a:t>
+            </a:r>
+            <a:r>
+              <a:rPr lang="en-IN" sz="2400" dirty="0">
+                <a:solidFill>
+                  <a:schemeClr val="accent4">
+                    <a:lumMod val="60000"/>
+                    <a:lumOff val="40000"/>
+                  </a:schemeClr>
+                </a:solidFill>
+              </a:rPr>
+              <a:t>),</a:t>
+            </a:r>
+            <a:endParaRPr lang="en-US" sz="2400" dirty="0">
+              <a:solidFill>
+                <a:schemeClr val="accent4">
+                  <a:lumMod val="60000"/>
+                  <a:lumOff val="40000"/>
+                </a:schemeClr>
+              </a:solidFill>
+            </a:endParaRPr>
+          </a:p>
+          <a:p>
+            <a:pPr marL="457200" lvl="0" indent="-457200">
+              <a:buFont typeface="+mj-lt"/>
+              <a:buAutoNum type="arabicPeriod"/>
+            </a:pPr>
+            <a:r>
+              <a:rPr lang="en-IN" sz="2400" dirty="0">
+                <a:solidFill>
+                  <a:schemeClr val="accent6">
+                    <a:lumMod val="60000"/>
+                    <a:lumOff val="40000"/>
+                  </a:schemeClr>
+                </a:solidFill>
+              </a:rPr>
+              <a:t>Apply activation function</a:t>
+            </a:r>
+            <a:endParaRPr lang="en-US" sz="2400" dirty="0">
+              <a:solidFill>
+                <a:schemeClr val="accent6">
+                  <a:lumMod val="60000"/>
+                  <a:lumOff val="40000"/>
+                </a:schemeClr>
+              </a:solidFill>
+            </a:endParaRPr>
+          </a:p>
+          <a:p>
+            <a:pPr marL="457200" lvl="0" indent="-457200">
+              <a:buFont typeface="+mj-lt"/>
+              <a:buAutoNum type="arabicPeriod"/>
+            </a:pPr>
+            <a:r>
+              <a:rPr lang="en-IN" sz="2400" dirty="0">
+                <a:solidFill>
+                  <a:schemeClr val="accent6">
+                    <a:lumMod val="60000"/>
+                    <a:lumOff val="40000"/>
+                  </a:schemeClr>
+                </a:solidFill>
+              </a:rPr>
+              <a:t>Pass result to next neurons (next layer)</a:t>
+            </a:r>
+            <a:endParaRPr lang="en-US" sz="2400" dirty="0">
+              <a:solidFill>
+                <a:schemeClr val="accent6">
+                  <a:lumMod val="60000"/>
+                  <a:lumOff val="40000"/>
+                </a:schemeClr>
+              </a:solidFill>
+            </a:endParaRPr>
+          </a:p>
+        </p:txBody>
+      </p:sp>
+      <p:pic>
+        <p:nvPicPr>
+          <p:cNvPr id="4" name="Picture 3">
+            <a:extLst>
+              <a:ext uri="{FF2B5EF4-FFF2-40B4-BE49-F238E27FC236}">
+                <a16:creationId xmlns:a16="http://schemas.microsoft.com/office/drawing/2014/main" id="{BE278EE1-8926-4098-6F68-4907F3059B0C}"/>
+              </a:ext>
+            </a:extLst>
+          </p:cNvPr>
+          <p:cNvPicPr>
+            <a:picLocks noChangeAspect="1"/>
+          </p:cNvPicPr>
+          <p:nvPr/>
+        </p:nvPicPr>
+        <p:blipFill>
+          <a:blip r:embed="rId2"/>
+          <a:stretch>
+            <a:fillRect/>
+          </a:stretch>
+        </p:blipFill>
+        <p:spPr>
+          <a:xfrm>
+            <a:off x="201167" y="1649074"/>
+            <a:ext cx="7506748" cy="3991532"/>
+          </a:xfrm>
+          <a:prstGeom prst="rect">
+            <a:avLst/>
+          </a:prstGeom>
+        </p:spPr>
+      </p:pic>
+    </p:spTree>
+    <p:extLst>
+      <p:ext uri="{BB962C8B-B14F-4D97-AF65-F5344CB8AC3E}">
+        <p14:creationId xmlns:p14="http://schemas.microsoft.com/office/powerpoint/2010/main" val="877306766"/>
+      </p:ext>
+    </p:extLst>
+  </p:cSld>
+  <p:clrMapOvr>
+    <a:masterClrMapping/>
+  </p:clrMapOvr>
+</p:sld>
+</file>
+
+<file path=ppt/slides/slide11.xml><?xml version="1.0" encoding="utf-8"?>
+<p:sld xmlns:a="http://schemas.openxmlformats.org/drawingml/2006/main" xmlns:r="http://schemas.openxmlformats.org/officeDocument/2006/relationships" xmlns:p="http://schemas.openxmlformats.org/presentationml/2006/main">
+  <p:cSld>
+    <p:spTree>
+      <p:nvGrpSpPr>
+        <p:cNvPr id="1" name="">
+          <a:extLst>
+            <a:ext uri="{FF2B5EF4-FFF2-40B4-BE49-F238E27FC236}">
               <a16:creationId xmlns:a16="http://schemas.microsoft.com/office/drawing/2014/main" id="{4CFDD899-2B55-7EB4-801B-7B8F1F8E10F4}"/>
             </a:ext>
           </a:extLst>
@@ -5729,10 +5956,10 @@
       </p:sp>
       <p:pic>
         <p:nvPicPr>
-          <p:cNvPr id="3" name="Picture 2">
-            <a:extLst>
-              <a:ext uri="{FF2B5EF4-FFF2-40B4-BE49-F238E27FC236}">
-                <a16:creationId xmlns:a16="http://schemas.microsoft.com/office/drawing/2014/main" id="{2EE4CDEE-C751-2430-E2F6-5175B8B850FA}"/>
+          <p:cNvPr id="4" name="Picture 3">
+            <a:extLst>
+              <a:ext uri="{FF2B5EF4-FFF2-40B4-BE49-F238E27FC236}">
+                <a16:creationId xmlns:a16="http://schemas.microsoft.com/office/drawing/2014/main" id="{703D809D-AD5A-D77D-5F74-69E6E7B37F65}"/>
               </a:ext>
             </a:extLst>
           </p:cNvPr>
@@ -5749,8 +5976,8 @@
         </p:blipFill>
         <p:spPr>
           <a:xfrm>
-            <a:off x="159024" y="1653475"/>
-            <a:ext cx="7502652" cy="3551050"/>
+            <a:off x="201167" y="1649074"/>
+            <a:ext cx="7506748" cy="3991532"/>
           </a:xfrm>
           <a:prstGeom prst="rect">
             <a:avLst/>
@@ -5762,7 +5989,7 @@
           <p:cNvPr id="5" name="Picture 4">
             <a:extLst>
               <a:ext uri="{FF2B5EF4-FFF2-40B4-BE49-F238E27FC236}">
-                <a16:creationId xmlns:a16="http://schemas.microsoft.com/office/drawing/2014/main" id="{E246E5F3-52DF-6354-A9A9-FA70C92FA436}"/>
+                <a16:creationId xmlns:a16="http://schemas.microsoft.com/office/drawing/2014/main" id="{E79E0E5E-83ED-652D-CBB9-CD0402BF594B}"/>
               </a:ext>
             </a:extLst>
           </p:cNvPr>
@@ -5779,8 +6006,8 @@
         </p:blipFill>
         <p:spPr>
           <a:xfrm>
-            <a:off x="7892620" y="1773936"/>
-            <a:ext cx="3495485" cy="2294155"/>
+            <a:off x="8144165" y="2487168"/>
+            <a:ext cx="3846668" cy="2761711"/>
           </a:xfrm>
           <a:prstGeom prst="rect">
             <a:avLst/>
@@ -5800,7 +6027,7 @@
 </p:sld>
 </file>
 
-<file path=ppt/slides/slide11.xml><?xml version="1.0" encoding="utf-8"?>
+<file path=ppt/slides/slide12.xml><?xml version="1.0" encoding="utf-8"?>
 <p:sld xmlns:a="http://schemas.openxmlformats.org/drawingml/2006/main" xmlns:r="http://schemas.openxmlformats.org/officeDocument/2006/relationships" xmlns:p="http://schemas.openxmlformats.org/presentationml/2006/main">
   <p:cSld>
     <p:spTree>
@@ -5986,10 +6213,10 @@
       </p:sp>
       <p:pic>
         <p:nvPicPr>
-          <p:cNvPr id="10" name="Picture 9">
-            <a:extLst>
-              <a:ext uri="{FF2B5EF4-FFF2-40B4-BE49-F238E27FC236}">
-                <a16:creationId xmlns:a16="http://schemas.microsoft.com/office/drawing/2014/main" id="{2AF63CA1-42AB-2318-CFD1-735A57B10A77}"/>
+          <p:cNvPr id="5" name="Picture 4">
+            <a:extLst>
+              <a:ext uri="{FF2B5EF4-FFF2-40B4-BE49-F238E27FC236}">
+                <a16:creationId xmlns:a16="http://schemas.microsoft.com/office/drawing/2014/main" id="{B5D8937B-9814-1799-FDF3-1278206B7417}"/>
               </a:ext>
             </a:extLst>
           </p:cNvPr>
@@ -6006,14 +6233,68 @@
         </p:blipFill>
         <p:spPr>
           <a:xfrm>
-            <a:off x="1754497" y="2325934"/>
-            <a:ext cx="7295176" cy="4364558"/>
+            <a:off x="100584" y="2224687"/>
+            <a:ext cx="7392845" cy="4614760"/>
           </a:xfrm>
           <a:prstGeom prst="rect">
             <a:avLst/>
           </a:prstGeom>
         </p:spPr>
       </p:pic>
+      <p:sp>
+        <p:nvSpPr>
+          <p:cNvPr id="7" name="TextBox 6">
+            <a:extLst>
+              <a:ext uri="{FF2B5EF4-FFF2-40B4-BE49-F238E27FC236}">
+                <a16:creationId xmlns:a16="http://schemas.microsoft.com/office/drawing/2014/main" id="{E34F29FD-8BB7-FF94-D6D3-B92869D9EB01}"/>
+              </a:ext>
+            </a:extLst>
+          </p:cNvPr>
+          <p:cNvSpPr txBox="1"/>
+          <p:nvPr/>
+        </p:nvSpPr>
+        <p:spPr>
+          <a:xfrm>
+            <a:off x="7603236" y="2292019"/>
+            <a:ext cx="4732020" cy="1200329"/>
+          </a:xfrm>
+          <a:prstGeom prst="rect">
+            <a:avLst/>
+          </a:prstGeom>
+          <a:noFill/>
+        </p:spPr>
+        <p:txBody>
+          <a:bodyPr wrap="square">
+            <a:spAutoFit/>
+          </a:bodyPr>
+          <a:lstStyle/>
+          <a:p>
+            <a:pPr marL="342900" indent="-342900">
+              <a:buFont typeface="Arial" panose="020B0604020202020204" pitchFamily="34" charset="0"/>
+              <a:buChar char="•"/>
+            </a:pPr>
+            <a:r>
+              <a:rPr lang="en-IN" sz="2400" dirty="0">
+                <a:solidFill>
+                  <a:schemeClr val="accent6">
+                    <a:lumMod val="60000"/>
+                    <a:lumOff val="40000"/>
+                  </a:schemeClr>
+                </a:solidFill>
+              </a:rPr>
+              <a:t>Each layer contains multiple neurons that perform similar computations.</a:t>
+            </a:r>
+            <a:endParaRPr lang="en-US" sz="2400" dirty="0">
+              <a:solidFill>
+                <a:schemeClr val="accent6">
+                  <a:lumMod val="60000"/>
+                  <a:lumOff val="40000"/>
+                </a:schemeClr>
+              </a:solidFill>
+            </a:endParaRPr>
+          </a:p>
+        </p:txBody>
+      </p:sp>
     </p:spTree>
     <p:extLst>
       <p:ext uri="{BB962C8B-B14F-4D97-AF65-F5344CB8AC3E}">
@@ -6027,7 +6308,7 @@
 </p:sld>
 </file>
 
-<file path=ppt/slides/slide12.xml><?xml version="1.0" encoding="utf-8"?>
+<file path=ppt/slides/slide13.xml><?xml version="1.0" encoding="utf-8"?>
 <p:sld xmlns:a="http://schemas.openxmlformats.org/drawingml/2006/main" xmlns:r="http://schemas.openxmlformats.org/officeDocument/2006/relationships" xmlns:p="http://schemas.openxmlformats.org/presentationml/2006/main">
   <p:cSld>
     <p:spTree>
@@ -6187,10 +6468,10 @@
       </p:sp>
       <p:pic>
         <p:nvPicPr>
-          <p:cNvPr id="5" name="Picture 4">
-            <a:extLst>
-              <a:ext uri="{FF2B5EF4-FFF2-40B4-BE49-F238E27FC236}">
-                <a16:creationId xmlns:a16="http://schemas.microsoft.com/office/drawing/2014/main" id="{7BABD9D3-D18B-9246-F097-753D62F0828A}"/>
+          <p:cNvPr id="3" name="Picture 2">
+            <a:extLst>
+              <a:ext uri="{FF2B5EF4-FFF2-40B4-BE49-F238E27FC236}">
+                <a16:creationId xmlns:a16="http://schemas.microsoft.com/office/drawing/2014/main" id="{7B214690-3040-2B12-8D4F-2189E8AB8353}"/>
               </a:ext>
             </a:extLst>
           </p:cNvPr>
@@ -6207,8 +6488,8 @@
         </p:blipFill>
         <p:spPr>
           <a:xfrm>
-            <a:off x="1754497" y="2325934"/>
-            <a:ext cx="7295176" cy="4364558"/>
+            <a:off x="100584" y="2224687"/>
+            <a:ext cx="7392845" cy="4614760"/>
           </a:xfrm>
           <a:prstGeom prst="rect">
             <a:avLst/>
@@ -6219,249 +6500,6 @@
     <p:extLst>
       <p:ext uri="{BB962C8B-B14F-4D97-AF65-F5344CB8AC3E}">
         <p14:creationId xmlns:p14="http://schemas.microsoft.com/office/powerpoint/2010/main" val="898538181"/>
-      </p:ext>
-    </p:extLst>
-  </p:cSld>
-  <p:clrMapOvr>
-    <a:masterClrMapping/>
-  </p:clrMapOvr>
-</p:sld>
-</file>
-
-<file path=ppt/slides/slide13.xml><?xml version="1.0" encoding="utf-8"?>
-<p:sld xmlns:a="http://schemas.openxmlformats.org/drawingml/2006/main" xmlns:r="http://schemas.openxmlformats.org/officeDocument/2006/relationships" xmlns:p="http://schemas.openxmlformats.org/presentationml/2006/main">
-  <p:cSld>
-    <p:spTree>
-      <p:nvGrpSpPr>
-        <p:cNvPr id="1" name="">
-          <a:extLst>
-            <a:ext uri="{FF2B5EF4-FFF2-40B4-BE49-F238E27FC236}">
-              <a16:creationId xmlns:a16="http://schemas.microsoft.com/office/drawing/2014/main" id="{8855355D-154C-8CFD-8B31-7A4AD26D7803}"/>
-            </a:ext>
-          </a:extLst>
-        </p:cNvPr>
-        <p:cNvGrpSpPr/>
-        <p:nvPr/>
-      </p:nvGrpSpPr>
-      <p:grpSpPr>
-        <a:xfrm>
-          <a:off x="0" y="0"/>
-          <a:ext cx="0" cy="0"/>
-          <a:chOff x="0" y="0"/>
-          <a:chExt cx="0" cy="0"/>
-        </a:xfrm>
-      </p:grpSpPr>
-      <p:sp>
-        <p:nvSpPr>
-          <p:cNvPr id="6" name="TextBox 5">
-            <a:extLst>
-              <a:ext uri="{FF2B5EF4-FFF2-40B4-BE49-F238E27FC236}">
-                <a16:creationId xmlns:a16="http://schemas.microsoft.com/office/drawing/2014/main" id="{400E6FB7-3D30-4577-96A6-8ABFE08615AA}"/>
-              </a:ext>
-            </a:extLst>
-          </p:cNvPr>
-          <p:cNvSpPr txBox="1"/>
-          <p:nvPr/>
-        </p:nvSpPr>
-        <p:spPr>
-          <a:xfrm>
-            <a:off x="201168" y="97702"/>
-            <a:ext cx="11228832" cy="830997"/>
-          </a:xfrm>
-          <a:prstGeom prst="rect">
-            <a:avLst/>
-          </a:prstGeom>
-          <a:noFill/>
-        </p:spPr>
-        <p:txBody>
-          <a:bodyPr wrap="square">
-            <a:spAutoFit/>
-          </a:bodyPr>
-          <a:lstStyle/>
-          <a:p>
-            <a:pPr marL="342900" indent="-342900">
-              <a:buFont typeface="Arial" panose="020B0604020202020204" pitchFamily="34" charset="0"/>
-              <a:buChar char="•"/>
-            </a:pPr>
-            <a:r>
-              <a:rPr lang="en-IN" sz="2400" b="1" dirty="0">
-                <a:solidFill>
-                  <a:schemeClr val="accent6">
-                    <a:lumMod val="60000"/>
-                    <a:lumOff val="40000"/>
-                  </a:schemeClr>
-                </a:solidFill>
-              </a:rPr>
-              <a:t>Activation Functions</a:t>
-            </a:r>
-            <a:r>
-              <a:rPr lang="en-IN" sz="2400" dirty="0">
-                <a:solidFill>
-                  <a:schemeClr val="accent6">
-                    <a:lumMod val="60000"/>
-                    <a:lumOff val="40000"/>
-                  </a:schemeClr>
-                </a:solidFill>
-              </a:rPr>
-              <a:t>: Each neuron applies a non-linear function (like </a:t>
-            </a:r>
-            <a:r>
-              <a:rPr lang="en-IN" sz="2400" dirty="0" err="1">
-                <a:solidFill>
-                  <a:schemeClr val="accent6">
-                    <a:lumMod val="60000"/>
-                    <a:lumOff val="40000"/>
-                  </a:schemeClr>
-                </a:solidFill>
-              </a:rPr>
-              <a:t>ReLU</a:t>
-            </a:r>
-            <a:r>
-              <a:rPr lang="en-IN" sz="2400" dirty="0">
-                <a:solidFill>
-                  <a:schemeClr val="accent6">
-                    <a:lumMod val="60000"/>
-                    <a:lumOff val="40000"/>
-                  </a:schemeClr>
-                </a:solidFill>
-              </a:rPr>
-              <a:t>, sigmoid, or tanh) to enable the network to learn non-linear patterns.</a:t>
-            </a:r>
-            <a:endParaRPr lang="en-US" sz="2400" dirty="0">
-              <a:solidFill>
-                <a:schemeClr val="accent6">
-                  <a:lumMod val="60000"/>
-                  <a:lumOff val="40000"/>
-                </a:schemeClr>
-              </a:solidFill>
-            </a:endParaRPr>
-          </a:p>
-        </p:txBody>
-      </p:sp>
-      <p:pic>
-        <p:nvPicPr>
-          <p:cNvPr id="3" name="Picture 2">
-            <a:extLst>
-              <a:ext uri="{FF2B5EF4-FFF2-40B4-BE49-F238E27FC236}">
-                <a16:creationId xmlns:a16="http://schemas.microsoft.com/office/drawing/2014/main" id="{0E2B3993-757F-90BF-BD22-ED1B2B6F4985}"/>
-              </a:ext>
-            </a:extLst>
-          </p:cNvPr>
-          <p:cNvPicPr>
-            <a:picLocks noChangeAspect="1"/>
-          </p:cNvPicPr>
-          <p:nvPr/>
-        </p:nvPicPr>
-        <p:blipFill>
-          <a:blip r:embed="rId2"/>
-          <a:stretch>
-            <a:fillRect/>
-          </a:stretch>
-        </p:blipFill>
-        <p:spPr>
-          <a:xfrm>
-            <a:off x="201168" y="2157984"/>
-            <a:ext cx="3739478" cy="2321562"/>
-          </a:xfrm>
-          <a:prstGeom prst="rect">
-            <a:avLst/>
-          </a:prstGeom>
-        </p:spPr>
-      </p:pic>
-      <p:pic>
-        <p:nvPicPr>
-          <p:cNvPr id="4" name="Picture 3">
-            <a:extLst>
-              <a:ext uri="{FF2B5EF4-FFF2-40B4-BE49-F238E27FC236}">
-                <a16:creationId xmlns:a16="http://schemas.microsoft.com/office/drawing/2014/main" id="{C9E3A6CB-622E-CD6A-0C95-D1CE168A5644}"/>
-              </a:ext>
-            </a:extLst>
-          </p:cNvPr>
-          <p:cNvPicPr>
-            <a:picLocks noChangeAspect="1"/>
-          </p:cNvPicPr>
-          <p:nvPr/>
-        </p:nvPicPr>
-        <p:blipFill>
-          <a:blip r:embed="rId3"/>
-          <a:stretch>
-            <a:fillRect/>
-          </a:stretch>
-        </p:blipFill>
-        <p:spPr>
-          <a:xfrm>
-            <a:off x="4414869" y="4794384"/>
-            <a:ext cx="6931354" cy="2020987"/>
-          </a:xfrm>
-          <a:prstGeom prst="rect">
-            <a:avLst/>
-          </a:prstGeom>
-        </p:spPr>
-      </p:pic>
-      <p:pic>
-        <p:nvPicPr>
-          <p:cNvPr id="7" name="Picture 6">
-            <a:extLst>
-              <a:ext uri="{FF2B5EF4-FFF2-40B4-BE49-F238E27FC236}">
-                <a16:creationId xmlns:a16="http://schemas.microsoft.com/office/drawing/2014/main" id="{C0BD9DD2-0F57-2916-474C-B52F98002203}"/>
-              </a:ext>
-            </a:extLst>
-          </p:cNvPr>
-          <p:cNvPicPr>
-            <a:picLocks noChangeAspect="1"/>
-          </p:cNvPicPr>
-          <p:nvPr/>
-        </p:nvPicPr>
-        <p:blipFill>
-          <a:blip r:embed="rId4"/>
-          <a:stretch>
-            <a:fillRect/>
-          </a:stretch>
-        </p:blipFill>
-        <p:spPr>
-          <a:xfrm>
-            <a:off x="4414869" y="849042"/>
-            <a:ext cx="5858693" cy="1914792"/>
-          </a:xfrm>
-          <a:prstGeom prst="rect">
-            <a:avLst/>
-          </a:prstGeom>
-        </p:spPr>
-      </p:pic>
-      <p:pic>
-        <p:nvPicPr>
-          <p:cNvPr id="10" name="Picture 9">
-            <a:extLst>
-              <a:ext uri="{FF2B5EF4-FFF2-40B4-BE49-F238E27FC236}">
-                <a16:creationId xmlns:a16="http://schemas.microsoft.com/office/drawing/2014/main" id="{CDE7AAC1-3E7A-BDBF-9AED-80AEB9C0CA8C}"/>
-              </a:ext>
-            </a:extLst>
-          </p:cNvPr>
-          <p:cNvPicPr>
-            <a:picLocks noChangeAspect="1"/>
-          </p:cNvPicPr>
-          <p:nvPr/>
-        </p:nvPicPr>
-        <p:blipFill>
-          <a:blip r:embed="rId5"/>
-          <a:stretch>
-            <a:fillRect/>
-          </a:stretch>
-        </p:blipFill>
-        <p:spPr>
-          <a:xfrm>
-            <a:off x="4463638" y="2763834"/>
-            <a:ext cx="6172513" cy="2030550"/>
-          </a:xfrm>
-          <a:prstGeom prst="rect">
-            <a:avLst/>
-          </a:prstGeom>
-        </p:spPr>
-      </p:pic>
-    </p:spTree>
-    <p:extLst>
-      <p:ext uri="{BB962C8B-B14F-4D97-AF65-F5344CB8AC3E}">
-        <p14:creationId xmlns:p14="http://schemas.microsoft.com/office/powerpoint/2010/main" val="1054945946"/>
       </p:ext>
     </p:extLst>
   </p:cSld>
@@ -6531,7 +6569,7 @@
                   </a:schemeClr>
                 </a:solidFill>
               </a:rPr>
-              <a:t>Bias</a:t>
+              <a:t>Bias (b)</a:t>
             </a:r>
             <a:r>
               <a:rPr lang="en-US" sz="2400" dirty="0">
@@ -6628,10 +6666,10 @@
       </p:pic>
       <p:pic>
         <p:nvPicPr>
-          <p:cNvPr id="5" name="Picture 4">
-            <a:extLst>
-              <a:ext uri="{FF2B5EF4-FFF2-40B4-BE49-F238E27FC236}">
-                <a16:creationId xmlns:a16="http://schemas.microsoft.com/office/drawing/2014/main" id="{022F058B-0AA3-66BC-F1E5-E76682FACBF5}"/>
+          <p:cNvPr id="7" name="Picture 6">
+            <a:extLst>
+              <a:ext uri="{FF2B5EF4-FFF2-40B4-BE49-F238E27FC236}">
+                <a16:creationId xmlns:a16="http://schemas.microsoft.com/office/drawing/2014/main" id="{5B27E111-6E5E-BB09-C837-F5EECFBF94CD}"/>
               </a:ext>
             </a:extLst>
           </p:cNvPr>
@@ -6648,8 +6686,8 @@
         </p:blipFill>
         <p:spPr>
           <a:xfrm>
-            <a:off x="201168" y="2157984"/>
-            <a:ext cx="3739478" cy="2321562"/>
+            <a:off x="133958" y="2039111"/>
+            <a:ext cx="4090570" cy="2507629"/>
           </a:xfrm>
           <a:prstGeom prst="rect">
             <a:avLst/>
@@ -6677,7 +6715,7 @@
         <p:cNvPr id="1" name="">
           <a:extLst>
             <a:ext uri="{FF2B5EF4-FFF2-40B4-BE49-F238E27FC236}">
-              <a16:creationId xmlns:a16="http://schemas.microsoft.com/office/drawing/2014/main" id="{32D2770C-8221-7C87-CB0F-85E5F4D12D50}"/>
+              <a16:creationId xmlns:a16="http://schemas.microsoft.com/office/drawing/2014/main" id="{62335D9F-2EBD-7061-6943-4561857F33F0}"/>
             </a:ext>
           </a:extLst>
         </p:cNvPr>
@@ -6694,10 +6732,10 @@
       </p:grpSpPr>
       <p:sp>
         <p:nvSpPr>
-          <p:cNvPr id="12" name="TextBox 11">
-            <a:extLst>
-              <a:ext uri="{FF2B5EF4-FFF2-40B4-BE49-F238E27FC236}">
-                <a16:creationId xmlns:a16="http://schemas.microsoft.com/office/drawing/2014/main" id="{07480B5D-B556-6C6A-C0FD-9FF73E6DCCB1}"/>
+          <p:cNvPr id="6" name="TextBox 5">
+            <a:extLst>
+              <a:ext uri="{FF2B5EF4-FFF2-40B4-BE49-F238E27FC236}">
+                <a16:creationId xmlns:a16="http://schemas.microsoft.com/office/drawing/2014/main" id="{DB6461CB-DF24-BCB9-258A-679D5722A059}"/>
               </a:ext>
             </a:extLst>
           </p:cNvPr>
@@ -6706,8 +6744,8 @@
         </p:nvSpPr>
         <p:spPr>
           <a:xfrm>
-            <a:off x="1005840" y="2438566"/>
-            <a:ext cx="9820656" cy="646331"/>
+            <a:off x="192024" y="298870"/>
+            <a:ext cx="10773385" cy="1938992"/>
           </a:xfrm>
           <a:prstGeom prst="rect">
             <a:avLst/>
@@ -6720,18 +6758,22 @@
           </a:bodyPr>
           <a:lstStyle/>
           <a:p>
-            <a:r>
-              <a:rPr lang="en-US" sz="3600" b="1" dirty="0">
-                <a:solidFill>
-                  <a:schemeClr val="accent6">
-                    <a:lumMod val="60000"/>
-                    <a:lumOff val="40000"/>
-                  </a:schemeClr>
-                </a:solidFill>
-              </a:rPr>
-              <a:t>The workflow of mathematical model of neurons</a:t>
-            </a:r>
-            <a:endParaRPr lang="en-US" sz="3600" dirty="0">
+            <a:pPr fontAlgn="base"/>
+            <a:r>
+              <a:rPr lang="en-US" sz="2400" b="1" dirty="0">
+                <a:solidFill>
+                  <a:schemeClr val="accent6">
+                    <a:lumMod val="60000"/>
+                    <a:lumOff val="40000"/>
+                  </a:schemeClr>
+                </a:solidFill>
+              </a:rPr>
+              <a:t>THE WHOLE GAME OF NEURAL NETWORK IS FINDING WEIGHTS, BIAS, etc.</a:t>
+            </a:r>
+          </a:p>
+          <a:p>
+            <a:pPr fontAlgn="base"/>
+            <a:endParaRPr lang="en-US" sz="2400" dirty="0">
               <a:solidFill>
                 <a:schemeClr val="accent6">
                   <a:lumMod val="60000"/>
@@ -6740,12 +6782,67 @@
               </a:solidFill>
             </a:endParaRPr>
           </a:p>
+          <a:p>
+            <a:pPr fontAlgn="base"/>
+            <a:r>
+              <a:rPr lang="en-US" sz="2400" dirty="0">
+                <a:solidFill>
+                  <a:schemeClr val="accent6">
+                    <a:lumMod val="60000"/>
+                    <a:lumOff val="40000"/>
+                  </a:schemeClr>
+                </a:solidFill>
+              </a:rPr>
+              <a:t>The free parameters (bias + weights) of the neural network are determined from  training data. </a:t>
+            </a:r>
+          </a:p>
+          <a:p>
+            <a:pPr fontAlgn="base"/>
+            <a:endParaRPr lang="en-US" sz="2400" dirty="0">
+              <a:solidFill>
+                <a:schemeClr val="accent6">
+                  <a:lumMod val="60000"/>
+                  <a:lumOff val="40000"/>
+                </a:schemeClr>
+              </a:solidFill>
+            </a:endParaRPr>
+          </a:p>
         </p:txBody>
       </p:sp>
+      <p:pic>
+        <p:nvPicPr>
+          <p:cNvPr id="3" name="Picture 2">
+            <a:extLst>
+              <a:ext uri="{FF2B5EF4-FFF2-40B4-BE49-F238E27FC236}">
+                <a16:creationId xmlns:a16="http://schemas.microsoft.com/office/drawing/2014/main" id="{2C8B49E1-DA96-DAA3-4F58-106B5FB7499C}"/>
+              </a:ext>
+            </a:extLst>
+          </p:cNvPr>
+          <p:cNvPicPr>
+            <a:picLocks noChangeAspect="1"/>
+          </p:cNvPicPr>
+          <p:nvPr/>
+        </p:nvPicPr>
+        <p:blipFill>
+          <a:blip r:embed="rId2"/>
+          <a:stretch>
+            <a:fillRect/>
+          </a:stretch>
+        </p:blipFill>
+        <p:spPr>
+          <a:xfrm>
+            <a:off x="1313179" y="2020824"/>
+            <a:ext cx="9226327" cy="4668411"/>
+          </a:xfrm>
+          <a:prstGeom prst="rect">
+            <a:avLst/>
+          </a:prstGeom>
+        </p:spPr>
+      </p:pic>
     </p:spTree>
     <p:extLst>
       <p:ext uri="{BB962C8B-B14F-4D97-AF65-F5344CB8AC3E}">
-        <p14:creationId xmlns:p14="http://schemas.microsoft.com/office/powerpoint/2010/main" val="2992063597"/>
+        <p14:creationId xmlns:p14="http://schemas.microsoft.com/office/powerpoint/2010/main" val="537735629"/>
       </p:ext>
     </p:extLst>
   </p:cSld>
@@ -6756,6 +6853,258 @@
 </file>
 
 <file path=ppt/slides/slide16.xml><?xml version="1.0" encoding="utf-8"?>
+<p:sld xmlns:a="http://schemas.openxmlformats.org/drawingml/2006/main" xmlns:r="http://schemas.openxmlformats.org/officeDocument/2006/relationships" xmlns:p="http://schemas.openxmlformats.org/presentationml/2006/main">
+  <p:cSld>
+    <p:spTree>
+      <p:nvGrpSpPr>
+        <p:cNvPr id="1" name="">
+          <a:extLst>
+            <a:ext uri="{FF2B5EF4-FFF2-40B4-BE49-F238E27FC236}">
+              <a16:creationId xmlns:a16="http://schemas.microsoft.com/office/drawing/2014/main" id="{8855355D-154C-8CFD-8B31-7A4AD26D7803}"/>
+            </a:ext>
+          </a:extLst>
+        </p:cNvPr>
+        <p:cNvGrpSpPr/>
+        <p:nvPr/>
+      </p:nvGrpSpPr>
+      <p:grpSpPr>
+        <a:xfrm>
+          <a:off x="0" y="0"/>
+          <a:ext cx="0" cy="0"/>
+          <a:chOff x="0" y="0"/>
+          <a:chExt cx="0" cy="0"/>
+        </a:xfrm>
+      </p:grpSpPr>
+      <p:pic>
+        <p:nvPicPr>
+          <p:cNvPr id="7" name="Picture 6">
+            <a:extLst>
+              <a:ext uri="{FF2B5EF4-FFF2-40B4-BE49-F238E27FC236}">
+                <a16:creationId xmlns:a16="http://schemas.microsoft.com/office/drawing/2014/main" id="{C0BD9DD2-0F57-2916-474C-B52F98002203}"/>
+              </a:ext>
+            </a:extLst>
+          </p:cNvPr>
+          <p:cNvPicPr>
+            <a:picLocks noChangeAspect="1"/>
+          </p:cNvPicPr>
+          <p:nvPr/>
+        </p:nvPicPr>
+        <p:blipFill>
+          <a:blip r:embed="rId2"/>
+          <a:stretch>
+            <a:fillRect/>
+          </a:stretch>
+        </p:blipFill>
+        <p:spPr>
+          <a:xfrm>
+            <a:off x="4402559" y="839910"/>
+            <a:ext cx="5858693" cy="1914792"/>
+          </a:xfrm>
+          <a:prstGeom prst="rect">
+            <a:avLst/>
+          </a:prstGeom>
+        </p:spPr>
+      </p:pic>
+      <p:sp>
+        <p:nvSpPr>
+          <p:cNvPr id="6" name="TextBox 5">
+            <a:extLst>
+              <a:ext uri="{FF2B5EF4-FFF2-40B4-BE49-F238E27FC236}">
+                <a16:creationId xmlns:a16="http://schemas.microsoft.com/office/drawing/2014/main" id="{400E6FB7-3D30-4577-96A6-8ABFE08615AA}"/>
+              </a:ext>
+            </a:extLst>
+          </p:cNvPr>
+          <p:cNvSpPr txBox="1"/>
+          <p:nvPr/>
+        </p:nvSpPr>
+        <p:spPr>
+          <a:xfrm>
+            <a:off x="201168" y="97702"/>
+            <a:ext cx="11228832" cy="1200329"/>
+          </a:xfrm>
+          <a:prstGeom prst="rect">
+            <a:avLst/>
+          </a:prstGeom>
+          <a:noFill/>
+        </p:spPr>
+        <p:txBody>
+          <a:bodyPr wrap="square">
+            <a:spAutoFit/>
+          </a:bodyPr>
+          <a:lstStyle/>
+          <a:p>
+            <a:r>
+              <a:rPr lang="en-IN" sz="2400" b="1" dirty="0">
+                <a:solidFill>
+                  <a:schemeClr val="accent6">
+                    <a:lumMod val="60000"/>
+                    <a:lumOff val="40000"/>
+                  </a:schemeClr>
+                </a:solidFill>
+              </a:rPr>
+              <a:t>Activation Functions</a:t>
+            </a:r>
+            <a:r>
+              <a:rPr lang="en-IN" sz="2400" dirty="0">
+                <a:solidFill>
+                  <a:schemeClr val="accent6">
+                    <a:lumMod val="60000"/>
+                    <a:lumOff val="40000"/>
+                  </a:schemeClr>
+                </a:solidFill>
+              </a:rPr>
+              <a:t>: </a:t>
+            </a:r>
+          </a:p>
+          <a:p>
+            <a:r>
+              <a:rPr lang="en-IN" sz="2400" dirty="0">
+                <a:solidFill>
+                  <a:schemeClr val="accent6">
+                    <a:lumMod val="60000"/>
+                    <a:lumOff val="40000"/>
+                  </a:schemeClr>
+                </a:solidFill>
+              </a:rPr>
+              <a:t>Each neuron applies a non-linear function (like </a:t>
+            </a:r>
+            <a:r>
+              <a:rPr lang="en-IN" sz="2400" dirty="0" err="1">
+                <a:solidFill>
+                  <a:schemeClr val="accent6">
+                    <a:lumMod val="60000"/>
+                    <a:lumOff val="40000"/>
+                  </a:schemeClr>
+                </a:solidFill>
+              </a:rPr>
+              <a:t>ReLU</a:t>
+            </a:r>
+            <a:r>
+              <a:rPr lang="en-IN" sz="2400" dirty="0">
+                <a:solidFill>
+                  <a:schemeClr val="accent6">
+                    <a:lumMod val="60000"/>
+                    <a:lumOff val="40000"/>
+                  </a:schemeClr>
+                </a:solidFill>
+              </a:rPr>
+              <a:t>, sigmoid, or tanh) to enable the network to learn non-linear patterns.</a:t>
+            </a:r>
+            <a:endParaRPr lang="en-US" sz="2400" dirty="0">
+              <a:solidFill>
+                <a:schemeClr val="accent6">
+                  <a:lumMod val="60000"/>
+                  <a:lumOff val="40000"/>
+                </a:schemeClr>
+              </a:solidFill>
+            </a:endParaRPr>
+          </a:p>
+        </p:txBody>
+      </p:sp>
+      <p:pic>
+        <p:nvPicPr>
+          <p:cNvPr id="4" name="Picture 3">
+            <a:extLst>
+              <a:ext uri="{FF2B5EF4-FFF2-40B4-BE49-F238E27FC236}">
+                <a16:creationId xmlns:a16="http://schemas.microsoft.com/office/drawing/2014/main" id="{C9E3A6CB-622E-CD6A-0C95-D1CE168A5644}"/>
+              </a:ext>
+            </a:extLst>
+          </p:cNvPr>
+          <p:cNvPicPr>
+            <a:picLocks noChangeAspect="1"/>
+          </p:cNvPicPr>
+          <p:nvPr/>
+        </p:nvPicPr>
+        <p:blipFill>
+          <a:blip r:embed="rId3"/>
+          <a:stretch>
+            <a:fillRect/>
+          </a:stretch>
+        </p:blipFill>
+        <p:spPr>
+          <a:xfrm>
+            <a:off x="3866229" y="4843131"/>
+            <a:ext cx="6931354" cy="2020987"/>
+          </a:xfrm>
+          <a:prstGeom prst="rect">
+            <a:avLst/>
+          </a:prstGeom>
+        </p:spPr>
+      </p:pic>
+      <p:pic>
+        <p:nvPicPr>
+          <p:cNvPr id="10" name="Picture 9">
+            <a:extLst>
+              <a:ext uri="{FF2B5EF4-FFF2-40B4-BE49-F238E27FC236}">
+                <a16:creationId xmlns:a16="http://schemas.microsoft.com/office/drawing/2014/main" id="{CDE7AAC1-3E7A-BDBF-9AED-80AEB9C0CA8C}"/>
+              </a:ext>
+            </a:extLst>
+          </p:cNvPr>
+          <p:cNvPicPr>
+            <a:picLocks noChangeAspect="1"/>
+          </p:cNvPicPr>
+          <p:nvPr/>
+        </p:nvPicPr>
+        <p:blipFill>
+          <a:blip r:embed="rId4"/>
+          <a:stretch>
+            <a:fillRect/>
+          </a:stretch>
+        </p:blipFill>
+        <p:spPr>
+          <a:xfrm>
+            <a:off x="4559710" y="2812581"/>
+            <a:ext cx="6172513" cy="2030550"/>
+          </a:xfrm>
+          <a:prstGeom prst="rect">
+            <a:avLst/>
+          </a:prstGeom>
+        </p:spPr>
+      </p:pic>
+      <p:pic>
+        <p:nvPicPr>
+          <p:cNvPr id="5" name="Picture 4">
+            <a:extLst>
+              <a:ext uri="{FF2B5EF4-FFF2-40B4-BE49-F238E27FC236}">
+                <a16:creationId xmlns:a16="http://schemas.microsoft.com/office/drawing/2014/main" id="{0D49C54C-E900-AA44-FA36-5788F2FEE527}"/>
+              </a:ext>
+            </a:extLst>
+          </p:cNvPr>
+          <p:cNvPicPr>
+            <a:picLocks noChangeAspect="1"/>
+          </p:cNvPicPr>
+          <p:nvPr/>
+        </p:nvPicPr>
+        <p:blipFill>
+          <a:blip r:embed="rId5"/>
+          <a:stretch>
+            <a:fillRect/>
+          </a:stretch>
+        </p:blipFill>
+        <p:spPr>
+          <a:xfrm>
+            <a:off x="133958" y="2039111"/>
+            <a:ext cx="4090570" cy="2507629"/>
+          </a:xfrm>
+          <a:prstGeom prst="rect">
+            <a:avLst/>
+          </a:prstGeom>
+        </p:spPr>
+      </p:pic>
+    </p:spTree>
+    <p:extLst>
+      <p:ext uri="{BB962C8B-B14F-4D97-AF65-F5344CB8AC3E}">
+        <p14:creationId xmlns:p14="http://schemas.microsoft.com/office/powerpoint/2010/main" val="1054945946"/>
+      </p:ext>
+    </p:extLst>
+  </p:cSld>
+  <p:clrMapOvr>
+    <a:masterClrMapping/>
+  </p:clrMapOvr>
+</p:sld>
+</file>
+
+<file path=ppt/slides/slide17.xml><?xml version="1.0" encoding="utf-8"?>
 <p:sld xmlns:a="http://schemas.openxmlformats.org/drawingml/2006/main" xmlns:r="http://schemas.openxmlformats.org/officeDocument/2006/relationships" xmlns:p="http://schemas.openxmlformats.org/presentationml/2006/main">
   <p:cSld>
     <p:spTree>
@@ -7052,10 +7401,10 @@
       </p:sp>
       <p:pic>
         <p:nvPicPr>
-          <p:cNvPr id="2" name="Picture 1">
-            <a:extLst>
-              <a:ext uri="{FF2B5EF4-FFF2-40B4-BE49-F238E27FC236}">
-                <a16:creationId xmlns:a16="http://schemas.microsoft.com/office/drawing/2014/main" id="{EE877D9D-BFB9-75B4-A547-AB01376510A3}"/>
+          <p:cNvPr id="7" name="Picture 6">
+            <a:extLst>
+              <a:ext uri="{FF2B5EF4-FFF2-40B4-BE49-F238E27FC236}">
+                <a16:creationId xmlns:a16="http://schemas.microsoft.com/office/drawing/2014/main" id="{98ED31B2-492B-2D00-9F3A-E21FCD37DD37}"/>
               </a:ext>
             </a:extLst>
           </p:cNvPr>
@@ -7072,8 +7421,8 @@
         </p:blipFill>
         <p:spPr>
           <a:xfrm>
-            <a:off x="2331720" y="2925615"/>
-            <a:ext cx="6191184" cy="3587795"/>
+            <a:off x="2505456" y="3004307"/>
+            <a:ext cx="6645740" cy="3853693"/>
           </a:xfrm>
           <a:prstGeom prst="rect">
             <a:avLst/>
@@ -7093,7 +7442,7 @@
 </p:sld>
 </file>
 
-<file path=ppt/slides/slide17.xml><?xml version="1.0" encoding="utf-8"?>
+<file path=ppt/slides/slide18.xml><?xml version="1.0" encoding="utf-8"?>
 <p:sld xmlns:a="http://schemas.openxmlformats.org/drawingml/2006/main" xmlns:r="http://schemas.openxmlformats.org/officeDocument/2006/relationships" xmlns:p="http://schemas.openxmlformats.org/presentationml/2006/main">
   <p:cSld>
     <p:spTree>
@@ -7116,36 +7465,6 @@
           <a:chExt cx="0" cy="0"/>
         </a:xfrm>
       </p:grpSpPr>
-      <p:pic>
-        <p:nvPicPr>
-          <p:cNvPr id="4" name="Picture 3">
-            <a:extLst>
-              <a:ext uri="{FF2B5EF4-FFF2-40B4-BE49-F238E27FC236}">
-                <a16:creationId xmlns:a16="http://schemas.microsoft.com/office/drawing/2014/main" id="{2A30437A-FAA4-43D5-1D7B-4835741E0466}"/>
-              </a:ext>
-            </a:extLst>
-          </p:cNvPr>
-          <p:cNvPicPr>
-            <a:picLocks noChangeAspect="1"/>
-          </p:cNvPicPr>
-          <p:nvPr/>
-        </p:nvPicPr>
-        <p:blipFill>
-          <a:blip r:embed="rId2"/>
-          <a:stretch>
-            <a:fillRect/>
-          </a:stretch>
-        </p:blipFill>
-        <p:spPr>
-          <a:xfrm>
-            <a:off x="844476" y="1261872"/>
-            <a:ext cx="9449407" cy="5568696"/>
-          </a:xfrm>
-          <a:prstGeom prst="rect">
-            <a:avLst/>
-          </a:prstGeom>
-        </p:spPr>
-      </p:pic>
       <p:sp>
         <p:nvSpPr>
           <p:cNvPr id="2" name="TextBox 1">
@@ -7200,6 +7519,36 @@
           </a:p>
         </p:txBody>
       </p:sp>
+      <p:pic>
+        <p:nvPicPr>
+          <p:cNvPr id="5" name="Picture 4">
+            <a:extLst>
+              <a:ext uri="{FF2B5EF4-FFF2-40B4-BE49-F238E27FC236}">
+                <a16:creationId xmlns:a16="http://schemas.microsoft.com/office/drawing/2014/main" id="{946CDBBE-1E7F-C1AA-E3B7-6807E49D4E7F}"/>
+              </a:ext>
+            </a:extLst>
+          </p:cNvPr>
+          <p:cNvPicPr>
+            <a:picLocks noChangeAspect="1"/>
+          </p:cNvPicPr>
+          <p:nvPr/>
+        </p:nvPicPr>
+        <p:blipFill>
+          <a:blip r:embed="rId2"/>
+          <a:stretch>
+            <a:fillRect/>
+          </a:stretch>
+        </p:blipFill>
+        <p:spPr>
+          <a:xfrm>
+            <a:off x="850392" y="1006215"/>
+            <a:ext cx="9091378" cy="5623185"/>
+          </a:xfrm>
+          <a:prstGeom prst="rect">
+            <a:avLst/>
+          </a:prstGeom>
+        </p:spPr>
+      </p:pic>
     </p:spTree>
     <p:extLst>
       <p:ext uri="{BB962C8B-B14F-4D97-AF65-F5344CB8AC3E}">
@@ -7213,7 +7562,307 @@
 </p:sld>
 </file>
 
-<file path=ppt/slides/slide18.xml><?xml version="1.0" encoding="utf-8"?>
+<file path=ppt/slides/slide19.xml><?xml version="1.0" encoding="utf-8"?>
+<p:sld xmlns:a="http://schemas.openxmlformats.org/drawingml/2006/main" xmlns:r="http://schemas.openxmlformats.org/officeDocument/2006/relationships" xmlns:p="http://schemas.openxmlformats.org/presentationml/2006/main">
+  <p:cSld>
+    <p:spTree>
+      <p:nvGrpSpPr>
+        <p:cNvPr id="1" name="">
+          <a:extLst>
+            <a:ext uri="{FF2B5EF4-FFF2-40B4-BE49-F238E27FC236}">
+              <a16:creationId xmlns:a16="http://schemas.microsoft.com/office/drawing/2014/main" id="{32D2770C-8221-7C87-CB0F-85E5F4D12D50}"/>
+            </a:ext>
+          </a:extLst>
+        </p:cNvPr>
+        <p:cNvGrpSpPr/>
+        <p:nvPr/>
+      </p:nvGrpSpPr>
+      <p:grpSpPr>
+        <a:xfrm>
+          <a:off x="0" y="0"/>
+          <a:ext cx="0" cy="0"/>
+          <a:chOff x="0" y="0"/>
+          <a:chExt cx="0" cy="0"/>
+        </a:xfrm>
+      </p:grpSpPr>
+      <p:sp>
+        <p:nvSpPr>
+          <p:cNvPr id="12" name="TextBox 11">
+            <a:extLst>
+              <a:ext uri="{FF2B5EF4-FFF2-40B4-BE49-F238E27FC236}">
+                <a16:creationId xmlns:a16="http://schemas.microsoft.com/office/drawing/2014/main" id="{07480B5D-B556-6C6A-C0FD-9FF73E6DCCB1}"/>
+              </a:ext>
+            </a:extLst>
+          </p:cNvPr>
+          <p:cNvSpPr txBox="1"/>
+          <p:nvPr/>
+        </p:nvSpPr>
+        <p:spPr>
+          <a:xfrm>
+            <a:off x="1005840" y="2438566"/>
+            <a:ext cx="9820656" cy="769441"/>
+          </a:xfrm>
+          <a:prstGeom prst="rect">
+            <a:avLst/>
+          </a:prstGeom>
+          <a:noFill/>
+        </p:spPr>
+        <p:txBody>
+          <a:bodyPr wrap="square">
+            <a:spAutoFit/>
+          </a:bodyPr>
+          <a:lstStyle/>
+          <a:p>
+            <a:pPr algn="ctr"/>
+            <a:r>
+              <a:rPr lang="en-US" sz="4400" b="1" dirty="0">
+                <a:solidFill>
+                  <a:schemeClr val="accent6">
+                    <a:lumMod val="60000"/>
+                    <a:lumOff val="40000"/>
+                  </a:schemeClr>
+                </a:solidFill>
+              </a:rPr>
+              <a:t>How does neuron make prediction</a:t>
+            </a:r>
+            <a:endParaRPr lang="en-US" sz="4400" dirty="0">
+              <a:solidFill>
+                <a:schemeClr val="accent6">
+                  <a:lumMod val="60000"/>
+                  <a:lumOff val="40000"/>
+                </a:schemeClr>
+              </a:solidFill>
+            </a:endParaRPr>
+          </a:p>
+        </p:txBody>
+      </p:sp>
+    </p:spTree>
+    <p:extLst>
+      <p:ext uri="{BB962C8B-B14F-4D97-AF65-F5344CB8AC3E}">
+        <p14:creationId xmlns:p14="http://schemas.microsoft.com/office/powerpoint/2010/main" val="2992063597"/>
+      </p:ext>
+    </p:extLst>
+  </p:cSld>
+  <p:clrMapOvr>
+    <a:masterClrMapping/>
+  </p:clrMapOvr>
+</p:sld>
+</file>
+
+<file path=ppt/slides/slide2.xml><?xml version="1.0" encoding="utf-8"?>
+<p:sld xmlns:a="http://schemas.openxmlformats.org/drawingml/2006/main" xmlns:r="http://schemas.openxmlformats.org/officeDocument/2006/relationships" xmlns:p="http://schemas.openxmlformats.org/presentationml/2006/main">
+  <p:cSld>
+    <p:spTree>
+      <p:nvGrpSpPr>
+        <p:cNvPr id="1" name="">
+          <a:extLst>
+            <a:ext uri="{FF2B5EF4-FFF2-40B4-BE49-F238E27FC236}">
+              <a16:creationId xmlns:a16="http://schemas.microsoft.com/office/drawing/2014/main" id="{D6F6EAA2-835E-1B4A-C4A2-86B19E65AA7E}"/>
+            </a:ext>
+          </a:extLst>
+        </p:cNvPr>
+        <p:cNvGrpSpPr/>
+        <p:nvPr/>
+      </p:nvGrpSpPr>
+      <p:grpSpPr>
+        <a:xfrm>
+          <a:off x="0" y="0"/>
+          <a:ext cx="0" cy="0"/>
+          <a:chOff x="0" y="0"/>
+          <a:chExt cx="0" cy="0"/>
+        </a:xfrm>
+      </p:grpSpPr>
+      <p:sp>
+        <p:nvSpPr>
+          <p:cNvPr id="6" name="TextBox 5">
+            <a:extLst>
+              <a:ext uri="{FF2B5EF4-FFF2-40B4-BE49-F238E27FC236}">
+                <a16:creationId xmlns:a16="http://schemas.microsoft.com/office/drawing/2014/main" id="{9FEE99C5-627B-C078-8326-A6BE04624C5F}"/>
+              </a:ext>
+            </a:extLst>
+          </p:cNvPr>
+          <p:cNvSpPr txBox="1"/>
+          <p:nvPr/>
+        </p:nvSpPr>
+        <p:spPr>
+          <a:xfrm>
+            <a:off x="201168" y="344590"/>
+            <a:ext cx="11228832" cy="2677656"/>
+          </a:xfrm>
+          <a:prstGeom prst="rect">
+            <a:avLst/>
+          </a:prstGeom>
+          <a:noFill/>
+        </p:spPr>
+        <p:txBody>
+          <a:bodyPr wrap="square">
+            <a:spAutoFit/>
+          </a:bodyPr>
+          <a:lstStyle/>
+          <a:p>
+            <a:r>
+              <a:rPr lang="en-IN" sz="2400" b="1" dirty="0">
+                <a:solidFill>
+                  <a:schemeClr val="accent6">
+                    <a:lumMod val="60000"/>
+                    <a:lumOff val="40000"/>
+                  </a:schemeClr>
+                </a:solidFill>
+              </a:rPr>
+              <a:t>Common Applications of NN</a:t>
+            </a:r>
+          </a:p>
+          <a:p>
+            <a:endParaRPr lang="en-US" sz="2400" dirty="0">
+              <a:solidFill>
+                <a:schemeClr val="accent6">
+                  <a:lumMod val="60000"/>
+                  <a:lumOff val="40000"/>
+                </a:schemeClr>
+              </a:solidFill>
+            </a:endParaRPr>
+          </a:p>
+          <a:p>
+            <a:pPr marL="342900" lvl="0" indent="-342900">
+              <a:buFont typeface="Arial" panose="020B0604020202020204" pitchFamily="34" charset="0"/>
+              <a:buChar char="•"/>
+            </a:pPr>
+            <a:r>
+              <a:rPr lang="en-IN" sz="2400" dirty="0">
+                <a:solidFill>
+                  <a:schemeClr val="accent6">
+                    <a:lumMod val="60000"/>
+                    <a:lumOff val="40000"/>
+                  </a:schemeClr>
+                </a:solidFill>
+              </a:rPr>
+              <a:t>Image classification</a:t>
+            </a:r>
+            <a:endParaRPr lang="en-US" sz="2400" dirty="0">
+              <a:solidFill>
+                <a:schemeClr val="accent6">
+                  <a:lumMod val="60000"/>
+                  <a:lumOff val="40000"/>
+                </a:schemeClr>
+              </a:solidFill>
+            </a:endParaRPr>
+          </a:p>
+          <a:p>
+            <a:pPr marL="342900" lvl="0" indent="-342900">
+              <a:buFont typeface="Arial" panose="020B0604020202020204" pitchFamily="34" charset="0"/>
+              <a:buChar char="•"/>
+            </a:pPr>
+            <a:r>
+              <a:rPr lang="en-IN" sz="2400" dirty="0">
+                <a:solidFill>
+                  <a:schemeClr val="accent6">
+                    <a:lumMod val="60000"/>
+                    <a:lumOff val="40000"/>
+                  </a:schemeClr>
+                </a:solidFill>
+              </a:rPr>
+              <a:t>Speech recognition</a:t>
+            </a:r>
+            <a:endParaRPr lang="en-US" sz="2400" dirty="0">
+              <a:solidFill>
+                <a:schemeClr val="accent6">
+                  <a:lumMod val="60000"/>
+                  <a:lumOff val="40000"/>
+                </a:schemeClr>
+              </a:solidFill>
+            </a:endParaRPr>
+          </a:p>
+          <a:p>
+            <a:pPr marL="342900" lvl="0" indent="-342900">
+              <a:buFont typeface="Arial" panose="020B0604020202020204" pitchFamily="34" charset="0"/>
+              <a:buChar char="•"/>
+            </a:pPr>
+            <a:r>
+              <a:rPr lang="en-IN" sz="2400" dirty="0">
+                <a:solidFill>
+                  <a:schemeClr val="accent6">
+                    <a:lumMod val="60000"/>
+                    <a:lumOff val="40000"/>
+                  </a:schemeClr>
+                </a:solidFill>
+              </a:rPr>
+              <a:t>Natural language processing</a:t>
+            </a:r>
+            <a:endParaRPr lang="en-US" sz="2400" dirty="0">
+              <a:solidFill>
+                <a:schemeClr val="accent6">
+                  <a:lumMod val="60000"/>
+                  <a:lumOff val="40000"/>
+                </a:schemeClr>
+              </a:solidFill>
+            </a:endParaRPr>
+          </a:p>
+          <a:p>
+            <a:pPr marL="342900" lvl="0" indent="-342900">
+              <a:buFont typeface="Arial" panose="020B0604020202020204" pitchFamily="34" charset="0"/>
+              <a:buChar char="•"/>
+            </a:pPr>
+            <a:r>
+              <a:rPr lang="en-IN" sz="2400" dirty="0">
+                <a:solidFill>
+                  <a:schemeClr val="accent6">
+                    <a:lumMod val="60000"/>
+                    <a:lumOff val="40000"/>
+                  </a:schemeClr>
+                </a:solidFill>
+              </a:rPr>
+              <a:t>Regression problems</a:t>
+            </a:r>
+            <a:endParaRPr lang="en-US" sz="2400" dirty="0">
+              <a:solidFill>
+                <a:schemeClr val="accent6">
+                  <a:lumMod val="60000"/>
+                  <a:lumOff val="40000"/>
+                </a:schemeClr>
+              </a:solidFill>
+            </a:endParaRPr>
+          </a:p>
+          <a:p>
+            <a:pPr marL="342900" lvl="0" indent="-342900">
+              <a:buFont typeface="Arial" panose="020B0604020202020204" pitchFamily="34" charset="0"/>
+              <a:buChar char="•"/>
+            </a:pPr>
+            <a:r>
+              <a:rPr lang="en-IN" sz="2400" dirty="0">
+                <a:solidFill>
+                  <a:schemeClr val="accent6">
+                    <a:lumMod val="60000"/>
+                    <a:lumOff val="40000"/>
+                  </a:schemeClr>
+                </a:solidFill>
+              </a:rPr>
+              <a:t>Function approximation</a:t>
+            </a:r>
+            <a:endParaRPr lang="en-US" sz="2400" dirty="0">
+              <a:solidFill>
+                <a:schemeClr val="accent6">
+                  <a:lumMod val="60000"/>
+                  <a:lumOff val="40000"/>
+                </a:schemeClr>
+              </a:solidFill>
+            </a:endParaRPr>
+          </a:p>
+        </p:txBody>
+      </p:sp>
+    </p:spTree>
+    <p:extLst>
+      <p:ext uri="{BB962C8B-B14F-4D97-AF65-F5344CB8AC3E}">
+        <p14:creationId xmlns:p14="http://schemas.microsoft.com/office/powerpoint/2010/main" val="1496326047"/>
+      </p:ext>
+    </p:extLst>
+  </p:cSld>
+  <p:clrMapOvr>
+    <a:masterClrMapping/>
+  </p:clrMapOvr>
+</p:sld>
+</file>
+
+<file path=ppt/slides/slide20.xml><?xml version="1.0" encoding="utf-8"?>
 <p:sld xmlns:a="http://schemas.openxmlformats.org/drawingml/2006/main" xmlns:r="http://schemas.openxmlformats.org/officeDocument/2006/relationships" xmlns:p="http://schemas.openxmlformats.org/presentationml/2006/main">
   <p:cSld>
     <p:spTree>
@@ -7530,7 +8179,7 @@
 </p:sld>
 </file>
 
-<file path=ppt/slides/slide19.xml><?xml version="1.0" encoding="utf-8"?>
+<file path=ppt/slides/slide21.xml><?xml version="1.0" encoding="utf-8"?>
 <p:sld xmlns:a="http://schemas.openxmlformats.org/drawingml/2006/main" xmlns:r="http://schemas.openxmlformats.org/officeDocument/2006/relationships" xmlns:p="http://schemas.openxmlformats.org/presentationml/2006/main">
   <p:cSld>
     <p:spTree>
@@ -7701,281 +8350,7 @@
 </p:sld>
 </file>
 
-<file path=ppt/slides/slide2.xml><?xml version="1.0" encoding="utf-8"?>
-<p:sld xmlns:a="http://schemas.openxmlformats.org/drawingml/2006/main" xmlns:r="http://schemas.openxmlformats.org/officeDocument/2006/relationships" xmlns:p="http://schemas.openxmlformats.org/presentationml/2006/main">
-  <p:cSld>
-    <p:spTree>
-      <p:nvGrpSpPr>
-        <p:cNvPr id="1" name="">
-          <a:extLst>
-            <a:ext uri="{FF2B5EF4-FFF2-40B4-BE49-F238E27FC236}">
-              <a16:creationId xmlns:a16="http://schemas.microsoft.com/office/drawing/2014/main" id="{E5B0F170-858A-1787-27EA-B8F6771D63BA}"/>
-            </a:ext>
-          </a:extLst>
-        </p:cNvPr>
-        <p:cNvGrpSpPr/>
-        <p:nvPr/>
-      </p:nvGrpSpPr>
-      <p:grpSpPr>
-        <a:xfrm>
-          <a:off x="0" y="0"/>
-          <a:ext cx="0" cy="0"/>
-          <a:chOff x="0" y="0"/>
-          <a:chExt cx="0" cy="0"/>
-        </a:xfrm>
-      </p:grpSpPr>
-      <p:sp>
-        <p:nvSpPr>
-          <p:cNvPr id="8" name="TextBox 7">
-            <a:extLst>
-              <a:ext uri="{FF2B5EF4-FFF2-40B4-BE49-F238E27FC236}">
-                <a16:creationId xmlns:a16="http://schemas.microsoft.com/office/drawing/2014/main" id="{0505E489-8B61-1137-D2BA-47E1F15F8A8C}"/>
-              </a:ext>
-            </a:extLst>
-          </p:cNvPr>
-          <p:cNvSpPr txBox="1"/>
-          <p:nvPr/>
-        </p:nvSpPr>
-        <p:spPr>
-          <a:xfrm>
-            <a:off x="548640" y="510278"/>
-            <a:ext cx="7050024" cy="2677656"/>
-          </a:xfrm>
-          <a:prstGeom prst="rect">
-            <a:avLst/>
-          </a:prstGeom>
-          <a:noFill/>
-        </p:spPr>
-        <p:txBody>
-          <a:bodyPr wrap="square">
-            <a:spAutoFit/>
-          </a:bodyPr>
-          <a:lstStyle/>
-          <a:p>
-            <a:r>
-              <a:rPr lang="en-US" sz="2400" dirty="0">
-                <a:solidFill>
-                  <a:schemeClr val="accent6">
-                    <a:lumMod val="60000"/>
-                    <a:lumOff val="40000"/>
-                  </a:schemeClr>
-                </a:solidFill>
-              </a:rPr>
-              <a:t>ANN can include many different architectures such as:</a:t>
-            </a:r>
-          </a:p>
-          <a:p>
-            <a:endParaRPr lang="en-US" sz="2400" dirty="0">
-              <a:solidFill>
-                <a:schemeClr val="accent6">
-                  <a:lumMod val="60000"/>
-                  <a:lumOff val="40000"/>
-                </a:schemeClr>
-              </a:solidFill>
-            </a:endParaRPr>
-          </a:p>
-          <a:p>
-            <a:pPr marL="342900" indent="-342900">
-              <a:buFont typeface="Arial" panose="020B0604020202020204" pitchFamily="34" charset="0"/>
-              <a:buChar char="•"/>
-            </a:pPr>
-            <a:r>
-              <a:rPr lang="en-US" sz="2400" dirty="0">
-                <a:solidFill>
-                  <a:schemeClr val="accent6">
-                    <a:lumMod val="60000"/>
-                    <a:lumOff val="40000"/>
-                  </a:schemeClr>
-                </a:solidFill>
-              </a:rPr>
-              <a:t>Single Layer Perceptron</a:t>
-            </a:r>
-          </a:p>
-          <a:p>
-            <a:pPr marL="342900" indent="-342900">
-              <a:buFont typeface="Arial" panose="020B0604020202020204" pitchFamily="34" charset="0"/>
-              <a:buChar char="•"/>
-            </a:pPr>
-            <a:r>
-              <a:rPr lang="en-US" sz="2400" dirty="0">
-                <a:solidFill>
-                  <a:schemeClr val="accent6">
-                    <a:lumMod val="60000"/>
-                    <a:lumOff val="40000"/>
-                  </a:schemeClr>
-                </a:solidFill>
-              </a:rPr>
-              <a:t>Multilayer Perceptron (MLP)</a:t>
-            </a:r>
-          </a:p>
-          <a:p>
-            <a:pPr marL="342900" indent="-342900">
-              <a:buFont typeface="Arial" panose="020B0604020202020204" pitchFamily="34" charset="0"/>
-              <a:buChar char="•"/>
-            </a:pPr>
-            <a:r>
-              <a:rPr lang="en-US" sz="2400" dirty="0">
-                <a:solidFill>
-                  <a:schemeClr val="accent6">
-                    <a:lumMod val="60000"/>
-                    <a:lumOff val="40000"/>
-                  </a:schemeClr>
-                </a:solidFill>
-              </a:rPr>
-              <a:t>Convolutional Neural Networks (CNN)</a:t>
-            </a:r>
-          </a:p>
-          <a:p>
-            <a:pPr marL="342900" indent="-342900">
-              <a:buFont typeface="Arial" panose="020B0604020202020204" pitchFamily="34" charset="0"/>
-              <a:buChar char="•"/>
-            </a:pPr>
-            <a:r>
-              <a:rPr lang="en-US" sz="2400" dirty="0">
-                <a:solidFill>
-                  <a:schemeClr val="accent6">
-                    <a:lumMod val="60000"/>
-                    <a:lumOff val="40000"/>
-                  </a:schemeClr>
-                </a:solidFill>
-              </a:rPr>
-              <a:t>Recurrent Neural Networks (RNN)</a:t>
-            </a:r>
-          </a:p>
-          <a:p>
-            <a:pPr marL="342900" indent="-342900">
-              <a:buFont typeface="Arial" panose="020B0604020202020204" pitchFamily="34" charset="0"/>
-              <a:buChar char="•"/>
-            </a:pPr>
-            <a:r>
-              <a:rPr lang="en-US" sz="2400" dirty="0">
-                <a:solidFill>
-                  <a:schemeClr val="accent6">
-                    <a:lumMod val="60000"/>
-                    <a:lumOff val="40000"/>
-                  </a:schemeClr>
-                </a:solidFill>
-              </a:rPr>
-              <a:t>Transformers</a:t>
-            </a:r>
-          </a:p>
-        </p:txBody>
-      </p:sp>
-      <p:pic>
-        <p:nvPicPr>
-          <p:cNvPr id="3" name="Picture 2">
-            <a:extLst>
-              <a:ext uri="{FF2B5EF4-FFF2-40B4-BE49-F238E27FC236}">
-                <a16:creationId xmlns:a16="http://schemas.microsoft.com/office/drawing/2014/main" id="{DCF4C277-4142-43CC-A8E3-473345B87187}"/>
-              </a:ext>
-            </a:extLst>
-          </p:cNvPr>
-          <p:cNvPicPr>
-            <a:picLocks noChangeAspect="1"/>
-          </p:cNvPicPr>
-          <p:nvPr/>
-        </p:nvPicPr>
-        <p:blipFill>
-          <a:blip r:embed="rId2"/>
-          <a:stretch>
-            <a:fillRect/>
-          </a:stretch>
-        </p:blipFill>
-        <p:spPr>
-          <a:xfrm>
-            <a:off x="7714999" y="1164611"/>
-            <a:ext cx="4378849" cy="2340568"/>
-          </a:xfrm>
-          <a:prstGeom prst="rect">
-            <a:avLst/>
-          </a:prstGeom>
-        </p:spPr>
-      </p:pic>
-      <p:sp>
-        <p:nvSpPr>
-          <p:cNvPr id="5" name="TextBox 4">
-            <a:extLst>
-              <a:ext uri="{FF2B5EF4-FFF2-40B4-BE49-F238E27FC236}">
-                <a16:creationId xmlns:a16="http://schemas.microsoft.com/office/drawing/2014/main" id="{05AD762E-F24B-995F-E539-9CD0E2D28765}"/>
-              </a:ext>
-            </a:extLst>
-          </p:cNvPr>
-          <p:cNvSpPr txBox="1"/>
-          <p:nvPr/>
-        </p:nvSpPr>
-        <p:spPr>
-          <a:xfrm>
-            <a:off x="169164" y="4203115"/>
-            <a:ext cx="6190488" cy="1200329"/>
-          </a:xfrm>
-          <a:prstGeom prst="rect">
-            <a:avLst/>
-          </a:prstGeom>
-          <a:noFill/>
-        </p:spPr>
-        <p:txBody>
-          <a:bodyPr wrap="square">
-            <a:spAutoFit/>
-          </a:bodyPr>
-          <a:lstStyle/>
-          <a:p>
-            <a:pPr marL="0" indent="0">
-              <a:buNone/>
-            </a:pPr>
-            <a:r>
-              <a:rPr lang="en-US" sz="2400" dirty="0">
-                <a:solidFill>
-                  <a:schemeClr val="accent6">
-                    <a:lumMod val="60000"/>
-                    <a:lumOff val="40000"/>
-                  </a:schemeClr>
-                </a:solidFill>
-              </a:rPr>
-              <a:t>Some interesting site to learn ANN:</a:t>
-            </a:r>
-          </a:p>
-          <a:p>
-            <a:pPr marL="0" indent="0">
-              <a:buNone/>
-            </a:pPr>
-            <a:endParaRPr lang="en-US" sz="2400" dirty="0">
-              <a:solidFill>
-                <a:schemeClr val="accent6">
-                  <a:lumMod val="60000"/>
-                  <a:lumOff val="40000"/>
-                </a:schemeClr>
-              </a:solidFill>
-            </a:endParaRPr>
-          </a:p>
-          <a:p>
-            <a:r>
-              <a:rPr lang="en-US" sz="2400" dirty="0">
-                <a:solidFill>
-                  <a:schemeClr val="accent6">
-                    <a:lumMod val="60000"/>
-                    <a:lumOff val="40000"/>
-                  </a:schemeClr>
-                </a:solidFill>
-              </a:rPr>
-              <a:t>https://playground.tensorflow.org/</a:t>
-            </a:r>
-          </a:p>
-        </p:txBody>
-      </p:sp>
-    </p:spTree>
-    <p:extLst>
-      <p:ext uri="{BB962C8B-B14F-4D97-AF65-F5344CB8AC3E}">
-        <p14:creationId xmlns:p14="http://schemas.microsoft.com/office/powerpoint/2010/main" val="1228341650"/>
-      </p:ext>
-    </p:extLst>
-  </p:cSld>
-  <p:clrMapOvr>
-    <a:masterClrMapping/>
-  </p:clrMapOvr>
-</p:sld>
-</file>
-
-<file path=ppt/slides/slide20.xml><?xml version="1.0" encoding="utf-8"?>
+<file path=ppt/slides/slide22.xml><?xml version="1.0" encoding="utf-8"?>
 <p:sld xmlns:a="http://schemas.openxmlformats.org/drawingml/2006/main" xmlns:r="http://schemas.openxmlformats.org/officeDocument/2006/relationships" xmlns:p="http://schemas.openxmlformats.org/presentationml/2006/main">
   <p:cSld>
     <p:spTree>
@@ -7998,6 +8373,36 @@
           <a:chExt cx="0" cy="0"/>
         </a:xfrm>
       </p:grpSpPr>
+      <p:pic>
+        <p:nvPicPr>
+          <p:cNvPr id="7" name="Picture 6">
+            <a:extLst>
+              <a:ext uri="{FF2B5EF4-FFF2-40B4-BE49-F238E27FC236}">
+                <a16:creationId xmlns:a16="http://schemas.microsoft.com/office/drawing/2014/main" id="{5F839F8C-B95E-0B47-155F-353DF8F0C661}"/>
+              </a:ext>
+            </a:extLst>
+          </p:cNvPr>
+          <p:cNvPicPr>
+            <a:picLocks noChangeAspect="1"/>
+          </p:cNvPicPr>
+          <p:nvPr/>
+        </p:nvPicPr>
+        <p:blipFill>
+          <a:blip r:embed="rId2"/>
+          <a:stretch>
+            <a:fillRect/>
+          </a:stretch>
+        </p:blipFill>
+        <p:spPr>
+          <a:xfrm>
+            <a:off x="410280" y="2870159"/>
+            <a:ext cx="10024098" cy="3936769"/>
+          </a:xfrm>
+          <a:prstGeom prst="rect">
+            <a:avLst/>
+          </a:prstGeom>
+        </p:spPr>
+      </p:pic>
       <p:sp>
         <p:nvSpPr>
           <p:cNvPr id="5" name="TextBox 4">
@@ -8080,7 +8485,7 @@
                   </a:schemeClr>
                 </a:solidFill>
               </a:rPr>
-              <a:t>Suppose a MLP predicts the size of shirt based on age and height of a customer: </a:t>
+              <a:t>Suppose a NN predicts the size of shirt based on age and height of a customer: </a:t>
             </a:r>
           </a:p>
           <a:p>
@@ -8093,7 +8498,7 @@
                   </a:schemeClr>
                 </a:solidFill>
               </a:rPr>
-              <a:t>Here the number of features = 2</a:t>
+              <a:t>Here the number of input features = 2</a:t>
             </a:r>
           </a:p>
           <a:p>
@@ -8134,36 +8539,6 @@
           </a:p>
         </p:txBody>
       </p:sp>
-      <p:pic>
-        <p:nvPicPr>
-          <p:cNvPr id="6" name="Picture 5">
-            <a:extLst>
-              <a:ext uri="{FF2B5EF4-FFF2-40B4-BE49-F238E27FC236}">
-                <a16:creationId xmlns:a16="http://schemas.microsoft.com/office/drawing/2014/main" id="{EA6EECB5-8157-6271-6667-8CFFEFB935E3}"/>
-              </a:ext>
-            </a:extLst>
-          </p:cNvPr>
-          <p:cNvPicPr>
-            <a:picLocks noChangeAspect="1"/>
-          </p:cNvPicPr>
-          <p:nvPr/>
-        </p:nvPicPr>
-        <p:blipFill>
-          <a:blip r:embed="rId2"/>
-          <a:stretch>
-            <a:fillRect/>
-          </a:stretch>
-        </p:blipFill>
-        <p:spPr>
-          <a:xfrm>
-            <a:off x="840301" y="2825960"/>
-            <a:ext cx="9316751" cy="3984470"/>
-          </a:xfrm>
-          <a:prstGeom prst="rect">
-            <a:avLst/>
-          </a:prstGeom>
-        </p:spPr>
-      </p:pic>
       <p:grpSp>
         <p:nvGrpSpPr>
           <p:cNvPr id="10" name="Group 9">
@@ -8178,7 +8553,7 @@
         </p:nvGrpSpPr>
         <p:grpSpPr>
           <a:xfrm>
-            <a:off x="7119864" y="3729744"/>
+            <a:off x="7131744" y="3534672"/>
             <a:ext cx="580680" cy="135720"/>
             <a:chOff x="7119864" y="3729744"/>
             <a:chExt cx="580680" cy="135720"/>
@@ -8301,7 +8676,7 @@
         </p:nvGrpSpPr>
         <p:grpSpPr>
           <a:xfrm>
-            <a:off x="6972624" y="4801464"/>
+            <a:off x="6992064" y="4671503"/>
             <a:ext cx="745920" cy="167040"/>
             <a:chOff x="6972624" y="4801464"/>
             <a:chExt cx="745920" cy="167040"/>
@@ -8546,7 +8921,7 @@
 </p:sld>
 </file>
 
-<file path=ppt/slides/slide21.xml><?xml version="1.0" encoding="utf-8"?>
+<file path=ppt/slides/slide23.xml><?xml version="1.0" encoding="utf-8"?>
 <p:sld xmlns:a="http://schemas.openxmlformats.org/drawingml/2006/main" xmlns:r="http://schemas.openxmlformats.org/officeDocument/2006/relationships" xmlns:p="http://schemas.openxmlformats.org/presentationml/2006/main">
   <p:cSld>
     <p:spTree>
@@ -8783,10 +9158,10 @@
       </p:sp>
       <p:pic>
         <p:nvPicPr>
-          <p:cNvPr id="3" name="Picture 2">
-            <a:extLst>
-              <a:ext uri="{FF2B5EF4-FFF2-40B4-BE49-F238E27FC236}">
-                <a16:creationId xmlns:a16="http://schemas.microsoft.com/office/drawing/2014/main" id="{56F10F71-6A3E-B501-97F0-CE65AB4936B9}"/>
+          <p:cNvPr id="7" name="Picture 6">
+            <a:extLst>
+              <a:ext uri="{FF2B5EF4-FFF2-40B4-BE49-F238E27FC236}">
+                <a16:creationId xmlns:a16="http://schemas.microsoft.com/office/drawing/2014/main" id="{DADF25F9-FF76-829A-DC53-0105BEE3C5D1}"/>
               </a:ext>
             </a:extLst>
           </p:cNvPr>
@@ -8803,8 +9178,8 @@
         </p:blipFill>
         <p:spPr>
           <a:xfrm>
-            <a:off x="4103094" y="3316546"/>
-            <a:ext cx="5463166" cy="3416320"/>
+            <a:off x="4206240" y="3173187"/>
+            <a:ext cx="6068138" cy="3469711"/>
           </a:xfrm>
           <a:prstGeom prst="rect">
             <a:avLst/>
@@ -8824,141 +9199,7 @@
 </p:sld>
 </file>
 
-<file path=ppt/slides/slide22.xml><?xml version="1.0" encoding="utf-8"?>
-<p:sld xmlns:a="http://schemas.openxmlformats.org/drawingml/2006/main" xmlns:r="http://schemas.openxmlformats.org/officeDocument/2006/relationships" xmlns:p="http://schemas.openxmlformats.org/presentationml/2006/main">
-  <p:cSld>
-    <p:spTree>
-      <p:nvGrpSpPr>
-        <p:cNvPr id="1" name="">
-          <a:extLst>
-            <a:ext uri="{FF2B5EF4-FFF2-40B4-BE49-F238E27FC236}">
-              <a16:creationId xmlns:a16="http://schemas.microsoft.com/office/drawing/2014/main" id="{62335D9F-2EBD-7061-6943-4561857F33F0}"/>
-            </a:ext>
-          </a:extLst>
-        </p:cNvPr>
-        <p:cNvGrpSpPr/>
-        <p:nvPr/>
-      </p:nvGrpSpPr>
-      <p:grpSpPr>
-        <a:xfrm>
-          <a:off x="0" y="0"/>
-          <a:ext cx="0" cy="0"/>
-          <a:chOff x="0" y="0"/>
-          <a:chExt cx="0" cy="0"/>
-        </a:xfrm>
-      </p:grpSpPr>
-      <p:sp>
-        <p:nvSpPr>
-          <p:cNvPr id="6" name="TextBox 5">
-            <a:extLst>
-              <a:ext uri="{FF2B5EF4-FFF2-40B4-BE49-F238E27FC236}">
-                <a16:creationId xmlns:a16="http://schemas.microsoft.com/office/drawing/2014/main" id="{DB6461CB-DF24-BCB9-258A-679D5722A059}"/>
-              </a:ext>
-            </a:extLst>
-          </p:cNvPr>
-          <p:cNvSpPr txBox="1"/>
-          <p:nvPr/>
-        </p:nvSpPr>
-        <p:spPr>
-          <a:xfrm>
-            <a:off x="192024" y="298870"/>
-            <a:ext cx="10773385" cy="1569660"/>
-          </a:xfrm>
-          <a:prstGeom prst="rect">
-            <a:avLst/>
-          </a:prstGeom>
-          <a:noFill/>
-        </p:spPr>
-        <p:txBody>
-          <a:bodyPr wrap="square">
-            <a:spAutoFit/>
-          </a:bodyPr>
-          <a:lstStyle/>
-          <a:p>
-            <a:pPr fontAlgn="base"/>
-            <a:r>
-              <a:rPr lang="en-US" sz="2400" dirty="0">
-                <a:solidFill>
-                  <a:schemeClr val="accent6">
-                    <a:lumMod val="60000"/>
-                    <a:lumOff val="40000"/>
-                  </a:schemeClr>
-                </a:solidFill>
-              </a:rPr>
-              <a:t>The free parameters (bias + weights) of the neural network are changed as a result of training. </a:t>
-            </a:r>
-          </a:p>
-          <a:p>
-            <a:pPr fontAlgn="base"/>
-            <a:endParaRPr lang="en-US" sz="2400" dirty="0">
-              <a:solidFill>
-                <a:schemeClr val="accent6">
-                  <a:lumMod val="60000"/>
-                  <a:lumOff val="40000"/>
-                </a:schemeClr>
-              </a:solidFill>
-            </a:endParaRPr>
-          </a:p>
-          <a:p>
-            <a:pPr fontAlgn="base"/>
-            <a:r>
-              <a:rPr lang="en-US" sz="2400" b="1" dirty="0">
-                <a:solidFill>
-                  <a:schemeClr val="accent6">
-                    <a:lumMod val="60000"/>
-                    <a:lumOff val="40000"/>
-                  </a:schemeClr>
-                </a:solidFill>
-              </a:rPr>
-              <a:t>THE WHOLE GAME OF NEURAL NETWORK IS FINDING WEIGHTS, BIAS, etc.</a:t>
-            </a:r>
-          </a:p>
-        </p:txBody>
-      </p:sp>
-      <p:pic>
-        <p:nvPicPr>
-          <p:cNvPr id="13" name="Picture 12">
-            <a:extLst>
-              <a:ext uri="{FF2B5EF4-FFF2-40B4-BE49-F238E27FC236}">
-                <a16:creationId xmlns:a16="http://schemas.microsoft.com/office/drawing/2014/main" id="{3668E837-29BE-2482-DC6C-BFC4269E37F0}"/>
-              </a:ext>
-            </a:extLst>
-          </p:cNvPr>
-          <p:cNvPicPr>
-            <a:picLocks noChangeAspect="1"/>
-          </p:cNvPicPr>
-          <p:nvPr/>
-        </p:nvPicPr>
-        <p:blipFill>
-          <a:blip r:embed="rId2"/>
-          <a:stretch>
-            <a:fillRect/>
-          </a:stretch>
-        </p:blipFill>
-        <p:spPr>
-          <a:xfrm>
-            <a:off x="794909" y="1740514"/>
-            <a:ext cx="10170500" cy="5117486"/>
-          </a:xfrm>
-          <a:prstGeom prst="rect">
-            <a:avLst/>
-          </a:prstGeom>
-        </p:spPr>
-      </p:pic>
-    </p:spTree>
-    <p:extLst>
-      <p:ext uri="{BB962C8B-B14F-4D97-AF65-F5344CB8AC3E}">
-        <p14:creationId xmlns:p14="http://schemas.microsoft.com/office/powerpoint/2010/main" val="735722126"/>
-      </p:ext>
-    </p:extLst>
-  </p:cSld>
-  <p:clrMapOvr>
-    <a:masterClrMapping/>
-  </p:clrMapOvr>
-</p:sld>
-</file>
-
-<file path=ppt/slides/slide23.xml><?xml version="1.0" encoding="utf-8"?>
+<file path=ppt/slides/slide24.xml><?xml version="1.0" encoding="utf-8"?>
 <p:sld xmlns:a="http://schemas.openxmlformats.org/drawingml/2006/main" xmlns:r="http://schemas.openxmlformats.org/officeDocument/2006/relationships" xmlns:p="http://schemas.openxmlformats.org/presentationml/2006/main">
   <p:cSld>
     <p:spTree>
@@ -9120,10 +9361,10 @@
       </p:sp>
       <p:pic>
         <p:nvPicPr>
-          <p:cNvPr id="2" name="Picture 1">
-            <a:extLst>
-              <a:ext uri="{FF2B5EF4-FFF2-40B4-BE49-F238E27FC236}">
-                <a16:creationId xmlns:a16="http://schemas.microsoft.com/office/drawing/2014/main" id="{C6FEC73F-B8D0-B078-0C8D-9324F7B1509E}"/>
+          <p:cNvPr id="4" name="Picture 3">
+            <a:extLst>
+              <a:ext uri="{FF2B5EF4-FFF2-40B4-BE49-F238E27FC236}">
+                <a16:creationId xmlns:a16="http://schemas.microsoft.com/office/drawing/2014/main" id="{B9CF7B6B-715F-1001-CD3C-FE572CA5FE82}"/>
               </a:ext>
             </a:extLst>
           </p:cNvPr>
@@ -9140,8 +9381,8 @@
         </p:blipFill>
         <p:spPr>
           <a:xfrm>
-            <a:off x="1859893" y="2139696"/>
-            <a:ext cx="8913311" cy="4266700"/>
+            <a:off x="798893" y="1954398"/>
+            <a:ext cx="10380853" cy="4872816"/>
           </a:xfrm>
           <a:prstGeom prst="rect">
             <a:avLst/>
@@ -9161,7 +9402,7 @@
 </p:sld>
 </file>
 
-<file path=ppt/slides/slide24.xml><?xml version="1.0" encoding="utf-8"?>
+<file path=ppt/slides/slide25.xml><?xml version="1.0" encoding="utf-8"?>
 <p:sld xmlns:a="http://schemas.openxmlformats.org/drawingml/2006/main" xmlns:r="http://schemas.openxmlformats.org/officeDocument/2006/relationships" xmlns:p="http://schemas.openxmlformats.org/presentationml/2006/main">
   <p:cSld>
     <p:spTree>
@@ -9240,7 +9481,7 @@
 </p:sld>
 </file>
 
-<file path=ppt/slides/slide25.xml><?xml version="1.0" encoding="utf-8"?>
+<file path=ppt/slides/slide26.xml><?xml version="1.0" encoding="utf-8"?>
 <p:sld xmlns:a="http://schemas.openxmlformats.org/drawingml/2006/main" xmlns:r="http://schemas.openxmlformats.org/officeDocument/2006/relationships" xmlns:p="http://schemas.openxmlformats.org/presentationml/2006/main">
   <p:cSld>
     <p:spTree>
@@ -9263,6 +9504,36 @@
           <a:chExt cx="0" cy="0"/>
         </a:xfrm>
       </p:grpSpPr>
+      <p:pic>
+        <p:nvPicPr>
+          <p:cNvPr id="9" name="Picture 8">
+            <a:extLst>
+              <a:ext uri="{FF2B5EF4-FFF2-40B4-BE49-F238E27FC236}">
+                <a16:creationId xmlns:a16="http://schemas.microsoft.com/office/drawing/2014/main" id="{C82D09EB-B429-407E-C44C-DB88E6B0A31B}"/>
+              </a:ext>
+            </a:extLst>
+          </p:cNvPr>
+          <p:cNvPicPr>
+            <a:picLocks noChangeAspect="1"/>
+          </p:cNvPicPr>
+          <p:nvPr/>
+        </p:nvPicPr>
+        <p:blipFill>
+          <a:blip r:embed="rId2"/>
+          <a:stretch>
+            <a:fillRect/>
+          </a:stretch>
+        </p:blipFill>
+        <p:spPr>
+          <a:xfrm>
+            <a:off x="69019" y="-1"/>
+            <a:ext cx="6337488" cy="3830349"/>
+          </a:xfrm>
+          <a:prstGeom prst="rect">
+            <a:avLst/>
+          </a:prstGeom>
+        </p:spPr>
+      </p:pic>
       <p:sp>
         <p:nvSpPr>
           <p:cNvPr id="4" name="TextBox 3">
@@ -9819,36 +10090,6 @@
           </a:p>
         </p:txBody>
       </p:sp>
-      <p:pic>
-        <p:nvPicPr>
-          <p:cNvPr id="33" name="Picture 32">
-            <a:extLst>
-              <a:ext uri="{FF2B5EF4-FFF2-40B4-BE49-F238E27FC236}">
-                <a16:creationId xmlns:a16="http://schemas.microsoft.com/office/drawing/2014/main" id="{81C23037-F056-770F-3687-8F4DB740AE97}"/>
-              </a:ext>
-            </a:extLst>
-          </p:cNvPr>
-          <p:cNvPicPr>
-            <a:picLocks noChangeAspect="1"/>
-          </p:cNvPicPr>
-          <p:nvPr/>
-        </p:nvPicPr>
-        <p:blipFill>
-          <a:blip r:embed="rId2"/>
-          <a:stretch>
-            <a:fillRect/>
-          </a:stretch>
-        </p:blipFill>
-        <p:spPr>
-          <a:xfrm>
-            <a:off x="201327" y="57660"/>
-            <a:ext cx="5966465" cy="3484292"/>
-          </a:xfrm>
-          <a:prstGeom prst="rect">
-            <a:avLst/>
-          </a:prstGeom>
-        </p:spPr>
-      </p:pic>
       <p:sp>
         <p:nvSpPr>
           <p:cNvPr id="2" name="TextBox 1">
@@ -10149,7 +10390,7 @@
 </p:sld>
 </file>
 
-<file path=ppt/slides/slide26.xml><?xml version="1.0" encoding="utf-8"?>
+<file path=ppt/slides/slide27.xml><?xml version="1.0" encoding="utf-8"?>
 <p:sld xmlns:a="http://schemas.openxmlformats.org/drawingml/2006/main" xmlns:r="http://schemas.openxmlformats.org/officeDocument/2006/relationships" xmlns:p="http://schemas.openxmlformats.org/presentationml/2006/main">
   <p:cSld>
     <p:spTree>
@@ -10166,6 +10407,36 @@
           <a:chExt cx="0" cy="0"/>
         </a:xfrm>
       </p:grpSpPr>
+      <p:pic>
+        <p:nvPicPr>
+          <p:cNvPr id="3" name="Picture 2">
+            <a:extLst>
+              <a:ext uri="{FF2B5EF4-FFF2-40B4-BE49-F238E27FC236}">
+                <a16:creationId xmlns:a16="http://schemas.microsoft.com/office/drawing/2014/main" id="{AB1C1867-BA65-096C-828B-DB7CFBE18616}"/>
+              </a:ext>
+            </a:extLst>
+          </p:cNvPr>
+          <p:cNvPicPr>
+            <a:picLocks noChangeAspect="1"/>
+          </p:cNvPicPr>
+          <p:nvPr/>
+        </p:nvPicPr>
+        <p:blipFill>
+          <a:blip r:embed="rId2"/>
+          <a:stretch>
+            <a:fillRect/>
+          </a:stretch>
+        </p:blipFill>
+        <p:spPr>
+          <a:xfrm>
+            <a:off x="69019" y="-1"/>
+            <a:ext cx="6337488" cy="3830349"/>
+          </a:xfrm>
+          <a:prstGeom prst="rect">
+            <a:avLst/>
+          </a:prstGeom>
+        </p:spPr>
+      </p:pic>
       <p:sp>
         <p:nvSpPr>
           <p:cNvPr id="4" name="TextBox 3"/>
@@ -10693,36 +10964,6 @@
           </a:p>
         </p:txBody>
       </p:sp>
-      <p:pic>
-        <p:nvPicPr>
-          <p:cNvPr id="33" name="Picture 32">
-            <a:extLst>
-              <a:ext uri="{FF2B5EF4-FFF2-40B4-BE49-F238E27FC236}">
-                <a16:creationId xmlns:a16="http://schemas.microsoft.com/office/drawing/2014/main" id="{FB20D79F-AC97-D0A9-9628-66D2AD793C64}"/>
-              </a:ext>
-            </a:extLst>
-          </p:cNvPr>
-          <p:cNvPicPr>
-            <a:picLocks noChangeAspect="1"/>
-          </p:cNvPicPr>
-          <p:nvPr/>
-        </p:nvPicPr>
-        <p:blipFill>
-          <a:blip r:embed="rId2"/>
-          <a:stretch>
-            <a:fillRect/>
-          </a:stretch>
-        </p:blipFill>
-        <p:spPr>
-          <a:xfrm>
-            <a:off x="201327" y="57660"/>
-            <a:ext cx="5966465" cy="3484292"/>
-          </a:xfrm>
-          <a:prstGeom prst="rect">
-            <a:avLst/>
-          </a:prstGeom>
-        </p:spPr>
-      </p:pic>
       <p:sp>
         <p:nvSpPr>
           <p:cNvPr id="2" name="Arrow: Down 1">
@@ -10981,7 +11222,7 @@
 </p:sld>
 </file>
 
-<file path=ppt/slides/slide27.xml><?xml version="1.0" encoding="utf-8"?>
+<file path=ppt/slides/slide28.xml><?xml version="1.0" encoding="utf-8"?>
 <p:sld xmlns:a="http://schemas.openxmlformats.org/drawingml/2006/main" xmlns:r="http://schemas.openxmlformats.org/officeDocument/2006/relationships" xmlns:p="http://schemas.openxmlformats.org/presentationml/2006/main">
   <p:cSld>
     <p:spTree>
@@ -11578,7 +11819,7 @@
 </p:sld>
 </file>
 
-<file path=ppt/slides/slide28.xml><?xml version="1.0" encoding="utf-8"?>
+<file path=ppt/slides/slide29.xml><?xml version="1.0" encoding="utf-8"?>
 <p:sld xmlns:a="http://schemas.openxmlformats.org/drawingml/2006/main" xmlns:r="http://schemas.openxmlformats.org/officeDocument/2006/relationships" xmlns:p="http://schemas.openxmlformats.org/presentationml/2006/main">
   <p:cSld>
     <p:spTree>
@@ -11649,7 +11890,29 @@
                   </a:schemeClr>
                 </a:solidFill>
               </a:rPr>
-              <a:t>weights and bias:</a:t>
+              <a:t>weights and bias </a:t>
+            </a:r>
+            <a:r>
+              <a:rPr lang="en-US" sz="2400" dirty="0">
+                <a:solidFill>
+                  <a:schemeClr val="accent6">
+                    <a:lumMod val="60000"/>
+                    <a:lumOff val="40000"/>
+                  </a:schemeClr>
+                </a:solidFill>
+              </a:rPr>
+              <a:t>before start of training</a:t>
+            </a:r>
+            <a:r>
+              <a:rPr lang="en-US" sz="2400" b="1" dirty="0">
+                <a:solidFill>
+                  <a:schemeClr val="accent6">
+                    <a:lumMod val="60000"/>
+                    <a:lumOff val="40000"/>
+                  </a:schemeClr>
+                </a:solidFill>
+              </a:rPr>
+              <a:t>:</a:t>
             </a:r>
           </a:p>
           <a:p>
@@ -11767,7 +12030,20 @@
                   </a:schemeClr>
                 </a:solidFill>
               </a:rPr>
-              <a:t>), where a is typically small (e.g., 0.01, or based on input size).</a:t>
+              <a:t>), where a is typically small </a:t>
+            </a:r>
+          </a:p>
+          <a:p>
+            <a:r>
+              <a:rPr lang="en-US" sz="2400" dirty="0">
+                <a:solidFill>
+                  <a:schemeClr val="accent6">
+                    <a:lumMod val="60000"/>
+                    <a:lumOff val="40000"/>
+                  </a:schemeClr>
+                </a:solidFill>
+              </a:rPr>
+              <a:t>(e.g., 0.01, or based on input size).</a:t>
             </a:r>
           </a:p>
           <a:p>
@@ -11935,7 +12211,281 @@
 </p:sld>
 </file>
 
-<file path=ppt/slides/slide29.xml><?xml version="1.0" encoding="utf-8"?>
+<file path=ppt/slides/slide3.xml><?xml version="1.0" encoding="utf-8"?>
+<p:sld xmlns:a="http://schemas.openxmlformats.org/drawingml/2006/main" xmlns:r="http://schemas.openxmlformats.org/officeDocument/2006/relationships" xmlns:p="http://schemas.openxmlformats.org/presentationml/2006/main">
+  <p:cSld>
+    <p:spTree>
+      <p:nvGrpSpPr>
+        <p:cNvPr id="1" name="">
+          <a:extLst>
+            <a:ext uri="{FF2B5EF4-FFF2-40B4-BE49-F238E27FC236}">
+              <a16:creationId xmlns:a16="http://schemas.microsoft.com/office/drawing/2014/main" id="{E5B0F170-858A-1787-27EA-B8F6771D63BA}"/>
+            </a:ext>
+          </a:extLst>
+        </p:cNvPr>
+        <p:cNvGrpSpPr/>
+        <p:nvPr/>
+      </p:nvGrpSpPr>
+      <p:grpSpPr>
+        <a:xfrm>
+          <a:off x="0" y="0"/>
+          <a:ext cx="0" cy="0"/>
+          <a:chOff x="0" y="0"/>
+          <a:chExt cx="0" cy="0"/>
+        </a:xfrm>
+      </p:grpSpPr>
+      <p:sp>
+        <p:nvSpPr>
+          <p:cNvPr id="8" name="TextBox 7">
+            <a:extLst>
+              <a:ext uri="{FF2B5EF4-FFF2-40B4-BE49-F238E27FC236}">
+                <a16:creationId xmlns:a16="http://schemas.microsoft.com/office/drawing/2014/main" id="{0505E489-8B61-1137-D2BA-47E1F15F8A8C}"/>
+              </a:ext>
+            </a:extLst>
+          </p:cNvPr>
+          <p:cNvSpPr txBox="1"/>
+          <p:nvPr/>
+        </p:nvSpPr>
+        <p:spPr>
+          <a:xfrm>
+            <a:off x="548640" y="510278"/>
+            <a:ext cx="7050024" cy="2677656"/>
+          </a:xfrm>
+          <a:prstGeom prst="rect">
+            <a:avLst/>
+          </a:prstGeom>
+          <a:noFill/>
+        </p:spPr>
+        <p:txBody>
+          <a:bodyPr wrap="square">
+            <a:spAutoFit/>
+          </a:bodyPr>
+          <a:lstStyle/>
+          <a:p>
+            <a:r>
+              <a:rPr lang="en-US" sz="2400" dirty="0">
+                <a:solidFill>
+                  <a:schemeClr val="accent6">
+                    <a:lumMod val="60000"/>
+                    <a:lumOff val="40000"/>
+                  </a:schemeClr>
+                </a:solidFill>
+              </a:rPr>
+              <a:t>ANN can include many different architectures such as:</a:t>
+            </a:r>
+          </a:p>
+          <a:p>
+            <a:endParaRPr lang="en-US" sz="2400" dirty="0">
+              <a:solidFill>
+                <a:schemeClr val="accent6">
+                  <a:lumMod val="60000"/>
+                  <a:lumOff val="40000"/>
+                </a:schemeClr>
+              </a:solidFill>
+            </a:endParaRPr>
+          </a:p>
+          <a:p>
+            <a:pPr marL="342900" indent="-342900">
+              <a:buFont typeface="Arial" panose="020B0604020202020204" pitchFamily="34" charset="0"/>
+              <a:buChar char="•"/>
+            </a:pPr>
+            <a:r>
+              <a:rPr lang="en-US" sz="2400" dirty="0">
+                <a:solidFill>
+                  <a:schemeClr val="accent6">
+                    <a:lumMod val="60000"/>
+                    <a:lumOff val="40000"/>
+                  </a:schemeClr>
+                </a:solidFill>
+              </a:rPr>
+              <a:t>Single Layer Perceptron</a:t>
+            </a:r>
+          </a:p>
+          <a:p>
+            <a:pPr marL="342900" indent="-342900">
+              <a:buFont typeface="Arial" panose="020B0604020202020204" pitchFamily="34" charset="0"/>
+              <a:buChar char="•"/>
+            </a:pPr>
+            <a:r>
+              <a:rPr lang="en-US" sz="2400" dirty="0">
+                <a:solidFill>
+                  <a:schemeClr val="accent6">
+                    <a:lumMod val="60000"/>
+                    <a:lumOff val="40000"/>
+                  </a:schemeClr>
+                </a:solidFill>
+              </a:rPr>
+              <a:t>Multilayer Perceptron (MLP)</a:t>
+            </a:r>
+          </a:p>
+          <a:p>
+            <a:pPr marL="342900" indent="-342900">
+              <a:buFont typeface="Arial" panose="020B0604020202020204" pitchFamily="34" charset="0"/>
+              <a:buChar char="•"/>
+            </a:pPr>
+            <a:r>
+              <a:rPr lang="en-US" sz="2400" dirty="0">
+                <a:solidFill>
+                  <a:schemeClr val="accent6">
+                    <a:lumMod val="60000"/>
+                    <a:lumOff val="40000"/>
+                  </a:schemeClr>
+                </a:solidFill>
+              </a:rPr>
+              <a:t>Convolutional Neural Networks (CNN)</a:t>
+            </a:r>
+          </a:p>
+          <a:p>
+            <a:pPr marL="342900" indent="-342900">
+              <a:buFont typeface="Arial" panose="020B0604020202020204" pitchFamily="34" charset="0"/>
+              <a:buChar char="•"/>
+            </a:pPr>
+            <a:r>
+              <a:rPr lang="en-US" sz="2400" dirty="0">
+                <a:solidFill>
+                  <a:schemeClr val="accent6">
+                    <a:lumMod val="60000"/>
+                    <a:lumOff val="40000"/>
+                  </a:schemeClr>
+                </a:solidFill>
+              </a:rPr>
+              <a:t>Recurrent Neural Networks (RNN)</a:t>
+            </a:r>
+          </a:p>
+          <a:p>
+            <a:pPr marL="342900" indent="-342900">
+              <a:buFont typeface="Arial" panose="020B0604020202020204" pitchFamily="34" charset="0"/>
+              <a:buChar char="•"/>
+            </a:pPr>
+            <a:r>
+              <a:rPr lang="en-US" sz="2400" dirty="0">
+                <a:solidFill>
+                  <a:schemeClr val="accent6">
+                    <a:lumMod val="60000"/>
+                    <a:lumOff val="40000"/>
+                  </a:schemeClr>
+                </a:solidFill>
+              </a:rPr>
+              <a:t>Transformers</a:t>
+            </a:r>
+          </a:p>
+        </p:txBody>
+      </p:sp>
+      <p:pic>
+        <p:nvPicPr>
+          <p:cNvPr id="3" name="Picture 2">
+            <a:extLst>
+              <a:ext uri="{FF2B5EF4-FFF2-40B4-BE49-F238E27FC236}">
+                <a16:creationId xmlns:a16="http://schemas.microsoft.com/office/drawing/2014/main" id="{DCF4C277-4142-43CC-A8E3-473345B87187}"/>
+              </a:ext>
+            </a:extLst>
+          </p:cNvPr>
+          <p:cNvPicPr>
+            <a:picLocks noChangeAspect="1"/>
+          </p:cNvPicPr>
+          <p:nvPr/>
+        </p:nvPicPr>
+        <p:blipFill>
+          <a:blip r:embed="rId2"/>
+          <a:stretch>
+            <a:fillRect/>
+          </a:stretch>
+        </p:blipFill>
+        <p:spPr>
+          <a:xfrm>
+            <a:off x="7714999" y="1164611"/>
+            <a:ext cx="4378849" cy="2340568"/>
+          </a:xfrm>
+          <a:prstGeom prst="rect">
+            <a:avLst/>
+          </a:prstGeom>
+        </p:spPr>
+      </p:pic>
+      <p:sp>
+        <p:nvSpPr>
+          <p:cNvPr id="5" name="TextBox 4">
+            <a:extLst>
+              <a:ext uri="{FF2B5EF4-FFF2-40B4-BE49-F238E27FC236}">
+                <a16:creationId xmlns:a16="http://schemas.microsoft.com/office/drawing/2014/main" id="{05AD762E-F24B-995F-E539-9CD0E2D28765}"/>
+              </a:ext>
+            </a:extLst>
+          </p:cNvPr>
+          <p:cNvSpPr txBox="1"/>
+          <p:nvPr/>
+        </p:nvSpPr>
+        <p:spPr>
+          <a:xfrm>
+            <a:off x="169164" y="4203115"/>
+            <a:ext cx="6190488" cy="1200329"/>
+          </a:xfrm>
+          <a:prstGeom prst="rect">
+            <a:avLst/>
+          </a:prstGeom>
+          <a:noFill/>
+        </p:spPr>
+        <p:txBody>
+          <a:bodyPr wrap="square">
+            <a:spAutoFit/>
+          </a:bodyPr>
+          <a:lstStyle/>
+          <a:p>
+            <a:pPr marL="0" indent="0">
+              <a:buNone/>
+            </a:pPr>
+            <a:r>
+              <a:rPr lang="en-US" sz="2400" dirty="0">
+                <a:solidFill>
+                  <a:schemeClr val="accent6">
+                    <a:lumMod val="60000"/>
+                    <a:lumOff val="40000"/>
+                  </a:schemeClr>
+                </a:solidFill>
+              </a:rPr>
+              <a:t>Some interesting site to learn ANN:</a:t>
+            </a:r>
+          </a:p>
+          <a:p>
+            <a:pPr marL="0" indent="0">
+              <a:buNone/>
+            </a:pPr>
+            <a:endParaRPr lang="en-US" sz="2400" dirty="0">
+              <a:solidFill>
+                <a:schemeClr val="accent6">
+                  <a:lumMod val="60000"/>
+                  <a:lumOff val="40000"/>
+                </a:schemeClr>
+              </a:solidFill>
+            </a:endParaRPr>
+          </a:p>
+          <a:p>
+            <a:r>
+              <a:rPr lang="en-US" sz="2400" dirty="0">
+                <a:solidFill>
+                  <a:schemeClr val="accent6">
+                    <a:lumMod val="60000"/>
+                    <a:lumOff val="40000"/>
+                  </a:schemeClr>
+                </a:solidFill>
+              </a:rPr>
+              <a:t>https://playground.tensorflow.org/</a:t>
+            </a:r>
+          </a:p>
+        </p:txBody>
+      </p:sp>
+    </p:spTree>
+    <p:extLst>
+      <p:ext uri="{BB962C8B-B14F-4D97-AF65-F5344CB8AC3E}">
+        <p14:creationId xmlns:p14="http://schemas.microsoft.com/office/powerpoint/2010/main" val="1228341650"/>
+      </p:ext>
+    </p:extLst>
+  </p:cSld>
+  <p:clrMapOvr>
+    <a:masterClrMapping/>
+  </p:clrMapOvr>
+</p:sld>
+</file>
+
+<file path=ppt/slides/slide30.xml><?xml version="1.0" encoding="utf-8"?>
 <p:sld xmlns:a="http://schemas.openxmlformats.org/drawingml/2006/main" xmlns:r="http://schemas.openxmlformats.org/officeDocument/2006/relationships" xmlns:p="http://schemas.openxmlformats.org/presentationml/2006/main">
   <p:cSld>
     <p:spTree>
@@ -12030,742 +12580,6 @@
     <p:extLst>
       <p:ext uri="{BB962C8B-B14F-4D97-AF65-F5344CB8AC3E}">
         <p14:creationId xmlns:p14="http://schemas.microsoft.com/office/powerpoint/2010/main" val="2713072883"/>
-      </p:ext>
-    </p:extLst>
-  </p:cSld>
-  <p:clrMapOvr>
-    <a:masterClrMapping/>
-  </p:clrMapOvr>
-</p:sld>
-</file>
-
-<file path=ppt/slides/slide3.xml><?xml version="1.0" encoding="utf-8"?>
-<p:sld xmlns:a="http://schemas.openxmlformats.org/drawingml/2006/main" xmlns:r="http://schemas.openxmlformats.org/officeDocument/2006/relationships" xmlns:p="http://schemas.openxmlformats.org/presentationml/2006/main">
-  <p:cSld>
-    <p:spTree>
-      <p:nvGrpSpPr>
-        <p:cNvPr id="1" name="">
-          <a:extLst>
-            <a:ext uri="{FF2B5EF4-FFF2-40B4-BE49-F238E27FC236}">
-              <a16:creationId xmlns:a16="http://schemas.microsoft.com/office/drawing/2014/main" id="{338EAE5C-B03A-837D-0E24-DC5DB5A39B9A}"/>
-            </a:ext>
-          </a:extLst>
-        </p:cNvPr>
-        <p:cNvGrpSpPr/>
-        <p:nvPr/>
-      </p:nvGrpSpPr>
-      <p:grpSpPr>
-        <a:xfrm>
-          <a:off x="0" y="0"/>
-          <a:ext cx="0" cy="0"/>
-          <a:chOff x="0" y="0"/>
-          <a:chExt cx="0" cy="0"/>
-        </a:xfrm>
-      </p:grpSpPr>
-      <p:sp>
-        <p:nvSpPr>
-          <p:cNvPr id="6" name="TextBox 5">
-            <a:extLst>
-              <a:ext uri="{FF2B5EF4-FFF2-40B4-BE49-F238E27FC236}">
-                <a16:creationId xmlns:a16="http://schemas.microsoft.com/office/drawing/2014/main" id="{C0974069-D27A-3C8B-8485-29F6EE2E5B23}"/>
-              </a:ext>
-            </a:extLst>
-          </p:cNvPr>
-          <p:cNvSpPr txBox="1"/>
-          <p:nvPr/>
-        </p:nvSpPr>
-        <p:spPr>
-          <a:xfrm>
-            <a:off x="502920" y="170854"/>
-            <a:ext cx="10268712" cy="492122"/>
-          </a:xfrm>
-          <a:prstGeom prst="rect">
-            <a:avLst/>
-          </a:prstGeom>
-          <a:noFill/>
-        </p:spPr>
-        <p:txBody>
-          <a:bodyPr wrap="square">
-            <a:spAutoFit/>
-          </a:bodyPr>
-          <a:lstStyle/>
-          <a:p>
-            <a:pPr marL="0" marR="0">
-              <a:lnSpc>
-                <a:spcPct val="115000"/>
-              </a:lnSpc>
-              <a:spcAft>
-                <a:spcPts val="800"/>
-              </a:spcAft>
-              <a:buNone/>
-            </a:pPr>
-            <a:r>
-              <a:rPr lang="en-US" sz="2400" b="1" kern="100" dirty="0">
-                <a:solidFill>
-                  <a:schemeClr val="accent6">
-                    <a:lumMod val="60000"/>
-                    <a:lumOff val="40000"/>
-                  </a:schemeClr>
-                </a:solidFill>
-                <a:effectLst/>
-                <a:latin typeface="Calibri" panose="020F0502020204030204" pitchFamily="34" charset="0"/>
-                <a:ea typeface="Calibri" panose="020F0502020204030204" pitchFamily="34" charset="0"/>
-                <a:cs typeface="Times New Roman" panose="02020603050405020304" pitchFamily="18" charset="0"/>
-              </a:rPr>
-              <a:t>Key terms:</a:t>
-            </a:r>
-            <a:endParaRPr lang="en-IN" sz="2400" kern="100" dirty="0">
-              <a:solidFill>
-                <a:schemeClr val="accent6">
-                  <a:lumMod val="60000"/>
-                  <a:lumOff val="40000"/>
-                </a:schemeClr>
-              </a:solidFill>
-              <a:effectLst/>
-              <a:latin typeface="Calibri" panose="020F0502020204030204" pitchFamily="34" charset="0"/>
-              <a:ea typeface="Calibri" panose="020F0502020204030204" pitchFamily="34" charset="0"/>
-              <a:cs typeface="Times New Roman" panose="02020603050405020304" pitchFamily="18" charset="0"/>
-            </a:endParaRPr>
-          </a:p>
-        </p:txBody>
-      </p:sp>
-      <p:sp>
-        <p:nvSpPr>
-          <p:cNvPr id="3" name="TextBox 2">
-            <a:extLst>
-              <a:ext uri="{FF2B5EF4-FFF2-40B4-BE49-F238E27FC236}">
-                <a16:creationId xmlns:a16="http://schemas.microsoft.com/office/drawing/2014/main" id="{8BA1111C-8EEA-2B34-D203-67CCD8012E78}"/>
-              </a:ext>
-            </a:extLst>
-          </p:cNvPr>
-          <p:cNvSpPr txBox="1"/>
-          <p:nvPr/>
-        </p:nvSpPr>
-        <p:spPr>
-          <a:xfrm>
-            <a:off x="98298" y="1018521"/>
-            <a:ext cx="5479542" cy="2677656"/>
-          </a:xfrm>
-          <a:prstGeom prst="rect">
-            <a:avLst/>
-          </a:prstGeom>
-          <a:noFill/>
-        </p:spPr>
-        <p:txBody>
-          <a:bodyPr wrap="square">
-            <a:spAutoFit/>
-          </a:bodyPr>
-          <a:lstStyle/>
-          <a:p>
-            <a:r>
-              <a:rPr lang="en-US" sz="2400" b="1" dirty="0">
-                <a:solidFill>
-                  <a:schemeClr val="accent6">
-                    <a:lumMod val="60000"/>
-                    <a:lumOff val="40000"/>
-                  </a:schemeClr>
-                </a:solidFill>
-              </a:rPr>
-              <a:t>Structural Components (Architecture):</a:t>
-            </a:r>
-          </a:p>
-          <a:p>
-            <a:pPr marL="285750" indent="-285750">
-              <a:buFont typeface="Arial" panose="020B0604020202020204" pitchFamily="34" charset="0"/>
-              <a:buChar char="•"/>
-            </a:pPr>
-            <a:r>
-              <a:rPr lang="en-US" sz="2400" dirty="0">
-                <a:solidFill>
-                  <a:schemeClr val="accent6">
-                    <a:lumMod val="60000"/>
-                    <a:lumOff val="40000"/>
-                  </a:schemeClr>
-                </a:solidFill>
-              </a:rPr>
-              <a:t>Neurons/Nodes</a:t>
-            </a:r>
-          </a:p>
-          <a:p>
-            <a:pPr marL="285750" indent="-285750">
-              <a:buFont typeface="Arial" panose="020B0604020202020204" pitchFamily="34" charset="0"/>
-              <a:buChar char="•"/>
-            </a:pPr>
-            <a:r>
-              <a:rPr lang="en-US" sz="2400" dirty="0">
-                <a:solidFill>
-                  <a:schemeClr val="accent6">
-                    <a:lumMod val="60000"/>
-                    <a:lumOff val="40000"/>
-                  </a:schemeClr>
-                </a:solidFill>
-              </a:rPr>
-              <a:t>Input Layer</a:t>
-            </a:r>
-          </a:p>
-          <a:p>
-            <a:pPr marL="285750" indent="-285750">
-              <a:buFont typeface="Arial" panose="020B0604020202020204" pitchFamily="34" charset="0"/>
-              <a:buChar char="•"/>
-            </a:pPr>
-            <a:r>
-              <a:rPr lang="en-US" sz="2400" dirty="0">
-                <a:solidFill>
-                  <a:schemeClr val="accent6">
-                    <a:lumMod val="60000"/>
-                    <a:lumOff val="40000"/>
-                  </a:schemeClr>
-                </a:solidFill>
-              </a:rPr>
-              <a:t>Hidden Layers</a:t>
-            </a:r>
-          </a:p>
-          <a:p>
-            <a:pPr marL="285750" indent="-285750">
-              <a:buFont typeface="Arial" panose="020B0604020202020204" pitchFamily="34" charset="0"/>
-              <a:buChar char="•"/>
-            </a:pPr>
-            <a:r>
-              <a:rPr lang="en-US" sz="2400" dirty="0">
-                <a:solidFill>
-                  <a:schemeClr val="accent6">
-                    <a:lumMod val="60000"/>
-                    <a:lumOff val="40000"/>
-                  </a:schemeClr>
-                </a:solidFill>
-              </a:rPr>
-              <a:t>Output Layer</a:t>
-            </a:r>
-          </a:p>
-          <a:p>
-            <a:pPr marL="285750" indent="-285750">
-              <a:buFont typeface="Arial" panose="020B0604020202020204" pitchFamily="34" charset="0"/>
-              <a:buChar char="•"/>
-            </a:pPr>
-            <a:r>
-              <a:rPr lang="en-US" sz="2400" dirty="0">
-                <a:solidFill>
-                  <a:schemeClr val="accent6">
-                    <a:lumMod val="60000"/>
-                    <a:lumOff val="40000"/>
-                  </a:schemeClr>
-                </a:solidFill>
-              </a:rPr>
-              <a:t>Weights</a:t>
-            </a:r>
-          </a:p>
-          <a:p>
-            <a:pPr marL="285750" indent="-285750">
-              <a:buFont typeface="Arial" panose="020B0604020202020204" pitchFamily="34" charset="0"/>
-              <a:buChar char="•"/>
-            </a:pPr>
-            <a:r>
-              <a:rPr lang="en-US" sz="2400" dirty="0">
-                <a:solidFill>
-                  <a:schemeClr val="accent6">
-                    <a:lumMod val="60000"/>
-                    <a:lumOff val="40000"/>
-                  </a:schemeClr>
-                </a:solidFill>
-              </a:rPr>
-              <a:t>Bias</a:t>
-            </a:r>
-          </a:p>
-        </p:txBody>
-      </p:sp>
-      <p:sp>
-        <p:nvSpPr>
-          <p:cNvPr id="5" name="TextBox 4">
-            <a:extLst>
-              <a:ext uri="{FF2B5EF4-FFF2-40B4-BE49-F238E27FC236}">
-                <a16:creationId xmlns:a16="http://schemas.microsoft.com/office/drawing/2014/main" id="{E435D752-85E4-5DE5-BCA5-54FBC403D87C}"/>
-              </a:ext>
-            </a:extLst>
-          </p:cNvPr>
-          <p:cNvSpPr txBox="1"/>
-          <p:nvPr/>
-        </p:nvSpPr>
-        <p:spPr>
-          <a:xfrm>
-            <a:off x="5893308" y="1011395"/>
-            <a:ext cx="6190488" cy="2677656"/>
-          </a:xfrm>
-          <a:prstGeom prst="rect">
-            <a:avLst/>
-          </a:prstGeom>
-          <a:noFill/>
-        </p:spPr>
-        <p:txBody>
-          <a:bodyPr wrap="square">
-            <a:spAutoFit/>
-          </a:bodyPr>
-          <a:lstStyle/>
-          <a:p>
-            <a:r>
-              <a:rPr lang="en-US" sz="2400" b="1" dirty="0">
-                <a:solidFill>
-                  <a:schemeClr val="accent6">
-                    <a:lumMod val="60000"/>
-                    <a:lumOff val="40000"/>
-                  </a:schemeClr>
-                </a:solidFill>
-              </a:rPr>
-              <a:t>Operational Terms (Forward &amp; Backward Pass):</a:t>
-            </a:r>
-          </a:p>
-          <a:p>
-            <a:pPr marL="285750" indent="-285750">
-              <a:buFont typeface="Arial" panose="020B0604020202020204" pitchFamily="34" charset="0"/>
-              <a:buChar char="•"/>
-            </a:pPr>
-            <a:r>
-              <a:rPr lang="en-US" sz="2400" dirty="0">
-                <a:solidFill>
-                  <a:schemeClr val="accent6">
-                    <a:lumMod val="60000"/>
-                    <a:lumOff val="40000"/>
-                  </a:schemeClr>
-                </a:solidFill>
-              </a:rPr>
-              <a:t>Forward Propagation</a:t>
-            </a:r>
-          </a:p>
-          <a:p>
-            <a:pPr marL="285750" indent="-285750">
-              <a:buFont typeface="Arial" panose="020B0604020202020204" pitchFamily="34" charset="0"/>
-              <a:buChar char="•"/>
-            </a:pPr>
-            <a:r>
-              <a:rPr lang="en-US" sz="2400" dirty="0">
-                <a:solidFill>
-                  <a:schemeClr val="accent6">
-                    <a:lumMod val="60000"/>
-                    <a:lumOff val="40000"/>
-                  </a:schemeClr>
-                </a:solidFill>
-              </a:rPr>
-              <a:t>Activation Function: </a:t>
-            </a:r>
-            <a:r>
-              <a:rPr lang="en-US" sz="2400" dirty="0" err="1">
-                <a:solidFill>
-                  <a:schemeClr val="accent6">
-                    <a:lumMod val="60000"/>
-                    <a:lumOff val="40000"/>
-                  </a:schemeClr>
-                </a:solidFill>
-              </a:rPr>
-              <a:t>ReLU</a:t>
-            </a:r>
-            <a:r>
-              <a:rPr lang="en-US" sz="2400" dirty="0">
-                <a:solidFill>
-                  <a:schemeClr val="accent6">
-                    <a:lumMod val="60000"/>
-                    <a:lumOff val="40000"/>
-                  </a:schemeClr>
-                </a:solidFill>
-              </a:rPr>
-              <a:t> (Rectified Linear Unit), Sigmoid, Tanh, SoftMax</a:t>
-            </a:r>
-          </a:p>
-          <a:p>
-            <a:pPr marL="285750" indent="-285750">
-              <a:buFont typeface="Arial" panose="020B0604020202020204" pitchFamily="34" charset="0"/>
-              <a:buChar char="•"/>
-            </a:pPr>
-            <a:r>
-              <a:rPr lang="en-US" sz="2400" dirty="0">
-                <a:solidFill>
-                  <a:schemeClr val="accent6">
-                    <a:lumMod val="60000"/>
-                    <a:lumOff val="40000"/>
-                  </a:schemeClr>
-                </a:solidFill>
-              </a:rPr>
-              <a:t>Loss Function (Cost Function)</a:t>
-            </a:r>
-          </a:p>
-          <a:p>
-            <a:pPr marL="285750" indent="-285750">
-              <a:buFont typeface="Arial" panose="020B0604020202020204" pitchFamily="34" charset="0"/>
-              <a:buChar char="•"/>
-            </a:pPr>
-            <a:r>
-              <a:rPr lang="en-US" sz="2400" dirty="0">
-                <a:solidFill>
-                  <a:schemeClr val="accent6">
-                    <a:lumMod val="60000"/>
-                    <a:lumOff val="40000"/>
-                  </a:schemeClr>
-                </a:solidFill>
-              </a:rPr>
-              <a:t>Backpropagation</a:t>
-            </a:r>
-          </a:p>
-          <a:p>
-            <a:pPr marL="285750" indent="-285750">
-              <a:buFont typeface="Arial" panose="020B0604020202020204" pitchFamily="34" charset="0"/>
-              <a:buChar char="•"/>
-            </a:pPr>
-            <a:r>
-              <a:rPr lang="en-US" sz="2400" dirty="0">
-                <a:solidFill>
-                  <a:schemeClr val="accent6">
-                    <a:lumMod val="60000"/>
-                    <a:lumOff val="40000"/>
-                  </a:schemeClr>
-                </a:solidFill>
-              </a:rPr>
-              <a:t>Gradient Descent </a:t>
-            </a:r>
-          </a:p>
-        </p:txBody>
-      </p:sp>
-      <p:sp>
-        <p:nvSpPr>
-          <p:cNvPr id="9" name="TextBox 8">
-            <a:extLst>
-              <a:ext uri="{FF2B5EF4-FFF2-40B4-BE49-F238E27FC236}">
-                <a16:creationId xmlns:a16="http://schemas.microsoft.com/office/drawing/2014/main" id="{055CA305-2099-B24B-498E-26E27AFD54AF}"/>
-              </a:ext>
-            </a:extLst>
-          </p:cNvPr>
-          <p:cNvSpPr txBox="1"/>
-          <p:nvPr/>
-        </p:nvSpPr>
-        <p:spPr>
-          <a:xfrm>
-            <a:off x="2510028" y="4277374"/>
-            <a:ext cx="6190488" cy="2308324"/>
-          </a:xfrm>
-          <a:prstGeom prst="rect">
-            <a:avLst/>
-          </a:prstGeom>
-          <a:noFill/>
-        </p:spPr>
-        <p:txBody>
-          <a:bodyPr wrap="square">
-            <a:spAutoFit/>
-          </a:bodyPr>
-          <a:lstStyle/>
-          <a:p>
-            <a:r>
-              <a:rPr lang="en-US" sz="2400" b="1" dirty="0">
-                <a:solidFill>
-                  <a:schemeClr val="accent6">
-                    <a:lumMod val="60000"/>
-                    <a:lumOff val="40000"/>
-                  </a:schemeClr>
-                </a:solidFill>
-              </a:rPr>
-              <a:t>Training &amp; Hyperparameters:</a:t>
-            </a:r>
-          </a:p>
-          <a:p>
-            <a:pPr marL="285750" indent="-285750">
-              <a:buFont typeface="Arial" panose="020B0604020202020204" pitchFamily="34" charset="0"/>
-              <a:buChar char="•"/>
-            </a:pPr>
-            <a:r>
-              <a:rPr lang="en-US" sz="2400" dirty="0">
-                <a:solidFill>
-                  <a:schemeClr val="accent6">
-                    <a:lumMod val="60000"/>
-                    <a:lumOff val="40000"/>
-                  </a:schemeClr>
-                </a:solidFill>
-              </a:rPr>
-              <a:t>Learning Rate</a:t>
-            </a:r>
-          </a:p>
-          <a:p>
-            <a:pPr marL="285750" indent="-285750">
-              <a:buFont typeface="Arial" panose="020B0604020202020204" pitchFamily="34" charset="0"/>
-              <a:buChar char="•"/>
-            </a:pPr>
-            <a:r>
-              <a:rPr lang="en-US" sz="2400" dirty="0">
-                <a:solidFill>
-                  <a:schemeClr val="accent6">
-                    <a:lumMod val="60000"/>
-                    <a:lumOff val="40000"/>
-                  </a:schemeClr>
-                </a:solidFill>
-              </a:rPr>
-              <a:t>Optimizer</a:t>
-            </a:r>
-          </a:p>
-          <a:p>
-            <a:pPr marL="285750" indent="-285750">
-              <a:buFont typeface="Arial" panose="020B0604020202020204" pitchFamily="34" charset="0"/>
-              <a:buChar char="•"/>
-            </a:pPr>
-            <a:r>
-              <a:rPr lang="en-US" sz="2400" dirty="0">
-                <a:solidFill>
-                  <a:schemeClr val="accent6">
-                    <a:lumMod val="60000"/>
-                    <a:lumOff val="40000"/>
-                  </a:schemeClr>
-                </a:solidFill>
-              </a:rPr>
-              <a:t>Epoch</a:t>
-            </a:r>
-          </a:p>
-          <a:p>
-            <a:pPr marL="285750" indent="-285750">
-              <a:buFont typeface="Arial" panose="020B0604020202020204" pitchFamily="34" charset="0"/>
-              <a:buChar char="•"/>
-            </a:pPr>
-            <a:r>
-              <a:rPr lang="en-US" sz="2400" dirty="0">
-                <a:solidFill>
-                  <a:schemeClr val="accent6">
-                    <a:lumMod val="60000"/>
-                    <a:lumOff val="40000"/>
-                  </a:schemeClr>
-                </a:solidFill>
-              </a:rPr>
-              <a:t>Batch Size</a:t>
-            </a:r>
-          </a:p>
-          <a:p>
-            <a:pPr marL="285750" indent="-285750">
-              <a:buFont typeface="Arial" panose="020B0604020202020204" pitchFamily="34" charset="0"/>
-              <a:buChar char="•"/>
-            </a:pPr>
-            <a:r>
-              <a:rPr lang="en-US" sz="2400" dirty="0">
-                <a:solidFill>
-                  <a:schemeClr val="accent6">
-                    <a:lumMod val="60000"/>
-                    <a:lumOff val="40000"/>
-                  </a:schemeClr>
-                </a:solidFill>
-              </a:rPr>
-              <a:t>Batch Normalization</a:t>
-            </a:r>
-          </a:p>
-        </p:txBody>
-      </p:sp>
-    </p:spTree>
-    <p:extLst>
-      <p:ext uri="{BB962C8B-B14F-4D97-AF65-F5344CB8AC3E}">
-        <p14:creationId xmlns:p14="http://schemas.microsoft.com/office/powerpoint/2010/main" val="1429021497"/>
-      </p:ext>
-    </p:extLst>
-  </p:cSld>
-  <p:clrMapOvr>
-    <a:masterClrMapping/>
-  </p:clrMapOvr>
-</p:sld>
-</file>
-
-<file path=ppt/slides/slide30.xml><?xml version="1.0" encoding="utf-8"?>
-<p:sld xmlns:a="http://schemas.openxmlformats.org/drawingml/2006/main" xmlns:r="http://schemas.openxmlformats.org/officeDocument/2006/relationships" xmlns:p="http://schemas.openxmlformats.org/presentationml/2006/main">
-  <p:cSld>
-    <p:spTree>
-      <p:nvGrpSpPr>
-        <p:cNvPr id="1" name="">
-          <a:extLst>
-            <a:ext uri="{FF2B5EF4-FFF2-40B4-BE49-F238E27FC236}">
-              <a16:creationId xmlns:a16="http://schemas.microsoft.com/office/drawing/2014/main" id="{D6F6EAA2-835E-1B4A-C4A2-86B19E65AA7E}"/>
-            </a:ext>
-          </a:extLst>
-        </p:cNvPr>
-        <p:cNvGrpSpPr/>
-        <p:nvPr/>
-      </p:nvGrpSpPr>
-      <p:grpSpPr>
-        <a:xfrm>
-          <a:off x="0" y="0"/>
-          <a:ext cx="0" cy="0"/>
-          <a:chOff x="0" y="0"/>
-          <a:chExt cx="0" cy="0"/>
-        </a:xfrm>
-      </p:grpSpPr>
-      <p:sp>
-        <p:nvSpPr>
-          <p:cNvPr id="6" name="TextBox 5">
-            <a:extLst>
-              <a:ext uri="{FF2B5EF4-FFF2-40B4-BE49-F238E27FC236}">
-                <a16:creationId xmlns:a16="http://schemas.microsoft.com/office/drawing/2014/main" id="{9FEE99C5-627B-C078-8326-A6BE04624C5F}"/>
-              </a:ext>
-            </a:extLst>
-          </p:cNvPr>
-          <p:cNvSpPr txBox="1"/>
-          <p:nvPr/>
-        </p:nvSpPr>
-        <p:spPr>
-          <a:xfrm>
-            <a:off x="201168" y="344590"/>
-            <a:ext cx="11228832" cy="2677656"/>
-          </a:xfrm>
-          <a:prstGeom prst="rect">
-            <a:avLst/>
-          </a:prstGeom>
-          <a:noFill/>
-        </p:spPr>
-        <p:txBody>
-          <a:bodyPr wrap="square">
-            <a:spAutoFit/>
-          </a:bodyPr>
-          <a:lstStyle/>
-          <a:p>
-            <a:r>
-              <a:rPr lang="en-IN" sz="2400" b="1" dirty="0">
-                <a:solidFill>
-                  <a:schemeClr val="accent6">
-                    <a:lumMod val="60000"/>
-                    <a:lumOff val="40000"/>
-                  </a:schemeClr>
-                </a:solidFill>
-              </a:rPr>
-              <a:t>Common Applications</a:t>
-            </a:r>
-          </a:p>
-          <a:p>
-            <a:endParaRPr lang="en-US" sz="2400" dirty="0">
-              <a:solidFill>
-                <a:schemeClr val="accent6">
-                  <a:lumMod val="60000"/>
-                  <a:lumOff val="40000"/>
-                </a:schemeClr>
-              </a:solidFill>
-            </a:endParaRPr>
-          </a:p>
-          <a:p>
-            <a:pPr marL="342900" lvl="0" indent="-342900">
-              <a:buFont typeface="Arial" panose="020B0604020202020204" pitchFamily="34" charset="0"/>
-              <a:buChar char="•"/>
-            </a:pPr>
-            <a:r>
-              <a:rPr lang="en-IN" sz="2400" dirty="0">
-                <a:solidFill>
-                  <a:schemeClr val="accent6">
-                    <a:lumMod val="60000"/>
-                    <a:lumOff val="40000"/>
-                  </a:schemeClr>
-                </a:solidFill>
-              </a:rPr>
-              <a:t>Image classification</a:t>
-            </a:r>
-            <a:endParaRPr lang="en-US" sz="2400" dirty="0">
-              <a:solidFill>
-                <a:schemeClr val="accent6">
-                  <a:lumMod val="60000"/>
-                  <a:lumOff val="40000"/>
-                </a:schemeClr>
-              </a:solidFill>
-            </a:endParaRPr>
-          </a:p>
-          <a:p>
-            <a:pPr marL="342900" lvl="0" indent="-342900">
-              <a:buFont typeface="Arial" panose="020B0604020202020204" pitchFamily="34" charset="0"/>
-              <a:buChar char="•"/>
-            </a:pPr>
-            <a:r>
-              <a:rPr lang="en-IN" sz="2400" dirty="0">
-                <a:solidFill>
-                  <a:schemeClr val="accent6">
-                    <a:lumMod val="60000"/>
-                    <a:lumOff val="40000"/>
-                  </a:schemeClr>
-                </a:solidFill>
-              </a:rPr>
-              <a:t>Speech recognition</a:t>
-            </a:r>
-            <a:endParaRPr lang="en-US" sz="2400" dirty="0">
-              <a:solidFill>
-                <a:schemeClr val="accent6">
-                  <a:lumMod val="60000"/>
-                  <a:lumOff val="40000"/>
-                </a:schemeClr>
-              </a:solidFill>
-            </a:endParaRPr>
-          </a:p>
-          <a:p>
-            <a:pPr marL="342900" lvl="0" indent="-342900">
-              <a:buFont typeface="Arial" panose="020B0604020202020204" pitchFamily="34" charset="0"/>
-              <a:buChar char="•"/>
-            </a:pPr>
-            <a:r>
-              <a:rPr lang="en-IN" sz="2400" dirty="0">
-                <a:solidFill>
-                  <a:schemeClr val="accent6">
-                    <a:lumMod val="60000"/>
-                    <a:lumOff val="40000"/>
-                  </a:schemeClr>
-                </a:solidFill>
-              </a:rPr>
-              <a:t>Natural language processing</a:t>
-            </a:r>
-            <a:endParaRPr lang="en-US" sz="2400" dirty="0">
-              <a:solidFill>
-                <a:schemeClr val="accent6">
-                  <a:lumMod val="60000"/>
-                  <a:lumOff val="40000"/>
-                </a:schemeClr>
-              </a:solidFill>
-            </a:endParaRPr>
-          </a:p>
-          <a:p>
-            <a:pPr marL="342900" lvl="0" indent="-342900">
-              <a:buFont typeface="Arial" panose="020B0604020202020204" pitchFamily="34" charset="0"/>
-              <a:buChar char="•"/>
-            </a:pPr>
-            <a:r>
-              <a:rPr lang="en-IN" sz="2400" dirty="0">
-                <a:solidFill>
-                  <a:schemeClr val="accent6">
-                    <a:lumMod val="60000"/>
-                    <a:lumOff val="40000"/>
-                  </a:schemeClr>
-                </a:solidFill>
-              </a:rPr>
-              <a:t>Regression problems</a:t>
-            </a:r>
-            <a:endParaRPr lang="en-US" sz="2400" dirty="0">
-              <a:solidFill>
-                <a:schemeClr val="accent6">
-                  <a:lumMod val="60000"/>
-                  <a:lumOff val="40000"/>
-                </a:schemeClr>
-              </a:solidFill>
-            </a:endParaRPr>
-          </a:p>
-          <a:p>
-            <a:pPr marL="342900" lvl="0" indent="-342900">
-              <a:buFont typeface="Arial" panose="020B0604020202020204" pitchFamily="34" charset="0"/>
-              <a:buChar char="•"/>
-            </a:pPr>
-            <a:r>
-              <a:rPr lang="en-IN" sz="2400" dirty="0">
-                <a:solidFill>
-                  <a:schemeClr val="accent6">
-                    <a:lumMod val="60000"/>
-                    <a:lumOff val="40000"/>
-                  </a:schemeClr>
-                </a:solidFill>
-              </a:rPr>
-              <a:t>Function approximation</a:t>
-            </a:r>
-            <a:endParaRPr lang="en-US" sz="2400" dirty="0">
-              <a:solidFill>
-                <a:schemeClr val="accent6">
-                  <a:lumMod val="60000"/>
-                  <a:lumOff val="40000"/>
-                </a:schemeClr>
-              </a:solidFill>
-            </a:endParaRPr>
-          </a:p>
-        </p:txBody>
-      </p:sp>
-    </p:spTree>
-    <p:extLst>
-      <p:ext uri="{BB962C8B-B14F-4D97-AF65-F5344CB8AC3E}">
-        <p14:creationId xmlns:p14="http://schemas.microsoft.com/office/powerpoint/2010/main" val="1496326047"/>
       </p:ext>
     </p:extLst>
   </p:cSld>
@@ -12883,6 +12697,294 @@
 </file>
 
 <file path=ppt/slides/slide32.xml><?xml version="1.0" encoding="utf-8"?>
+<p:sld xmlns:a="http://schemas.openxmlformats.org/drawingml/2006/main" xmlns:r="http://schemas.openxmlformats.org/officeDocument/2006/relationships" xmlns:p="http://schemas.openxmlformats.org/presentationml/2006/main">
+  <p:cSld>
+    <p:spTree>
+      <p:nvGrpSpPr>
+        <p:cNvPr id="1" name="">
+          <a:extLst>
+            <a:ext uri="{FF2B5EF4-FFF2-40B4-BE49-F238E27FC236}">
+              <a16:creationId xmlns:a16="http://schemas.microsoft.com/office/drawing/2014/main" id="{DD931D7F-4279-DA2E-FA64-6CF3C441D414}"/>
+            </a:ext>
+          </a:extLst>
+        </p:cNvPr>
+        <p:cNvGrpSpPr/>
+        <p:nvPr/>
+      </p:nvGrpSpPr>
+      <p:grpSpPr>
+        <a:xfrm>
+          <a:off x="0" y="0"/>
+          <a:ext cx="0" cy="0"/>
+          <a:chOff x="0" y="0"/>
+          <a:chExt cx="0" cy="0"/>
+        </a:xfrm>
+      </p:grpSpPr>
+      <p:pic>
+        <p:nvPicPr>
+          <p:cNvPr id="7" name="Picture 6">
+            <a:extLst>
+              <a:ext uri="{FF2B5EF4-FFF2-40B4-BE49-F238E27FC236}">
+                <a16:creationId xmlns:a16="http://schemas.microsoft.com/office/drawing/2014/main" id="{640A13C1-6438-CC39-FEF2-29777366D64C}"/>
+              </a:ext>
+            </a:extLst>
+          </p:cNvPr>
+          <p:cNvPicPr>
+            <a:picLocks noChangeAspect="1"/>
+          </p:cNvPicPr>
+          <p:nvPr/>
+        </p:nvPicPr>
+        <p:blipFill>
+          <a:blip r:embed="rId2"/>
+          <a:stretch>
+            <a:fillRect/>
+          </a:stretch>
+        </p:blipFill>
+        <p:spPr>
+          <a:xfrm>
+            <a:off x="276688" y="1199839"/>
+            <a:ext cx="8602275" cy="2229161"/>
+          </a:xfrm>
+          <a:prstGeom prst="rect">
+            <a:avLst/>
+          </a:prstGeom>
+        </p:spPr>
+      </p:pic>
+      <p:pic>
+        <p:nvPicPr>
+          <p:cNvPr id="9" name="Picture 8">
+            <a:extLst>
+              <a:ext uri="{FF2B5EF4-FFF2-40B4-BE49-F238E27FC236}">
+                <a16:creationId xmlns:a16="http://schemas.microsoft.com/office/drawing/2014/main" id="{336EE6EC-C185-E280-1476-35DA93CE7D79}"/>
+              </a:ext>
+            </a:extLst>
+          </p:cNvPr>
+          <p:cNvPicPr>
+            <a:picLocks noChangeAspect="1"/>
+          </p:cNvPicPr>
+          <p:nvPr/>
+        </p:nvPicPr>
+        <p:blipFill>
+          <a:blip r:embed="rId3"/>
+          <a:stretch>
+            <a:fillRect/>
+          </a:stretch>
+        </p:blipFill>
+        <p:spPr>
+          <a:xfrm>
+            <a:off x="358984" y="4143984"/>
+            <a:ext cx="7449590" cy="2191056"/>
+          </a:xfrm>
+          <a:prstGeom prst="rect">
+            <a:avLst/>
+          </a:prstGeom>
+        </p:spPr>
+      </p:pic>
+    </p:spTree>
+    <p:extLst>
+      <p:ext uri="{BB962C8B-B14F-4D97-AF65-F5344CB8AC3E}">
+        <p14:creationId xmlns:p14="http://schemas.microsoft.com/office/powerpoint/2010/main" val="366625378"/>
+      </p:ext>
+    </p:extLst>
+  </p:cSld>
+  <p:clrMapOvr>
+    <a:masterClrMapping/>
+  </p:clrMapOvr>
+</p:sld>
+</file>
+
+<file path=ppt/slides/slide33.xml><?xml version="1.0" encoding="utf-8"?>
+<p:sld xmlns:a="http://schemas.openxmlformats.org/drawingml/2006/main" xmlns:r="http://schemas.openxmlformats.org/officeDocument/2006/relationships" xmlns:p="http://schemas.openxmlformats.org/presentationml/2006/main">
+  <p:cSld>
+    <p:spTree>
+      <p:nvGrpSpPr>
+        <p:cNvPr id="1" name="">
+          <a:extLst>
+            <a:ext uri="{FF2B5EF4-FFF2-40B4-BE49-F238E27FC236}">
+              <a16:creationId xmlns:a16="http://schemas.microsoft.com/office/drawing/2014/main" id="{2E4B6E61-D678-89B8-3E63-E6F4C6B67DC5}"/>
+            </a:ext>
+          </a:extLst>
+        </p:cNvPr>
+        <p:cNvGrpSpPr/>
+        <p:nvPr/>
+      </p:nvGrpSpPr>
+      <p:grpSpPr>
+        <a:xfrm>
+          <a:off x="0" y="0"/>
+          <a:ext cx="0" cy="0"/>
+          <a:chOff x="0" y="0"/>
+          <a:chExt cx="0" cy="0"/>
+        </a:xfrm>
+      </p:grpSpPr>
+      <p:pic>
+        <p:nvPicPr>
+          <p:cNvPr id="3" name="Picture 2">
+            <a:extLst>
+              <a:ext uri="{FF2B5EF4-FFF2-40B4-BE49-F238E27FC236}">
+                <a16:creationId xmlns:a16="http://schemas.microsoft.com/office/drawing/2014/main" id="{169ADB5D-BD91-7246-5F19-A587A8BD9593}"/>
+              </a:ext>
+            </a:extLst>
+          </p:cNvPr>
+          <p:cNvPicPr>
+            <a:picLocks noChangeAspect="1"/>
+          </p:cNvPicPr>
+          <p:nvPr/>
+        </p:nvPicPr>
+        <p:blipFill>
+          <a:blip r:embed="rId2"/>
+          <a:stretch>
+            <a:fillRect/>
+          </a:stretch>
+        </p:blipFill>
+        <p:spPr>
+          <a:xfrm>
+            <a:off x="1559715" y="0"/>
+            <a:ext cx="6878010" cy="4725059"/>
+          </a:xfrm>
+          <a:prstGeom prst="rect">
+            <a:avLst/>
+          </a:prstGeom>
+        </p:spPr>
+      </p:pic>
+      <p:pic>
+        <p:nvPicPr>
+          <p:cNvPr id="5" name="Picture 4">
+            <a:extLst>
+              <a:ext uri="{FF2B5EF4-FFF2-40B4-BE49-F238E27FC236}">
+                <a16:creationId xmlns:a16="http://schemas.microsoft.com/office/drawing/2014/main" id="{A5560947-A335-A693-5553-2B89CFDF27F7}"/>
+              </a:ext>
+            </a:extLst>
+          </p:cNvPr>
+          <p:cNvPicPr>
+            <a:picLocks noChangeAspect="1"/>
+          </p:cNvPicPr>
+          <p:nvPr/>
+        </p:nvPicPr>
+        <p:blipFill>
+          <a:blip r:embed="rId3"/>
+          <a:stretch>
+            <a:fillRect/>
+          </a:stretch>
+        </p:blipFill>
+        <p:spPr>
+          <a:xfrm>
+            <a:off x="252122" y="4695889"/>
+            <a:ext cx="10467693" cy="2162111"/>
+          </a:xfrm>
+          <a:prstGeom prst="rect">
+            <a:avLst/>
+          </a:prstGeom>
+        </p:spPr>
+      </p:pic>
+    </p:spTree>
+    <p:extLst>
+      <p:ext uri="{BB962C8B-B14F-4D97-AF65-F5344CB8AC3E}">
+        <p14:creationId xmlns:p14="http://schemas.microsoft.com/office/powerpoint/2010/main" val="1239774189"/>
+      </p:ext>
+    </p:extLst>
+  </p:cSld>
+  <p:clrMapOvr>
+    <a:masterClrMapping/>
+  </p:clrMapOvr>
+</p:sld>
+</file>
+
+<file path=ppt/slides/slide34.xml><?xml version="1.0" encoding="utf-8"?>
+<p:sld xmlns:a="http://schemas.openxmlformats.org/drawingml/2006/main" xmlns:r="http://schemas.openxmlformats.org/officeDocument/2006/relationships" xmlns:p="http://schemas.openxmlformats.org/presentationml/2006/main">
+  <p:cSld>
+    <p:spTree>
+      <p:nvGrpSpPr>
+        <p:cNvPr id="1" name="">
+          <a:extLst>
+            <a:ext uri="{FF2B5EF4-FFF2-40B4-BE49-F238E27FC236}">
+              <a16:creationId xmlns:a16="http://schemas.microsoft.com/office/drawing/2014/main" id="{4AAE74EE-974C-D5D5-31B0-E2809004AA5F}"/>
+            </a:ext>
+          </a:extLst>
+        </p:cNvPr>
+        <p:cNvGrpSpPr/>
+        <p:nvPr/>
+      </p:nvGrpSpPr>
+      <p:grpSpPr>
+        <a:xfrm>
+          <a:off x="0" y="0"/>
+          <a:ext cx="0" cy="0"/>
+          <a:chOff x="0" y="0"/>
+          <a:chExt cx="0" cy="0"/>
+        </a:xfrm>
+      </p:grpSpPr>
+      <p:pic>
+        <p:nvPicPr>
+          <p:cNvPr id="7" name="Picture 6">
+            <a:extLst>
+              <a:ext uri="{FF2B5EF4-FFF2-40B4-BE49-F238E27FC236}">
+                <a16:creationId xmlns:a16="http://schemas.microsoft.com/office/drawing/2014/main" id="{E6286D5B-D7A1-A346-AFA1-A5594833656E}"/>
+              </a:ext>
+            </a:extLst>
+          </p:cNvPr>
+          <p:cNvPicPr>
+            <a:picLocks noChangeAspect="1"/>
+          </p:cNvPicPr>
+          <p:nvPr/>
+        </p:nvPicPr>
+        <p:blipFill>
+          <a:blip r:embed="rId2"/>
+          <a:stretch>
+            <a:fillRect/>
+          </a:stretch>
+        </p:blipFill>
+        <p:spPr>
+          <a:xfrm>
+            <a:off x="1463040" y="1519529"/>
+            <a:ext cx="7836690" cy="1333670"/>
+          </a:xfrm>
+          <a:prstGeom prst="rect">
+            <a:avLst/>
+          </a:prstGeom>
+        </p:spPr>
+      </p:pic>
+      <p:pic>
+        <p:nvPicPr>
+          <p:cNvPr id="9" name="Picture 8">
+            <a:extLst>
+              <a:ext uri="{FF2B5EF4-FFF2-40B4-BE49-F238E27FC236}">
+                <a16:creationId xmlns:a16="http://schemas.microsoft.com/office/drawing/2014/main" id="{158BA166-1BE5-6820-717B-96309370BBC2}"/>
+              </a:ext>
+            </a:extLst>
+          </p:cNvPr>
+          <p:cNvPicPr>
+            <a:picLocks noChangeAspect="1"/>
+          </p:cNvPicPr>
+          <p:nvPr/>
+        </p:nvPicPr>
+        <p:blipFill>
+          <a:blip r:embed="rId3"/>
+          <a:stretch>
+            <a:fillRect/>
+          </a:stretch>
+        </p:blipFill>
+        <p:spPr>
+          <a:xfrm>
+            <a:off x="155448" y="3825387"/>
+            <a:ext cx="11585448" cy="977472"/>
+          </a:xfrm>
+          <a:prstGeom prst="rect">
+            <a:avLst/>
+          </a:prstGeom>
+        </p:spPr>
+      </p:pic>
+    </p:spTree>
+    <p:extLst>
+      <p:ext uri="{BB962C8B-B14F-4D97-AF65-F5344CB8AC3E}">
+        <p14:creationId xmlns:p14="http://schemas.microsoft.com/office/powerpoint/2010/main" val="890780310"/>
+      </p:ext>
+    </p:extLst>
+  </p:cSld>
+  <p:clrMapOvr>
+    <a:masterClrMapping/>
+  </p:clrMapOvr>
+</p:sld>
+</file>
+
+<file path=ppt/slides/slide35.xml><?xml version="1.0" encoding="utf-8"?>
 <p:sld xmlns:a="http://schemas.openxmlformats.org/drawingml/2006/main" xmlns:r="http://schemas.openxmlformats.org/officeDocument/2006/relationships" xmlns:p="http://schemas.openxmlformats.org/presentationml/2006/main">
   <p:cSld>
     <p:spTree>
@@ -13635,294 +13737,6 @@
 </p:sld>
 </file>
 
-<file path=ppt/slides/slide33.xml><?xml version="1.0" encoding="utf-8"?>
-<p:sld xmlns:a="http://schemas.openxmlformats.org/drawingml/2006/main" xmlns:r="http://schemas.openxmlformats.org/officeDocument/2006/relationships" xmlns:p="http://schemas.openxmlformats.org/presentationml/2006/main">
-  <p:cSld>
-    <p:spTree>
-      <p:nvGrpSpPr>
-        <p:cNvPr id="1" name="">
-          <a:extLst>
-            <a:ext uri="{FF2B5EF4-FFF2-40B4-BE49-F238E27FC236}">
-              <a16:creationId xmlns:a16="http://schemas.microsoft.com/office/drawing/2014/main" id="{DD931D7F-4279-DA2E-FA64-6CF3C441D414}"/>
-            </a:ext>
-          </a:extLst>
-        </p:cNvPr>
-        <p:cNvGrpSpPr/>
-        <p:nvPr/>
-      </p:nvGrpSpPr>
-      <p:grpSpPr>
-        <a:xfrm>
-          <a:off x="0" y="0"/>
-          <a:ext cx="0" cy="0"/>
-          <a:chOff x="0" y="0"/>
-          <a:chExt cx="0" cy="0"/>
-        </a:xfrm>
-      </p:grpSpPr>
-      <p:pic>
-        <p:nvPicPr>
-          <p:cNvPr id="7" name="Picture 6">
-            <a:extLst>
-              <a:ext uri="{FF2B5EF4-FFF2-40B4-BE49-F238E27FC236}">
-                <a16:creationId xmlns:a16="http://schemas.microsoft.com/office/drawing/2014/main" id="{640A13C1-6438-CC39-FEF2-29777366D64C}"/>
-              </a:ext>
-            </a:extLst>
-          </p:cNvPr>
-          <p:cNvPicPr>
-            <a:picLocks noChangeAspect="1"/>
-          </p:cNvPicPr>
-          <p:nvPr/>
-        </p:nvPicPr>
-        <p:blipFill>
-          <a:blip r:embed="rId2"/>
-          <a:stretch>
-            <a:fillRect/>
-          </a:stretch>
-        </p:blipFill>
-        <p:spPr>
-          <a:xfrm>
-            <a:off x="358984" y="1199839"/>
-            <a:ext cx="8602275" cy="2229161"/>
-          </a:xfrm>
-          <a:prstGeom prst="rect">
-            <a:avLst/>
-          </a:prstGeom>
-        </p:spPr>
-      </p:pic>
-      <p:pic>
-        <p:nvPicPr>
-          <p:cNvPr id="9" name="Picture 8">
-            <a:extLst>
-              <a:ext uri="{FF2B5EF4-FFF2-40B4-BE49-F238E27FC236}">
-                <a16:creationId xmlns:a16="http://schemas.microsoft.com/office/drawing/2014/main" id="{336EE6EC-C185-E280-1476-35DA93CE7D79}"/>
-              </a:ext>
-            </a:extLst>
-          </p:cNvPr>
-          <p:cNvPicPr>
-            <a:picLocks noChangeAspect="1"/>
-          </p:cNvPicPr>
-          <p:nvPr/>
-        </p:nvPicPr>
-        <p:blipFill>
-          <a:blip r:embed="rId3"/>
-          <a:stretch>
-            <a:fillRect/>
-          </a:stretch>
-        </p:blipFill>
-        <p:spPr>
-          <a:xfrm>
-            <a:off x="358984" y="4143984"/>
-            <a:ext cx="7449590" cy="2191056"/>
-          </a:xfrm>
-          <a:prstGeom prst="rect">
-            <a:avLst/>
-          </a:prstGeom>
-        </p:spPr>
-      </p:pic>
-    </p:spTree>
-    <p:extLst>
-      <p:ext uri="{BB962C8B-B14F-4D97-AF65-F5344CB8AC3E}">
-        <p14:creationId xmlns:p14="http://schemas.microsoft.com/office/powerpoint/2010/main" val="366625378"/>
-      </p:ext>
-    </p:extLst>
-  </p:cSld>
-  <p:clrMapOvr>
-    <a:masterClrMapping/>
-  </p:clrMapOvr>
-</p:sld>
-</file>
-
-<file path=ppt/slides/slide34.xml><?xml version="1.0" encoding="utf-8"?>
-<p:sld xmlns:a="http://schemas.openxmlformats.org/drawingml/2006/main" xmlns:r="http://schemas.openxmlformats.org/officeDocument/2006/relationships" xmlns:p="http://schemas.openxmlformats.org/presentationml/2006/main">
-  <p:cSld>
-    <p:spTree>
-      <p:nvGrpSpPr>
-        <p:cNvPr id="1" name="">
-          <a:extLst>
-            <a:ext uri="{FF2B5EF4-FFF2-40B4-BE49-F238E27FC236}">
-              <a16:creationId xmlns:a16="http://schemas.microsoft.com/office/drawing/2014/main" id="{2E4B6E61-D678-89B8-3E63-E6F4C6B67DC5}"/>
-            </a:ext>
-          </a:extLst>
-        </p:cNvPr>
-        <p:cNvGrpSpPr/>
-        <p:nvPr/>
-      </p:nvGrpSpPr>
-      <p:grpSpPr>
-        <a:xfrm>
-          <a:off x="0" y="0"/>
-          <a:ext cx="0" cy="0"/>
-          <a:chOff x="0" y="0"/>
-          <a:chExt cx="0" cy="0"/>
-        </a:xfrm>
-      </p:grpSpPr>
-      <p:pic>
-        <p:nvPicPr>
-          <p:cNvPr id="3" name="Picture 2">
-            <a:extLst>
-              <a:ext uri="{FF2B5EF4-FFF2-40B4-BE49-F238E27FC236}">
-                <a16:creationId xmlns:a16="http://schemas.microsoft.com/office/drawing/2014/main" id="{169ADB5D-BD91-7246-5F19-A587A8BD9593}"/>
-              </a:ext>
-            </a:extLst>
-          </p:cNvPr>
-          <p:cNvPicPr>
-            <a:picLocks noChangeAspect="1"/>
-          </p:cNvPicPr>
-          <p:nvPr/>
-        </p:nvPicPr>
-        <p:blipFill>
-          <a:blip r:embed="rId2"/>
-          <a:stretch>
-            <a:fillRect/>
-          </a:stretch>
-        </p:blipFill>
-        <p:spPr>
-          <a:xfrm>
-            <a:off x="1559715" y="0"/>
-            <a:ext cx="6878010" cy="4725059"/>
-          </a:xfrm>
-          <a:prstGeom prst="rect">
-            <a:avLst/>
-          </a:prstGeom>
-        </p:spPr>
-      </p:pic>
-      <p:pic>
-        <p:nvPicPr>
-          <p:cNvPr id="5" name="Picture 4">
-            <a:extLst>
-              <a:ext uri="{FF2B5EF4-FFF2-40B4-BE49-F238E27FC236}">
-                <a16:creationId xmlns:a16="http://schemas.microsoft.com/office/drawing/2014/main" id="{A5560947-A335-A693-5553-2B89CFDF27F7}"/>
-              </a:ext>
-            </a:extLst>
-          </p:cNvPr>
-          <p:cNvPicPr>
-            <a:picLocks noChangeAspect="1"/>
-          </p:cNvPicPr>
-          <p:nvPr/>
-        </p:nvPicPr>
-        <p:blipFill>
-          <a:blip r:embed="rId3"/>
-          <a:stretch>
-            <a:fillRect/>
-          </a:stretch>
-        </p:blipFill>
-        <p:spPr>
-          <a:xfrm>
-            <a:off x="252122" y="4695889"/>
-            <a:ext cx="10467693" cy="2162111"/>
-          </a:xfrm>
-          <a:prstGeom prst="rect">
-            <a:avLst/>
-          </a:prstGeom>
-        </p:spPr>
-      </p:pic>
-    </p:spTree>
-    <p:extLst>
-      <p:ext uri="{BB962C8B-B14F-4D97-AF65-F5344CB8AC3E}">
-        <p14:creationId xmlns:p14="http://schemas.microsoft.com/office/powerpoint/2010/main" val="1239774189"/>
-      </p:ext>
-    </p:extLst>
-  </p:cSld>
-  <p:clrMapOvr>
-    <a:masterClrMapping/>
-  </p:clrMapOvr>
-</p:sld>
-</file>
-
-<file path=ppt/slides/slide35.xml><?xml version="1.0" encoding="utf-8"?>
-<p:sld xmlns:a="http://schemas.openxmlformats.org/drawingml/2006/main" xmlns:r="http://schemas.openxmlformats.org/officeDocument/2006/relationships" xmlns:p="http://schemas.openxmlformats.org/presentationml/2006/main">
-  <p:cSld>
-    <p:spTree>
-      <p:nvGrpSpPr>
-        <p:cNvPr id="1" name="">
-          <a:extLst>
-            <a:ext uri="{FF2B5EF4-FFF2-40B4-BE49-F238E27FC236}">
-              <a16:creationId xmlns:a16="http://schemas.microsoft.com/office/drawing/2014/main" id="{4AAE74EE-974C-D5D5-31B0-E2809004AA5F}"/>
-            </a:ext>
-          </a:extLst>
-        </p:cNvPr>
-        <p:cNvGrpSpPr/>
-        <p:nvPr/>
-      </p:nvGrpSpPr>
-      <p:grpSpPr>
-        <a:xfrm>
-          <a:off x="0" y="0"/>
-          <a:ext cx="0" cy="0"/>
-          <a:chOff x="0" y="0"/>
-          <a:chExt cx="0" cy="0"/>
-        </a:xfrm>
-      </p:grpSpPr>
-      <p:pic>
-        <p:nvPicPr>
-          <p:cNvPr id="7" name="Picture 6">
-            <a:extLst>
-              <a:ext uri="{FF2B5EF4-FFF2-40B4-BE49-F238E27FC236}">
-                <a16:creationId xmlns:a16="http://schemas.microsoft.com/office/drawing/2014/main" id="{E6286D5B-D7A1-A346-AFA1-A5594833656E}"/>
-              </a:ext>
-            </a:extLst>
-          </p:cNvPr>
-          <p:cNvPicPr>
-            <a:picLocks noChangeAspect="1"/>
-          </p:cNvPicPr>
-          <p:nvPr/>
-        </p:nvPicPr>
-        <p:blipFill>
-          <a:blip r:embed="rId2"/>
-          <a:stretch>
-            <a:fillRect/>
-          </a:stretch>
-        </p:blipFill>
-        <p:spPr>
-          <a:xfrm>
-            <a:off x="1463040" y="1519529"/>
-            <a:ext cx="7836690" cy="1333670"/>
-          </a:xfrm>
-          <a:prstGeom prst="rect">
-            <a:avLst/>
-          </a:prstGeom>
-        </p:spPr>
-      </p:pic>
-      <p:pic>
-        <p:nvPicPr>
-          <p:cNvPr id="9" name="Picture 8">
-            <a:extLst>
-              <a:ext uri="{FF2B5EF4-FFF2-40B4-BE49-F238E27FC236}">
-                <a16:creationId xmlns:a16="http://schemas.microsoft.com/office/drawing/2014/main" id="{158BA166-1BE5-6820-717B-96309370BBC2}"/>
-              </a:ext>
-            </a:extLst>
-          </p:cNvPr>
-          <p:cNvPicPr>
-            <a:picLocks noChangeAspect="1"/>
-          </p:cNvPicPr>
-          <p:nvPr/>
-        </p:nvPicPr>
-        <p:blipFill>
-          <a:blip r:embed="rId3"/>
-          <a:stretch>
-            <a:fillRect/>
-          </a:stretch>
-        </p:blipFill>
-        <p:spPr>
-          <a:xfrm>
-            <a:off x="155448" y="3825387"/>
-            <a:ext cx="11585448" cy="977472"/>
-          </a:xfrm>
-          <a:prstGeom prst="rect">
-            <a:avLst/>
-          </a:prstGeom>
-        </p:spPr>
-      </p:pic>
-    </p:spTree>
-    <p:extLst>
-      <p:ext uri="{BB962C8B-B14F-4D97-AF65-F5344CB8AC3E}">
-        <p14:creationId xmlns:p14="http://schemas.microsoft.com/office/powerpoint/2010/main" val="890780310"/>
-      </p:ext>
-    </p:extLst>
-  </p:cSld>
-  <p:clrMapOvr>
-    <a:masterClrMapping/>
-  </p:clrMapOvr>
-</p:sld>
-</file>
-
 <file path=ppt/slides/slide36.xml><?xml version="1.0" encoding="utf-8"?>
 <p:sld xmlns:a="http://schemas.openxmlformats.org/drawingml/2006/main" xmlns:r="http://schemas.openxmlformats.org/officeDocument/2006/relationships" xmlns:p="http://schemas.openxmlformats.org/presentationml/2006/main">
   <p:cSld>
@@ -14209,6 +14023,529 @@
         <p:cNvPr id="1" name="">
           <a:extLst>
             <a:ext uri="{FF2B5EF4-FFF2-40B4-BE49-F238E27FC236}">
+              <a16:creationId xmlns:a16="http://schemas.microsoft.com/office/drawing/2014/main" id="{338EAE5C-B03A-837D-0E24-DC5DB5A39B9A}"/>
+            </a:ext>
+          </a:extLst>
+        </p:cNvPr>
+        <p:cNvGrpSpPr/>
+        <p:nvPr/>
+      </p:nvGrpSpPr>
+      <p:grpSpPr>
+        <a:xfrm>
+          <a:off x="0" y="0"/>
+          <a:ext cx="0" cy="0"/>
+          <a:chOff x="0" y="0"/>
+          <a:chExt cx="0" cy="0"/>
+        </a:xfrm>
+      </p:grpSpPr>
+      <p:sp>
+        <p:nvSpPr>
+          <p:cNvPr id="6" name="TextBox 5">
+            <a:extLst>
+              <a:ext uri="{FF2B5EF4-FFF2-40B4-BE49-F238E27FC236}">
+                <a16:creationId xmlns:a16="http://schemas.microsoft.com/office/drawing/2014/main" id="{C0974069-D27A-3C8B-8485-29F6EE2E5B23}"/>
+              </a:ext>
+            </a:extLst>
+          </p:cNvPr>
+          <p:cNvSpPr txBox="1"/>
+          <p:nvPr/>
+        </p:nvSpPr>
+        <p:spPr>
+          <a:xfrm>
+            <a:off x="502920" y="170854"/>
+            <a:ext cx="10268712" cy="492122"/>
+          </a:xfrm>
+          <a:prstGeom prst="rect">
+            <a:avLst/>
+          </a:prstGeom>
+          <a:noFill/>
+        </p:spPr>
+        <p:txBody>
+          <a:bodyPr wrap="square">
+            <a:spAutoFit/>
+          </a:bodyPr>
+          <a:lstStyle/>
+          <a:p>
+            <a:pPr marL="0" marR="0">
+              <a:lnSpc>
+                <a:spcPct val="115000"/>
+              </a:lnSpc>
+              <a:spcAft>
+                <a:spcPts val="800"/>
+              </a:spcAft>
+              <a:buNone/>
+            </a:pPr>
+            <a:r>
+              <a:rPr lang="en-US" sz="2400" b="1" kern="100" dirty="0">
+                <a:solidFill>
+                  <a:schemeClr val="accent6">
+                    <a:lumMod val="60000"/>
+                    <a:lumOff val="40000"/>
+                  </a:schemeClr>
+                </a:solidFill>
+                <a:effectLst/>
+                <a:latin typeface="Calibri" panose="020F0502020204030204" pitchFamily="34" charset="0"/>
+                <a:ea typeface="Calibri" panose="020F0502020204030204" pitchFamily="34" charset="0"/>
+                <a:cs typeface="Times New Roman" panose="02020603050405020304" pitchFamily="18" charset="0"/>
+              </a:rPr>
+              <a:t>Key terms:</a:t>
+            </a:r>
+            <a:endParaRPr lang="en-IN" sz="2400" kern="100" dirty="0">
+              <a:solidFill>
+                <a:schemeClr val="accent6">
+                  <a:lumMod val="60000"/>
+                  <a:lumOff val="40000"/>
+                </a:schemeClr>
+              </a:solidFill>
+              <a:effectLst/>
+              <a:latin typeface="Calibri" panose="020F0502020204030204" pitchFamily="34" charset="0"/>
+              <a:ea typeface="Calibri" panose="020F0502020204030204" pitchFamily="34" charset="0"/>
+              <a:cs typeface="Times New Roman" panose="02020603050405020304" pitchFamily="18" charset="0"/>
+            </a:endParaRPr>
+          </a:p>
+        </p:txBody>
+      </p:sp>
+      <p:sp>
+        <p:nvSpPr>
+          <p:cNvPr id="3" name="TextBox 2">
+            <a:extLst>
+              <a:ext uri="{FF2B5EF4-FFF2-40B4-BE49-F238E27FC236}">
+                <a16:creationId xmlns:a16="http://schemas.microsoft.com/office/drawing/2014/main" id="{8BA1111C-8EEA-2B34-D203-67CCD8012E78}"/>
+              </a:ext>
+            </a:extLst>
+          </p:cNvPr>
+          <p:cNvSpPr txBox="1"/>
+          <p:nvPr/>
+        </p:nvSpPr>
+        <p:spPr>
+          <a:xfrm>
+            <a:off x="98298" y="1018521"/>
+            <a:ext cx="5479542" cy="2677656"/>
+          </a:xfrm>
+          <a:prstGeom prst="rect">
+            <a:avLst/>
+          </a:prstGeom>
+          <a:noFill/>
+        </p:spPr>
+        <p:txBody>
+          <a:bodyPr wrap="square">
+            <a:spAutoFit/>
+          </a:bodyPr>
+          <a:lstStyle/>
+          <a:p>
+            <a:r>
+              <a:rPr lang="en-US" sz="2400" b="1" dirty="0">
+                <a:solidFill>
+                  <a:schemeClr val="accent6">
+                    <a:lumMod val="60000"/>
+                    <a:lumOff val="40000"/>
+                  </a:schemeClr>
+                </a:solidFill>
+              </a:rPr>
+              <a:t>Structural Components (Architecture):</a:t>
+            </a:r>
+          </a:p>
+          <a:p>
+            <a:pPr marL="285750" indent="-285750">
+              <a:buFont typeface="Arial" panose="020B0604020202020204" pitchFamily="34" charset="0"/>
+              <a:buChar char="•"/>
+            </a:pPr>
+            <a:r>
+              <a:rPr lang="en-US" sz="2400" dirty="0">
+                <a:solidFill>
+                  <a:schemeClr val="accent6">
+                    <a:lumMod val="60000"/>
+                    <a:lumOff val="40000"/>
+                  </a:schemeClr>
+                </a:solidFill>
+              </a:rPr>
+              <a:t>Neurons/Nodes</a:t>
+            </a:r>
+          </a:p>
+          <a:p>
+            <a:pPr marL="285750" indent="-285750">
+              <a:buFont typeface="Arial" panose="020B0604020202020204" pitchFamily="34" charset="0"/>
+              <a:buChar char="•"/>
+            </a:pPr>
+            <a:r>
+              <a:rPr lang="en-US" sz="2400" dirty="0">
+                <a:solidFill>
+                  <a:schemeClr val="accent6">
+                    <a:lumMod val="60000"/>
+                    <a:lumOff val="40000"/>
+                  </a:schemeClr>
+                </a:solidFill>
+              </a:rPr>
+              <a:t>Input Layer</a:t>
+            </a:r>
+          </a:p>
+          <a:p>
+            <a:pPr marL="285750" indent="-285750">
+              <a:buFont typeface="Arial" panose="020B0604020202020204" pitchFamily="34" charset="0"/>
+              <a:buChar char="•"/>
+            </a:pPr>
+            <a:r>
+              <a:rPr lang="en-US" sz="2400" dirty="0">
+                <a:solidFill>
+                  <a:schemeClr val="accent6">
+                    <a:lumMod val="60000"/>
+                    <a:lumOff val="40000"/>
+                  </a:schemeClr>
+                </a:solidFill>
+              </a:rPr>
+              <a:t>Hidden Layers</a:t>
+            </a:r>
+          </a:p>
+          <a:p>
+            <a:pPr marL="285750" indent="-285750">
+              <a:buFont typeface="Arial" panose="020B0604020202020204" pitchFamily="34" charset="0"/>
+              <a:buChar char="•"/>
+            </a:pPr>
+            <a:r>
+              <a:rPr lang="en-US" sz="2400" dirty="0">
+                <a:solidFill>
+                  <a:schemeClr val="accent6">
+                    <a:lumMod val="60000"/>
+                    <a:lumOff val="40000"/>
+                  </a:schemeClr>
+                </a:solidFill>
+              </a:rPr>
+              <a:t>Output Layer</a:t>
+            </a:r>
+          </a:p>
+          <a:p>
+            <a:pPr marL="285750" indent="-285750">
+              <a:buFont typeface="Arial" panose="020B0604020202020204" pitchFamily="34" charset="0"/>
+              <a:buChar char="•"/>
+            </a:pPr>
+            <a:r>
+              <a:rPr lang="en-US" sz="2400" dirty="0">
+                <a:solidFill>
+                  <a:schemeClr val="accent6">
+                    <a:lumMod val="60000"/>
+                    <a:lumOff val="40000"/>
+                  </a:schemeClr>
+                </a:solidFill>
+              </a:rPr>
+              <a:t>Weights</a:t>
+            </a:r>
+          </a:p>
+          <a:p>
+            <a:pPr marL="285750" indent="-285750">
+              <a:buFont typeface="Arial" panose="020B0604020202020204" pitchFamily="34" charset="0"/>
+              <a:buChar char="•"/>
+            </a:pPr>
+            <a:r>
+              <a:rPr lang="en-US" sz="2400" dirty="0">
+                <a:solidFill>
+                  <a:schemeClr val="accent6">
+                    <a:lumMod val="60000"/>
+                    <a:lumOff val="40000"/>
+                  </a:schemeClr>
+                </a:solidFill>
+              </a:rPr>
+              <a:t>Bias</a:t>
+            </a:r>
+          </a:p>
+        </p:txBody>
+      </p:sp>
+      <p:sp>
+        <p:nvSpPr>
+          <p:cNvPr id="5" name="TextBox 4">
+            <a:extLst>
+              <a:ext uri="{FF2B5EF4-FFF2-40B4-BE49-F238E27FC236}">
+                <a16:creationId xmlns:a16="http://schemas.microsoft.com/office/drawing/2014/main" id="{E435D752-85E4-5DE5-BCA5-54FBC403D87C}"/>
+              </a:ext>
+            </a:extLst>
+          </p:cNvPr>
+          <p:cNvSpPr txBox="1"/>
+          <p:nvPr/>
+        </p:nvSpPr>
+        <p:spPr>
+          <a:xfrm>
+            <a:off x="5893308" y="1011395"/>
+            <a:ext cx="6190488" cy="2677656"/>
+          </a:xfrm>
+          <a:prstGeom prst="rect">
+            <a:avLst/>
+          </a:prstGeom>
+          <a:noFill/>
+        </p:spPr>
+        <p:txBody>
+          <a:bodyPr wrap="square">
+            <a:spAutoFit/>
+          </a:bodyPr>
+          <a:lstStyle/>
+          <a:p>
+            <a:r>
+              <a:rPr lang="en-US" sz="2400" b="1" dirty="0">
+                <a:solidFill>
+                  <a:schemeClr val="accent6">
+                    <a:lumMod val="60000"/>
+                    <a:lumOff val="40000"/>
+                  </a:schemeClr>
+                </a:solidFill>
+              </a:rPr>
+              <a:t>Operational Terms (Forward &amp; Backward Pass):</a:t>
+            </a:r>
+          </a:p>
+          <a:p>
+            <a:pPr marL="285750" indent="-285750">
+              <a:buFont typeface="Arial" panose="020B0604020202020204" pitchFamily="34" charset="0"/>
+              <a:buChar char="•"/>
+            </a:pPr>
+            <a:r>
+              <a:rPr lang="en-US" sz="2400" dirty="0">
+                <a:solidFill>
+                  <a:schemeClr val="accent6">
+                    <a:lumMod val="60000"/>
+                    <a:lumOff val="40000"/>
+                  </a:schemeClr>
+                </a:solidFill>
+              </a:rPr>
+              <a:t>Forward Propagation</a:t>
+            </a:r>
+          </a:p>
+          <a:p>
+            <a:pPr marL="285750" indent="-285750">
+              <a:buFont typeface="Arial" panose="020B0604020202020204" pitchFamily="34" charset="0"/>
+              <a:buChar char="•"/>
+            </a:pPr>
+            <a:r>
+              <a:rPr lang="en-US" sz="2400" dirty="0">
+                <a:solidFill>
+                  <a:schemeClr val="accent6">
+                    <a:lumMod val="60000"/>
+                    <a:lumOff val="40000"/>
+                  </a:schemeClr>
+                </a:solidFill>
+              </a:rPr>
+              <a:t>Activation Function: </a:t>
+            </a:r>
+            <a:r>
+              <a:rPr lang="en-US" sz="2400" dirty="0" err="1">
+                <a:solidFill>
+                  <a:schemeClr val="accent6">
+                    <a:lumMod val="60000"/>
+                    <a:lumOff val="40000"/>
+                  </a:schemeClr>
+                </a:solidFill>
+              </a:rPr>
+              <a:t>ReLU</a:t>
+            </a:r>
+            <a:r>
+              <a:rPr lang="en-US" sz="2400" dirty="0">
+                <a:solidFill>
+                  <a:schemeClr val="accent6">
+                    <a:lumMod val="60000"/>
+                    <a:lumOff val="40000"/>
+                  </a:schemeClr>
+                </a:solidFill>
+              </a:rPr>
+              <a:t> (Rectified Linear Unit), Sigmoid, Tanh, SoftMax</a:t>
+            </a:r>
+          </a:p>
+          <a:p>
+            <a:pPr marL="285750" indent="-285750">
+              <a:buFont typeface="Arial" panose="020B0604020202020204" pitchFamily="34" charset="0"/>
+              <a:buChar char="•"/>
+            </a:pPr>
+            <a:r>
+              <a:rPr lang="en-US" sz="2400" dirty="0">
+                <a:solidFill>
+                  <a:schemeClr val="accent6">
+                    <a:lumMod val="60000"/>
+                    <a:lumOff val="40000"/>
+                  </a:schemeClr>
+                </a:solidFill>
+              </a:rPr>
+              <a:t>Loss Function (Cost Function)</a:t>
+            </a:r>
+          </a:p>
+          <a:p>
+            <a:pPr marL="285750" indent="-285750">
+              <a:buFont typeface="Arial" panose="020B0604020202020204" pitchFamily="34" charset="0"/>
+              <a:buChar char="•"/>
+            </a:pPr>
+            <a:r>
+              <a:rPr lang="en-US" sz="2400" dirty="0">
+                <a:solidFill>
+                  <a:schemeClr val="accent6">
+                    <a:lumMod val="60000"/>
+                    <a:lumOff val="40000"/>
+                  </a:schemeClr>
+                </a:solidFill>
+              </a:rPr>
+              <a:t>Backpropagation</a:t>
+            </a:r>
+          </a:p>
+          <a:p>
+            <a:pPr marL="285750" indent="-285750">
+              <a:buFont typeface="Arial" panose="020B0604020202020204" pitchFamily="34" charset="0"/>
+              <a:buChar char="•"/>
+            </a:pPr>
+            <a:r>
+              <a:rPr lang="en-US" sz="2400" dirty="0">
+                <a:solidFill>
+                  <a:schemeClr val="accent6">
+                    <a:lumMod val="60000"/>
+                    <a:lumOff val="40000"/>
+                  </a:schemeClr>
+                </a:solidFill>
+              </a:rPr>
+              <a:t>Gradient Descent </a:t>
+            </a:r>
+          </a:p>
+        </p:txBody>
+      </p:sp>
+      <p:sp>
+        <p:nvSpPr>
+          <p:cNvPr id="9" name="TextBox 8">
+            <a:extLst>
+              <a:ext uri="{FF2B5EF4-FFF2-40B4-BE49-F238E27FC236}">
+                <a16:creationId xmlns:a16="http://schemas.microsoft.com/office/drawing/2014/main" id="{055CA305-2099-B24B-498E-26E27AFD54AF}"/>
+              </a:ext>
+            </a:extLst>
+          </p:cNvPr>
+          <p:cNvSpPr txBox="1"/>
+          <p:nvPr/>
+        </p:nvSpPr>
+        <p:spPr>
+          <a:xfrm>
+            <a:off x="2510028" y="4277374"/>
+            <a:ext cx="6190488" cy="2308324"/>
+          </a:xfrm>
+          <a:prstGeom prst="rect">
+            <a:avLst/>
+          </a:prstGeom>
+          <a:noFill/>
+        </p:spPr>
+        <p:txBody>
+          <a:bodyPr wrap="square">
+            <a:spAutoFit/>
+          </a:bodyPr>
+          <a:lstStyle/>
+          <a:p>
+            <a:r>
+              <a:rPr lang="en-US" sz="2400" b="1" dirty="0">
+                <a:solidFill>
+                  <a:schemeClr val="accent6">
+                    <a:lumMod val="60000"/>
+                    <a:lumOff val="40000"/>
+                  </a:schemeClr>
+                </a:solidFill>
+              </a:rPr>
+              <a:t>Training &amp; Hyperparameters:</a:t>
+            </a:r>
+          </a:p>
+          <a:p>
+            <a:pPr marL="285750" indent="-285750">
+              <a:buFont typeface="Arial" panose="020B0604020202020204" pitchFamily="34" charset="0"/>
+              <a:buChar char="•"/>
+            </a:pPr>
+            <a:r>
+              <a:rPr lang="en-US" sz="2400" dirty="0">
+                <a:solidFill>
+                  <a:schemeClr val="accent6">
+                    <a:lumMod val="60000"/>
+                    <a:lumOff val="40000"/>
+                  </a:schemeClr>
+                </a:solidFill>
+              </a:rPr>
+              <a:t>Learning Rate</a:t>
+            </a:r>
+          </a:p>
+          <a:p>
+            <a:pPr marL="285750" indent="-285750">
+              <a:buFont typeface="Arial" panose="020B0604020202020204" pitchFamily="34" charset="0"/>
+              <a:buChar char="•"/>
+            </a:pPr>
+            <a:r>
+              <a:rPr lang="en-US" sz="2400" dirty="0">
+                <a:solidFill>
+                  <a:schemeClr val="accent6">
+                    <a:lumMod val="60000"/>
+                    <a:lumOff val="40000"/>
+                  </a:schemeClr>
+                </a:solidFill>
+              </a:rPr>
+              <a:t>Optimizer</a:t>
+            </a:r>
+          </a:p>
+          <a:p>
+            <a:pPr marL="285750" indent="-285750">
+              <a:buFont typeface="Arial" panose="020B0604020202020204" pitchFamily="34" charset="0"/>
+              <a:buChar char="•"/>
+            </a:pPr>
+            <a:r>
+              <a:rPr lang="en-US" sz="2400" dirty="0">
+                <a:solidFill>
+                  <a:schemeClr val="accent6">
+                    <a:lumMod val="60000"/>
+                    <a:lumOff val="40000"/>
+                  </a:schemeClr>
+                </a:solidFill>
+              </a:rPr>
+              <a:t>Epoch</a:t>
+            </a:r>
+          </a:p>
+          <a:p>
+            <a:pPr marL="285750" indent="-285750">
+              <a:buFont typeface="Arial" panose="020B0604020202020204" pitchFamily="34" charset="0"/>
+              <a:buChar char="•"/>
+            </a:pPr>
+            <a:r>
+              <a:rPr lang="en-US" sz="2400" dirty="0">
+                <a:solidFill>
+                  <a:schemeClr val="accent6">
+                    <a:lumMod val="60000"/>
+                    <a:lumOff val="40000"/>
+                  </a:schemeClr>
+                </a:solidFill>
+              </a:rPr>
+              <a:t>Batch Size</a:t>
+            </a:r>
+          </a:p>
+          <a:p>
+            <a:pPr marL="285750" indent="-285750">
+              <a:buFont typeface="Arial" panose="020B0604020202020204" pitchFamily="34" charset="0"/>
+              <a:buChar char="•"/>
+            </a:pPr>
+            <a:r>
+              <a:rPr lang="en-US" sz="2400" dirty="0">
+                <a:solidFill>
+                  <a:schemeClr val="accent6">
+                    <a:lumMod val="60000"/>
+                    <a:lumOff val="40000"/>
+                  </a:schemeClr>
+                </a:solidFill>
+              </a:rPr>
+              <a:t>Batch Normalization</a:t>
+            </a:r>
+          </a:p>
+        </p:txBody>
+      </p:sp>
+    </p:spTree>
+    <p:extLst>
+      <p:ext uri="{BB962C8B-B14F-4D97-AF65-F5344CB8AC3E}">
+        <p14:creationId xmlns:p14="http://schemas.microsoft.com/office/powerpoint/2010/main" val="1429021497"/>
+      </p:ext>
+    </p:extLst>
+  </p:cSld>
+  <p:clrMapOvr>
+    <a:masterClrMapping/>
+  </p:clrMapOvr>
+</p:sld>
+</file>
+
+<file path=ppt/slides/slide5.xml><?xml version="1.0" encoding="utf-8"?>
+<p:sld xmlns:a="http://schemas.openxmlformats.org/drawingml/2006/main" xmlns:r="http://schemas.openxmlformats.org/officeDocument/2006/relationships" xmlns:p="http://schemas.openxmlformats.org/presentationml/2006/main">
+  <p:cSld>
+    <p:spTree>
+      <p:nvGrpSpPr>
+        <p:cNvPr id="1" name="">
+          <a:extLst>
+            <a:ext uri="{FF2B5EF4-FFF2-40B4-BE49-F238E27FC236}">
               <a16:creationId xmlns:a16="http://schemas.microsoft.com/office/drawing/2014/main" id="{A11EF48C-D053-517B-E2E0-4D145F199C1F}"/>
             </a:ext>
           </a:extLst>
@@ -14238,7 +14575,7 @@
         </p:nvSpPr>
         <p:spPr>
           <a:xfrm>
-            <a:off x="2510028" y="244870"/>
+            <a:off x="2089404" y="244870"/>
             <a:ext cx="7621524" cy="830997"/>
           </a:xfrm>
           <a:prstGeom prst="rect">
@@ -14376,7 +14713,7 @@
 </p:sld>
 </file>
 
-<file path=ppt/slides/slide5.xml><?xml version="1.0" encoding="utf-8"?>
+<file path=ppt/slides/slide6.xml><?xml version="1.0" encoding="utf-8"?>
 <p:sld xmlns:a="http://schemas.openxmlformats.org/drawingml/2006/main" xmlns:r="http://schemas.openxmlformats.org/officeDocument/2006/relationships" xmlns:p="http://schemas.openxmlformats.org/presentationml/2006/main">
   <p:cSld>
     <p:spTree>
@@ -14997,8 +15334,8 @@
           </a:fontRef>
         </p:style>
       </p:cxnSp>
-      <mc:AlternateContent xmlns:mc="http://schemas.openxmlformats.org/markup-compatibility/2006">
-        <mc:Choice xmlns:p14="http://schemas.microsoft.com/office/powerpoint/2010/main" Requires="p14">
+      <mc:AlternateContent xmlns:mc="http://schemas.openxmlformats.org/markup-compatibility/2006" xmlns:p14="http://schemas.microsoft.com/office/powerpoint/2010/main">
+        <mc:Choice Requires="p14">
           <p:contentPart p14:bwMode="auto" r:id="rId3">
             <p14:nvContentPartPr>
               <p14:cNvPr id="26" name="Ink 25">
@@ -15017,7 +15354,7 @@
             </p14:xfrm>
           </p:contentPart>
         </mc:Choice>
-        <mc:Fallback>
+        <mc:Fallback xmlns="">
           <p:pic>
             <p:nvPicPr>
               <p:cNvPr id="26" name="Ink 25">
@@ -15068,8 +15405,8 @@
             <a:chExt cx="718200" cy="3656520"/>
           </a:xfrm>
         </p:grpSpPr>
-        <mc:AlternateContent xmlns:mc="http://schemas.openxmlformats.org/markup-compatibility/2006">
-          <mc:Choice xmlns:p14="http://schemas.microsoft.com/office/powerpoint/2010/main" Requires="p14">
+        <mc:AlternateContent xmlns:mc="http://schemas.openxmlformats.org/markup-compatibility/2006" xmlns:p14="http://schemas.microsoft.com/office/powerpoint/2010/main">
+          <mc:Choice Requires="p14">
             <p:contentPart p14:bwMode="auto" r:id="rId5">
               <p14:nvContentPartPr>
                 <p14:cNvPr id="23" name="Ink 22">
@@ -15088,7 +15425,7 @@
               </p14:xfrm>
             </p:contentPart>
           </mc:Choice>
-          <mc:Fallback>
+          <mc:Fallback xmlns="">
             <p:pic>
               <p:nvPicPr>
                 <p:cNvPr id="23" name="Ink 22">
@@ -15119,8 +15456,8 @@
             </p:pic>
           </mc:Fallback>
         </mc:AlternateContent>
-        <mc:AlternateContent xmlns:mc="http://schemas.openxmlformats.org/markup-compatibility/2006">
-          <mc:Choice xmlns:p14="http://schemas.microsoft.com/office/powerpoint/2010/main" Requires="p14">
+        <mc:AlternateContent xmlns:mc="http://schemas.openxmlformats.org/markup-compatibility/2006" xmlns:p14="http://schemas.microsoft.com/office/powerpoint/2010/main">
+          <mc:Choice Requires="p14">
             <p:contentPart p14:bwMode="auto" r:id="rId7">
               <p14:nvContentPartPr>
                 <p14:cNvPr id="24" name="Ink 23">
@@ -15139,7 +15476,7 @@
               </p14:xfrm>
             </p:contentPart>
           </mc:Choice>
-          <mc:Fallback>
+          <mc:Fallback xmlns="">
             <p:pic>
               <p:nvPicPr>
                 <p:cNvPr id="24" name="Ink 23">
@@ -15170,8 +15507,8 @@
             </p:pic>
           </mc:Fallback>
         </mc:AlternateContent>
-        <mc:AlternateContent xmlns:mc="http://schemas.openxmlformats.org/markup-compatibility/2006">
-          <mc:Choice xmlns:p14="http://schemas.microsoft.com/office/powerpoint/2010/main" Requires="p14">
+        <mc:AlternateContent xmlns:mc="http://schemas.openxmlformats.org/markup-compatibility/2006" xmlns:p14="http://schemas.microsoft.com/office/powerpoint/2010/main">
+          <mc:Choice Requires="p14">
             <p:contentPart p14:bwMode="auto" r:id="rId9">
               <p14:nvContentPartPr>
                 <p14:cNvPr id="25" name="Ink 24">
@@ -15190,7 +15527,7 @@
               </p14:xfrm>
             </p:contentPart>
           </mc:Choice>
-          <mc:Fallback>
+          <mc:Fallback xmlns="">
             <p:pic>
               <p:nvPicPr>
                 <p:cNvPr id="25" name="Ink 24">
@@ -15221,8 +15558,8 @@
             </p:pic>
           </mc:Fallback>
         </mc:AlternateContent>
-        <mc:AlternateContent xmlns:mc="http://schemas.openxmlformats.org/markup-compatibility/2006">
-          <mc:Choice xmlns:p14="http://schemas.microsoft.com/office/powerpoint/2010/main" Requires="p14">
+        <mc:AlternateContent xmlns:mc="http://schemas.openxmlformats.org/markup-compatibility/2006" xmlns:p14="http://schemas.microsoft.com/office/powerpoint/2010/main">
+          <mc:Choice Requires="p14">
             <p:contentPart p14:bwMode="auto" r:id="rId11">
               <p14:nvContentPartPr>
                 <p14:cNvPr id="28" name="Ink 27">
@@ -15241,7 +15578,7 @@
               </p14:xfrm>
             </p:contentPart>
           </mc:Choice>
-          <mc:Fallback>
+          <mc:Fallback xmlns="">
             <p:pic>
               <p:nvPicPr>
                 <p:cNvPr id="28" name="Ink 27">
@@ -15273,8 +15610,8 @@
           </mc:Fallback>
         </mc:AlternateContent>
       </p:grpSp>
-      <mc:AlternateContent xmlns:mc="http://schemas.openxmlformats.org/markup-compatibility/2006">
-        <mc:Choice xmlns:p14="http://schemas.microsoft.com/office/powerpoint/2010/main" Requires="p14">
+      <mc:AlternateContent xmlns:mc="http://schemas.openxmlformats.org/markup-compatibility/2006" xmlns:p14="http://schemas.microsoft.com/office/powerpoint/2010/main">
+        <mc:Choice Requires="p14">
           <p:contentPart p14:bwMode="auto" r:id="rId13">
             <p14:nvContentPartPr>
               <p14:cNvPr id="35" name="Ink 34">
@@ -15293,7 +15630,7 @@
             </p14:xfrm>
           </p:contentPart>
         </mc:Choice>
-        <mc:Fallback>
+        <mc:Fallback xmlns="">
           <p:pic>
             <p:nvPicPr>
               <p:cNvPr id="35" name="Ink 34">
@@ -15344,8 +15681,8 @@
             <a:chExt cx="721800" cy="4620960"/>
           </a:xfrm>
         </p:grpSpPr>
-        <mc:AlternateContent xmlns:mc="http://schemas.openxmlformats.org/markup-compatibility/2006">
-          <mc:Choice xmlns:p14="http://schemas.microsoft.com/office/powerpoint/2010/main" Requires="p14">
+        <mc:AlternateContent xmlns:mc="http://schemas.openxmlformats.org/markup-compatibility/2006" xmlns:p14="http://schemas.microsoft.com/office/powerpoint/2010/main">
+          <mc:Choice Requires="p14">
             <p:contentPart p14:bwMode="auto" r:id="rId15">
               <p14:nvContentPartPr>
                 <p14:cNvPr id="30" name="Ink 29">
@@ -15364,7 +15701,7 @@
               </p14:xfrm>
             </p:contentPart>
           </mc:Choice>
-          <mc:Fallback>
+          <mc:Fallback xmlns="">
             <p:pic>
               <p:nvPicPr>
                 <p:cNvPr id="30" name="Ink 29">
@@ -15395,8 +15732,8 @@
             </p:pic>
           </mc:Fallback>
         </mc:AlternateContent>
-        <mc:AlternateContent xmlns:mc="http://schemas.openxmlformats.org/markup-compatibility/2006">
-          <mc:Choice xmlns:p14="http://schemas.microsoft.com/office/powerpoint/2010/main" Requires="p14">
+        <mc:AlternateContent xmlns:mc="http://schemas.openxmlformats.org/markup-compatibility/2006" xmlns:p14="http://schemas.microsoft.com/office/powerpoint/2010/main">
+          <mc:Choice Requires="p14">
             <p:contentPart p14:bwMode="auto" r:id="rId17">
               <p14:nvContentPartPr>
                 <p14:cNvPr id="31" name="Ink 30">
@@ -15415,7 +15752,7 @@
               </p14:xfrm>
             </p:contentPart>
           </mc:Choice>
-          <mc:Fallback>
+          <mc:Fallback xmlns="">
             <p:pic>
               <p:nvPicPr>
                 <p:cNvPr id="31" name="Ink 30">
@@ -15446,8 +15783,8 @@
             </p:pic>
           </mc:Fallback>
         </mc:AlternateContent>
-        <mc:AlternateContent xmlns:mc="http://schemas.openxmlformats.org/markup-compatibility/2006">
-          <mc:Choice xmlns:p14="http://schemas.microsoft.com/office/powerpoint/2010/main" Requires="p14">
+        <mc:AlternateContent xmlns:mc="http://schemas.openxmlformats.org/markup-compatibility/2006" xmlns:p14="http://schemas.microsoft.com/office/powerpoint/2010/main">
+          <mc:Choice Requires="p14">
             <p:contentPart p14:bwMode="auto" r:id="rId19">
               <p14:nvContentPartPr>
                 <p14:cNvPr id="32" name="Ink 31">
@@ -15466,7 +15803,7 @@
               </p14:xfrm>
             </p:contentPart>
           </mc:Choice>
-          <mc:Fallback>
+          <mc:Fallback xmlns="">
             <p:pic>
               <p:nvPicPr>
                 <p:cNvPr id="32" name="Ink 31">
@@ -15497,8 +15834,8 @@
             </p:pic>
           </mc:Fallback>
         </mc:AlternateContent>
-        <mc:AlternateContent xmlns:mc="http://schemas.openxmlformats.org/markup-compatibility/2006">
-          <mc:Choice xmlns:p14="http://schemas.microsoft.com/office/powerpoint/2010/main" Requires="p14">
+        <mc:AlternateContent xmlns:mc="http://schemas.openxmlformats.org/markup-compatibility/2006" xmlns:p14="http://schemas.microsoft.com/office/powerpoint/2010/main">
+          <mc:Choice Requires="p14">
             <p:contentPart p14:bwMode="auto" r:id="rId21">
               <p14:nvContentPartPr>
                 <p14:cNvPr id="33" name="Ink 32">
@@ -15517,7 +15854,7 @@
               </p14:xfrm>
             </p:contentPart>
           </mc:Choice>
-          <mc:Fallback>
+          <mc:Fallback xmlns="">
             <p:pic>
               <p:nvPicPr>
                 <p:cNvPr id="33" name="Ink 32">
@@ -15548,8 +15885,8 @@
             </p:pic>
           </mc:Fallback>
         </mc:AlternateContent>
-        <mc:AlternateContent xmlns:mc="http://schemas.openxmlformats.org/markup-compatibility/2006">
-          <mc:Choice xmlns:p14="http://schemas.microsoft.com/office/powerpoint/2010/main" Requires="p14">
+        <mc:AlternateContent xmlns:mc="http://schemas.openxmlformats.org/markup-compatibility/2006" xmlns:p14="http://schemas.microsoft.com/office/powerpoint/2010/main">
+          <mc:Choice Requires="p14">
             <p:contentPart p14:bwMode="auto" r:id="rId23">
               <p14:nvContentPartPr>
                 <p14:cNvPr id="37" name="Ink 36">
@@ -15568,7 +15905,7 @@
               </p14:xfrm>
             </p:contentPart>
           </mc:Choice>
-          <mc:Fallback>
+          <mc:Fallback xmlns="">
             <p:pic>
               <p:nvPicPr>
                 <p:cNvPr id="37" name="Ink 36">
@@ -15620,8 +15957,8 @@
             <a:chExt cx="680040" cy="51120"/>
           </a:xfrm>
         </p:grpSpPr>
-        <mc:AlternateContent xmlns:mc="http://schemas.openxmlformats.org/markup-compatibility/2006">
-          <mc:Choice xmlns:p14="http://schemas.microsoft.com/office/powerpoint/2010/main" Requires="p14">
+        <mc:AlternateContent xmlns:mc="http://schemas.openxmlformats.org/markup-compatibility/2006" xmlns:p14="http://schemas.microsoft.com/office/powerpoint/2010/main">
+          <mc:Choice Requires="p14">
             <p:contentPart p14:bwMode="auto" r:id="rId25">
               <p14:nvContentPartPr>
                 <p14:cNvPr id="39" name="Ink 38">
@@ -15640,7 +15977,7 @@
               </p14:xfrm>
             </p:contentPart>
           </mc:Choice>
-          <mc:Fallback>
+          <mc:Fallback xmlns="">
             <p:pic>
               <p:nvPicPr>
                 <p:cNvPr id="39" name="Ink 38">
@@ -15671,8 +16008,8 @@
             </p:pic>
           </mc:Fallback>
         </mc:AlternateContent>
-        <mc:AlternateContent xmlns:mc="http://schemas.openxmlformats.org/markup-compatibility/2006">
-          <mc:Choice xmlns:p14="http://schemas.microsoft.com/office/powerpoint/2010/main" Requires="p14">
+        <mc:AlternateContent xmlns:mc="http://schemas.openxmlformats.org/markup-compatibility/2006" xmlns:p14="http://schemas.microsoft.com/office/powerpoint/2010/main">
+          <mc:Choice Requires="p14">
             <p:contentPart p14:bwMode="auto" r:id="rId27">
               <p14:nvContentPartPr>
                 <p14:cNvPr id="40" name="Ink 39">
@@ -15691,7 +16028,7 @@
               </p14:xfrm>
             </p:contentPart>
           </mc:Choice>
-          <mc:Fallback>
+          <mc:Fallback xmlns="">
             <p:pic>
               <p:nvPicPr>
                 <p:cNvPr id="40" name="Ink 39">
@@ -15722,8 +16059,8 @@
             </p:pic>
           </mc:Fallback>
         </mc:AlternateContent>
-        <mc:AlternateContent xmlns:mc="http://schemas.openxmlformats.org/markup-compatibility/2006">
-          <mc:Choice xmlns:p14="http://schemas.microsoft.com/office/powerpoint/2010/main" Requires="p14">
+        <mc:AlternateContent xmlns:mc="http://schemas.openxmlformats.org/markup-compatibility/2006" xmlns:p14="http://schemas.microsoft.com/office/powerpoint/2010/main">
+          <mc:Choice Requires="p14">
             <p:contentPart p14:bwMode="auto" r:id="rId29">
               <p14:nvContentPartPr>
                 <p14:cNvPr id="41" name="Ink 40">
@@ -15742,7 +16079,7 @@
               </p14:xfrm>
             </p:contentPart>
           </mc:Choice>
-          <mc:Fallback>
+          <mc:Fallback xmlns="">
             <p:pic>
               <p:nvPicPr>
                 <p:cNvPr id="41" name="Ink 40">
@@ -15774,8 +16111,8 @@
           </mc:Fallback>
         </mc:AlternateContent>
       </p:grpSp>
-      <mc:AlternateContent xmlns:mc="http://schemas.openxmlformats.org/markup-compatibility/2006">
-        <mc:Choice xmlns:p14="http://schemas.microsoft.com/office/powerpoint/2010/main" Requires="p14">
+      <mc:AlternateContent xmlns:mc="http://schemas.openxmlformats.org/markup-compatibility/2006" xmlns:p14="http://schemas.microsoft.com/office/powerpoint/2010/main">
+        <mc:Choice Requires="p14">
           <p:contentPart p14:bwMode="auto" r:id="rId31">
             <p14:nvContentPartPr>
               <p14:cNvPr id="42" name="Ink 41">
@@ -15794,7 +16131,7 @@
             </p14:xfrm>
           </p:contentPart>
         </mc:Choice>
-        <mc:Fallback>
+        <mc:Fallback xmlns="">
           <p:pic>
             <p:nvPicPr>
               <p:cNvPr id="42" name="Ink 41">
@@ -15845,8 +16182,8 @@
             <a:chExt cx="369360" cy="179640"/>
           </a:xfrm>
         </p:grpSpPr>
-        <mc:AlternateContent xmlns:mc="http://schemas.openxmlformats.org/markup-compatibility/2006">
-          <mc:Choice xmlns:p14="http://schemas.microsoft.com/office/powerpoint/2010/main" Requires="p14">
+        <mc:AlternateContent xmlns:mc="http://schemas.openxmlformats.org/markup-compatibility/2006" xmlns:p14="http://schemas.microsoft.com/office/powerpoint/2010/main">
+          <mc:Choice Requires="p14">
             <p:contentPart p14:bwMode="auto" r:id="rId33">
               <p14:nvContentPartPr>
                 <p14:cNvPr id="44" name="Ink 43">
@@ -15865,7 +16202,7 @@
               </p14:xfrm>
             </p:contentPart>
           </mc:Choice>
-          <mc:Fallback>
+          <mc:Fallback xmlns="">
             <p:pic>
               <p:nvPicPr>
                 <p:cNvPr id="44" name="Ink 43">
@@ -15896,8 +16233,8 @@
             </p:pic>
           </mc:Fallback>
         </mc:AlternateContent>
-        <mc:AlternateContent xmlns:mc="http://schemas.openxmlformats.org/markup-compatibility/2006">
-          <mc:Choice xmlns:p14="http://schemas.microsoft.com/office/powerpoint/2010/main" Requires="p14">
+        <mc:AlternateContent xmlns:mc="http://schemas.openxmlformats.org/markup-compatibility/2006" xmlns:p14="http://schemas.microsoft.com/office/powerpoint/2010/main">
+          <mc:Choice Requires="p14">
             <p:contentPart p14:bwMode="auto" r:id="rId35">
               <p14:nvContentPartPr>
                 <p14:cNvPr id="45" name="Ink 44">
@@ -15916,7 +16253,7 @@
               </p14:xfrm>
             </p:contentPart>
           </mc:Choice>
-          <mc:Fallback>
+          <mc:Fallback xmlns="">
             <p:pic>
               <p:nvPicPr>
                 <p:cNvPr id="45" name="Ink 44">
@@ -15968,8 +16305,8 @@
             <a:chExt cx="381960" cy="130320"/>
           </a:xfrm>
         </p:grpSpPr>
-        <mc:AlternateContent xmlns:mc="http://schemas.openxmlformats.org/markup-compatibility/2006">
-          <mc:Choice xmlns:p14="http://schemas.microsoft.com/office/powerpoint/2010/main" Requires="p14">
+        <mc:AlternateContent xmlns:mc="http://schemas.openxmlformats.org/markup-compatibility/2006" xmlns:p14="http://schemas.microsoft.com/office/powerpoint/2010/main">
+          <mc:Choice Requires="p14">
             <p:contentPart p14:bwMode="auto" r:id="rId37">
               <p14:nvContentPartPr>
                 <p14:cNvPr id="46" name="Ink 45">
@@ -15988,7 +16325,7 @@
               </p14:xfrm>
             </p:contentPart>
           </mc:Choice>
-          <mc:Fallback>
+          <mc:Fallback xmlns="">
             <p:pic>
               <p:nvPicPr>
                 <p:cNvPr id="46" name="Ink 45">
@@ -16019,8 +16356,8 @@
             </p:pic>
           </mc:Fallback>
         </mc:AlternateContent>
-        <mc:AlternateContent xmlns:mc="http://schemas.openxmlformats.org/markup-compatibility/2006">
-          <mc:Choice xmlns:p14="http://schemas.microsoft.com/office/powerpoint/2010/main" Requires="p14">
+        <mc:AlternateContent xmlns:mc="http://schemas.openxmlformats.org/markup-compatibility/2006" xmlns:p14="http://schemas.microsoft.com/office/powerpoint/2010/main">
+          <mc:Choice Requires="p14">
             <p:contentPart p14:bwMode="auto" r:id="rId39">
               <p14:nvContentPartPr>
                 <p14:cNvPr id="47" name="Ink 46">
@@ -16039,7 +16376,7 @@
               </p14:xfrm>
             </p:contentPart>
           </mc:Choice>
-          <mc:Fallback>
+          <mc:Fallback xmlns="">
             <p:pic>
               <p:nvPicPr>
                 <p:cNvPr id="47" name="Ink 46">
@@ -16071,8 +16408,8 @@
           </mc:Fallback>
         </mc:AlternateContent>
       </p:grpSp>
-      <mc:AlternateContent xmlns:mc="http://schemas.openxmlformats.org/markup-compatibility/2006">
-        <mc:Choice xmlns:p14="http://schemas.microsoft.com/office/powerpoint/2010/main" Requires="p14">
+      <mc:AlternateContent xmlns:mc="http://schemas.openxmlformats.org/markup-compatibility/2006" xmlns:p14="http://schemas.microsoft.com/office/powerpoint/2010/main">
+        <mc:Choice Requires="p14">
           <p:contentPart p14:bwMode="auto" r:id="rId41">
             <p14:nvContentPartPr>
               <p14:cNvPr id="48" name="Ink 47">
@@ -16091,7 +16428,7 @@
             </p14:xfrm>
           </p:contentPart>
         </mc:Choice>
-        <mc:Fallback>
+        <mc:Fallback xmlns="">
           <p:pic>
             <p:nvPicPr>
               <p:cNvPr id="48" name="Ink 47">
@@ -16122,8 +16459,8 @@
           </p:pic>
         </mc:Fallback>
       </mc:AlternateContent>
-      <mc:AlternateContent xmlns:mc="http://schemas.openxmlformats.org/markup-compatibility/2006">
-        <mc:Choice xmlns:p14="http://schemas.microsoft.com/office/powerpoint/2010/main" Requires="p14">
+      <mc:AlternateContent xmlns:mc="http://schemas.openxmlformats.org/markup-compatibility/2006" xmlns:p14="http://schemas.microsoft.com/office/powerpoint/2010/main">
+        <mc:Choice Requires="p14">
           <p:contentPart p14:bwMode="auto" r:id="rId43">
             <p14:nvContentPartPr>
               <p14:cNvPr id="49" name="Ink 48">
@@ -16142,7 +16479,7 @@
             </p14:xfrm>
           </p:contentPart>
         </mc:Choice>
-        <mc:Fallback>
+        <mc:Fallback xmlns="">
           <p:pic>
             <p:nvPicPr>
               <p:cNvPr id="49" name="Ink 48">
@@ -16193,8 +16530,8 @@
             <a:chExt cx="1292040" cy="399240"/>
           </a:xfrm>
         </p:grpSpPr>
-        <mc:AlternateContent xmlns:mc="http://schemas.openxmlformats.org/markup-compatibility/2006">
-          <mc:Choice xmlns:p14="http://schemas.microsoft.com/office/powerpoint/2010/main" Requires="p14">
+        <mc:AlternateContent xmlns:mc="http://schemas.openxmlformats.org/markup-compatibility/2006" xmlns:p14="http://schemas.microsoft.com/office/powerpoint/2010/main">
+          <mc:Choice Requires="p14">
             <p:contentPart p14:bwMode="auto" r:id="rId45">
               <p14:nvContentPartPr>
                 <p14:cNvPr id="52" name="Ink 51">
@@ -16213,7 +16550,7 @@
               </p14:xfrm>
             </p:contentPart>
           </mc:Choice>
-          <mc:Fallback>
+          <mc:Fallback xmlns="">
             <p:pic>
               <p:nvPicPr>
                 <p:cNvPr id="52" name="Ink 51">
@@ -16244,8 +16581,8 @@
             </p:pic>
           </mc:Fallback>
         </mc:AlternateContent>
-        <mc:AlternateContent xmlns:mc="http://schemas.openxmlformats.org/markup-compatibility/2006">
-          <mc:Choice xmlns:p14="http://schemas.microsoft.com/office/powerpoint/2010/main" Requires="p14">
+        <mc:AlternateContent xmlns:mc="http://schemas.openxmlformats.org/markup-compatibility/2006" xmlns:p14="http://schemas.microsoft.com/office/powerpoint/2010/main">
+          <mc:Choice Requires="p14">
             <p:contentPart p14:bwMode="auto" r:id="rId47">
               <p14:nvContentPartPr>
                 <p14:cNvPr id="53" name="Ink 52">
@@ -16264,7 +16601,7 @@
               </p14:xfrm>
             </p:contentPart>
           </mc:Choice>
-          <mc:Fallback>
+          <mc:Fallback xmlns="">
             <p:pic>
               <p:nvPicPr>
                 <p:cNvPr id="53" name="Ink 52">
@@ -16295,8 +16632,8 @@
             </p:pic>
           </mc:Fallback>
         </mc:AlternateContent>
-        <mc:AlternateContent xmlns:mc="http://schemas.openxmlformats.org/markup-compatibility/2006">
-          <mc:Choice xmlns:p14="http://schemas.microsoft.com/office/powerpoint/2010/main" Requires="p14">
+        <mc:AlternateContent xmlns:mc="http://schemas.openxmlformats.org/markup-compatibility/2006" xmlns:p14="http://schemas.microsoft.com/office/powerpoint/2010/main">
+          <mc:Choice Requires="p14">
             <p:contentPart p14:bwMode="auto" r:id="rId49">
               <p14:nvContentPartPr>
                 <p14:cNvPr id="54" name="Ink 53">
@@ -16315,7 +16652,7 @@
               </p14:xfrm>
             </p:contentPart>
           </mc:Choice>
-          <mc:Fallback>
+          <mc:Fallback xmlns="">
             <p:pic>
               <p:nvPicPr>
                 <p:cNvPr id="54" name="Ink 53">
@@ -16346,8 +16683,8 @@
             </p:pic>
           </mc:Fallback>
         </mc:AlternateContent>
-        <mc:AlternateContent xmlns:mc="http://schemas.openxmlformats.org/markup-compatibility/2006">
-          <mc:Choice xmlns:p14="http://schemas.microsoft.com/office/powerpoint/2010/main" Requires="p14">
+        <mc:AlternateContent xmlns:mc="http://schemas.openxmlformats.org/markup-compatibility/2006" xmlns:p14="http://schemas.microsoft.com/office/powerpoint/2010/main">
+          <mc:Choice Requires="p14">
             <p:contentPart p14:bwMode="auto" r:id="rId51">
               <p14:nvContentPartPr>
                 <p14:cNvPr id="55" name="Ink 54">
@@ -16366,7 +16703,7 @@
               </p14:xfrm>
             </p:contentPart>
           </mc:Choice>
-          <mc:Fallback>
+          <mc:Fallback xmlns="">
             <p:pic>
               <p:nvPicPr>
                 <p:cNvPr id="55" name="Ink 54">
@@ -16397,8 +16734,8 @@
             </p:pic>
           </mc:Fallback>
         </mc:AlternateContent>
-        <mc:AlternateContent xmlns:mc="http://schemas.openxmlformats.org/markup-compatibility/2006">
-          <mc:Choice xmlns:p14="http://schemas.microsoft.com/office/powerpoint/2010/main" Requires="p14">
+        <mc:AlternateContent xmlns:mc="http://schemas.openxmlformats.org/markup-compatibility/2006" xmlns:p14="http://schemas.microsoft.com/office/powerpoint/2010/main">
+          <mc:Choice Requires="p14">
             <p:contentPart p14:bwMode="auto" r:id="rId53">
               <p14:nvContentPartPr>
                 <p14:cNvPr id="56" name="Ink 55">
@@ -16417,7 +16754,7 @@
               </p14:xfrm>
             </p:contentPart>
           </mc:Choice>
-          <mc:Fallback>
+          <mc:Fallback xmlns="">
             <p:pic>
               <p:nvPicPr>
                 <p:cNvPr id="56" name="Ink 55">
@@ -16448,8 +16785,8 @@
             </p:pic>
           </mc:Fallback>
         </mc:AlternateContent>
-        <mc:AlternateContent xmlns:mc="http://schemas.openxmlformats.org/markup-compatibility/2006">
-          <mc:Choice xmlns:p14="http://schemas.microsoft.com/office/powerpoint/2010/main" Requires="p14">
+        <mc:AlternateContent xmlns:mc="http://schemas.openxmlformats.org/markup-compatibility/2006" xmlns:p14="http://schemas.microsoft.com/office/powerpoint/2010/main">
+          <mc:Choice Requires="p14">
             <p:contentPart p14:bwMode="auto" r:id="rId55">
               <p14:nvContentPartPr>
                 <p14:cNvPr id="57" name="Ink 56">
@@ -16468,7 +16805,7 @@
               </p14:xfrm>
             </p:contentPart>
           </mc:Choice>
-          <mc:Fallback>
+          <mc:Fallback xmlns="">
             <p:pic>
               <p:nvPicPr>
                 <p:cNvPr id="57" name="Ink 56">
@@ -16499,8 +16836,8 @@
             </p:pic>
           </mc:Fallback>
         </mc:AlternateContent>
-        <mc:AlternateContent xmlns:mc="http://schemas.openxmlformats.org/markup-compatibility/2006">
-          <mc:Choice xmlns:p14="http://schemas.microsoft.com/office/powerpoint/2010/main" Requires="p14">
+        <mc:AlternateContent xmlns:mc="http://schemas.openxmlformats.org/markup-compatibility/2006" xmlns:p14="http://schemas.microsoft.com/office/powerpoint/2010/main">
+          <mc:Choice Requires="p14">
             <p:contentPart p14:bwMode="auto" r:id="rId57">
               <p14:nvContentPartPr>
                 <p14:cNvPr id="59" name="Ink 58">
@@ -16519,7 +16856,7 @@
               </p14:xfrm>
             </p:contentPart>
           </mc:Choice>
-          <mc:Fallback>
+          <mc:Fallback xmlns="">
             <p:pic>
               <p:nvPicPr>
                 <p:cNvPr id="59" name="Ink 58">
@@ -16550,8 +16887,8 @@
             </p:pic>
           </mc:Fallback>
         </mc:AlternateContent>
-        <mc:AlternateContent xmlns:mc="http://schemas.openxmlformats.org/markup-compatibility/2006">
-          <mc:Choice xmlns:p14="http://schemas.microsoft.com/office/powerpoint/2010/main" Requires="p14">
+        <mc:AlternateContent xmlns:mc="http://schemas.openxmlformats.org/markup-compatibility/2006" xmlns:p14="http://schemas.microsoft.com/office/powerpoint/2010/main">
+          <mc:Choice Requires="p14">
             <p:contentPart p14:bwMode="auto" r:id="rId59">
               <p14:nvContentPartPr>
                 <p14:cNvPr id="60" name="Ink 59">
@@ -16570,7 +16907,7 @@
               </p14:xfrm>
             </p:contentPart>
           </mc:Choice>
-          <mc:Fallback>
+          <mc:Fallback xmlns="">
             <p:pic>
               <p:nvPicPr>
                 <p:cNvPr id="60" name="Ink 59">
@@ -16622,8 +16959,8 @@
             <a:chExt cx="602280" cy="383760"/>
           </a:xfrm>
         </p:grpSpPr>
-        <mc:AlternateContent xmlns:mc="http://schemas.openxmlformats.org/markup-compatibility/2006">
-          <mc:Choice xmlns:p14="http://schemas.microsoft.com/office/powerpoint/2010/main" Requires="p14">
+        <mc:AlternateContent xmlns:mc="http://schemas.openxmlformats.org/markup-compatibility/2006" xmlns:p14="http://schemas.microsoft.com/office/powerpoint/2010/main">
+          <mc:Choice Requires="p14">
             <p:contentPart p14:bwMode="auto" r:id="rId61">
               <p14:nvContentPartPr>
                 <p14:cNvPr id="62" name="Ink 61">
@@ -16642,7 +16979,7 @@
               </p14:xfrm>
             </p:contentPart>
           </mc:Choice>
-          <mc:Fallback>
+          <mc:Fallback xmlns="">
             <p:pic>
               <p:nvPicPr>
                 <p:cNvPr id="62" name="Ink 61">
@@ -16673,8 +17010,8 @@
             </p:pic>
           </mc:Fallback>
         </mc:AlternateContent>
-        <mc:AlternateContent xmlns:mc="http://schemas.openxmlformats.org/markup-compatibility/2006">
-          <mc:Choice xmlns:p14="http://schemas.microsoft.com/office/powerpoint/2010/main" Requires="p14">
+        <mc:AlternateContent xmlns:mc="http://schemas.openxmlformats.org/markup-compatibility/2006" xmlns:p14="http://schemas.microsoft.com/office/powerpoint/2010/main">
+          <mc:Choice Requires="p14">
             <p:contentPart p14:bwMode="auto" r:id="rId63">
               <p14:nvContentPartPr>
                 <p14:cNvPr id="63" name="Ink 62">
@@ -16693,7 +17030,7 @@
               </p14:xfrm>
             </p:contentPart>
           </mc:Choice>
-          <mc:Fallback>
+          <mc:Fallback xmlns="">
             <p:pic>
               <p:nvPicPr>
                 <p:cNvPr id="63" name="Ink 62">
@@ -16724,8 +17061,8 @@
             </p:pic>
           </mc:Fallback>
         </mc:AlternateContent>
-        <mc:AlternateContent xmlns:mc="http://schemas.openxmlformats.org/markup-compatibility/2006">
-          <mc:Choice xmlns:p14="http://schemas.microsoft.com/office/powerpoint/2010/main" Requires="p14">
+        <mc:AlternateContent xmlns:mc="http://schemas.openxmlformats.org/markup-compatibility/2006" xmlns:p14="http://schemas.microsoft.com/office/powerpoint/2010/main">
+          <mc:Choice Requires="p14">
             <p:contentPart p14:bwMode="auto" r:id="rId65">
               <p14:nvContentPartPr>
                 <p14:cNvPr id="64" name="Ink 63">
@@ -16744,7 +17081,7 @@
               </p14:xfrm>
             </p:contentPart>
           </mc:Choice>
-          <mc:Fallback>
+          <mc:Fallback xmlns="">
             <p:pic>
               <p:nvPicPr>
                 <p:cNvPr id="64" name="Ink 63">
@@ -16776,8 +17113,8 @@
           </mc:Fallback>
         </mc:AlternateContent>
       </p:grpSp>
-      <mc:AlternateContent xmlns:mc="http://schemas.openxmlformats.org/markup-compatibility/2006">
-        <mc:Choice xmlns:p14="http://schemas.microsoft.com/office/powerpoint/2010/main" Requires="p14">
+      <mc:AlternateContent xmlns:mc="http://schemas.openxmlformats.org/markup-compatibility/2006" xmlns:p14="http://schemas.microsoft.com/office/powerpoint/2010/main">
+        <mc:Choice Requires="p14">
           <p:contentPart p14:bwMode="auto" r:id="rId67">
             <p14:nvContentPartPr>
               <p14:cNvPr id="66" name="Ink 65">
@@ -16796,7 +17133,7 @@
             </p14:xfrm>
           </p:contentPart>
         </mc:Choice>
-        <mc:Fallback>
+        <mc:Fallback xmlns="">
           <p:pic>
             <p:nvPicPr>
               <p:cNvPr id="66" name="Ink 65">
@@ -16847,8 +17184,8 @@
             <a:chExt cx="550440" cy="354960"/>
           </a:xfrm>
         </p:grpSpPr>
-        <mc:AlternateContent xmlns:mc="http://schemas.openxmlformats.org/markup-compatibility/2006">
-          <mc:Choice xmlns:p14="http://schemas.microsoft.com/office/powerpoint/2010/main" Requires="p14">
+        <mc:AlternateContent xmlns:mc="http://schemas.openxmlformats.org/markup-compatibility/2006" xmlns:p14="http://schemas.microsoft.com/office/powerpoint/2010/main">
+          <mc:Choice Requires="p14">
             <p:contentPart p14:bwMode="auto" r:id="rId69">
               <p14:nvContentPartPr>
                 <p14:cNvPr id="67" name="Ink 66">
@@ -16867,7 +17204,7 @@
               </p14:xfrm>
             </p:contentPart>
           </mc:Choice>
-          <mc:Fallback>
+          <mc:Fallback xmlns="">
             <p:pic>
               <p:nvPicPr>
                 <p:cNvPr id="67" name="Ink 66">
@@ -16898,8 +17235,8 @@
             </p:pic>
           </mc:Fallback>
         </mc:AlternateContent>
-        <mc:AlternateContent xmlns:mc="http://schemas.openxmlformats.org/markup-compatibility/2006">
-          <mc:Choice xmlns:p14="http://schemas.microsoft.com/office/powerpoint/2010/main" Requires="p14">
+        <mc:AlternateContent xmlns:mc="http://schemas.openxmlformats.org/markup-compatibility/2006" xmlns:p14="http://schemas.microsoft.com/office/powerpoint/2010/main">
+          <mc:Choice Requires="p14">
             <p:contentPart p14:bwMode="auto" r:id="rId71">
               <p14:nvContentPartPr>
                 <p14:cNvPr id="68" name="Ink 67">
@@ -16918,7 +17255,7 @@
               </p14:xfrm>
             </p:contentPart>
           </mc:Choice>
-          <mc:Fallback>
+          <mc:Fallback xmlns="">
             <p:pic>
               <p:nvPicPr>
                 <p:cNvPr id="68" name="Ink 67">
@@ -16949,8 +17286,8 @@
             </p:pic>
           </mc:Fallback>
         </mc:AlternateContent>
-        <mc:AlternateContent xmlns:mc="http://schemas.openxmlformats.org/markup-compatibility/2006">
-          <mc:Choice xmlns:p14="http://schemas.microsoft.com/office/powerpoint/2010/main" Requires="p14">
+        <mc:AlternateContent xmlns:mc="http://schemas.openxmlformats.org/markup-compatibility/2006" xmlns:p14="http://schemas.microsoft.com/office/powerpoint/2010/main">
+          <mc:Choice Requires="p14">
             <p:contentPart p14:bwMode="auto" r:id="rId73">
               <p14:nvContentPartPr>
                 <p14:cNvPr id="69" name="Ink 68">
@@ -16969,7 +17306,7 @@
               </p14:xfrm>
             </p:contentPart>
           </mc:Choice>
-          <mc:Fallback>
+          <mc:Fallback xmlns="">
             <p:pic>
               <p:nvPicPr>
                 <p:cNvPr id="69" name="Ink 68">
@@ -17014,7 +17351,7 @@
 </p:sld>
 </file>
 
-<file path=ppt/slides/slide6.xml><?xml version="1.0" encoding="utf-8"?>
+<file path=ppt/slides/slide7.xml><?xml version="1.0" encoding="utf-8"?>
 <p:sld xmlns:a="http://schemas.openxmlformats.org/drawingml/2006/main" xmlns:r="http://schemas.openxmlformats.org/officeDocument/2006/relationships" xmlns:p="http://schemas.openxmlformats.org/presentationml/2006/main">
   <p:cSld>
     <p:spTree>
@@ -17076,8 +17413,8 @@
           </a:fontRef>
         </p:style>
       </p:cxnSp>
-      <mc:AlternateContent xmlns:mc="http://schemas.openxmlformats.org/markup-compatibility/2006">
-        <mc:Choice xmlns:p14="http://schemas.microsoft.com/office/powerpoint/2010/main" Requires="p14">
+      <mc:AlternateContent xmlns:mc="http://schemas.openxmlformats.org/markup-compatibility/2006" xmlns:p14="http://schemas.microsoft.com/office/powerpoint/2010/main">
+        <mc:Choice Requires="p14">
           <p:contentPart p14:bwMode="auto" r:id="rId2">
             <p14:nvContentPartPr>
               <p14:cNvPr id="42" name="Ink 41">
@@ -17096,7 +17433,7 @@
             </p14:xfrm>
           </p:contentPart>
         </mc:Choice>
-        <mc:Fallback>
+        <mc:Fallback xmlns="">
           <p:pic>
             <p:nvPicPr>
               <p:cNvPr id="42" name="Ink 41">
@@ -17127,36 +17464,6 @@
           </p:pic>
         </mc:Fallback>
       </mc:AlternateContent>
-      <p:pic>
-        <p:nvPicPr>
-          <p:cNvPr id="5" name="Picture 4">
-            <a:extLst>
-              <a:ext uri="{FF2B5EF4-FFF2-40B4-BE49-F238E27FC236}">
-                <a16:creationId xmlns:a16="http://schemas.microsoft.com/office/drawing/2014/main" id="{7C967E38-BF7A-B581-DB1E-45BC26BC1C89}"/>
-              </a:ext>
-            </a:extLst>
-          </p:cNvPr>
-          <p:cNvPicPr>
-            <a:picLocks noChangeAspect="1"/>
-          </p:cNvPicPr>
-          <p:nvPr/>
-        </p:nvPicPr>
-        <p:blipFill>
-          <a:blip r:embed="rId4"/>
-          <a:stretch>
-            <a:fillRect/>
-          </a:stretch>
-        </p:blipFill>
-        <p:spPr>
-          <a:xfrm>
-            <a:off x="954204" y="1218170"/>
-            <a:ext cx="9449407" cy="5568696"/>
-          </a:xfrm>
-          <a:prstGeom prst="rect">
-            <a:avLst/>
-          </a:prstGeom>
-        </p:spPr>
-      </p:pic>
       <p:sp>
         <p:nvSpPr>
           <p:cNvPr id="20" name="TextBox 19">
@@ -17211,6 +17518,36 @@
           </a:p>
         </p:txBody>
       </p:sp>
+      <p:pic>
+        <p:nvPicPr>
+          <p:cNvPr id="6" name="Picture 5">
+            <a:extLst>
+              <a:ext uri="{FF2B5EF4-FFF2-40B4-BE49-F238E27FC236}">
+                <a16:creationId xmlns:a16="http://schemas.microsoft.com/office/drawing/2014/main" id="{1CD453D6-8D6B-F3C4-16E5-AEB8334D9489}"/>
+              </a:ext>
+            </a:extLst>
+          </p:cNvPr>
+          <p:cNvPicPr>
+            <a:picLocks noChangeAspect="1"/>
+          </p:cNvPicPr>
+          <p:nvPr/>
+        </p:nvPicPr>
+        <p:blipFill>
+          <a:blip r:embed="rId4"/>
+          <a:stretch>
+            <a:fillRect/>
+          </a:stretch>
+        </p:blipFill>
+        <p:spPr>
+          <a:xfrm>
+            <a:off x="850392" y="1006215"/>
+            <a:ext cx="9091378" cy="5623185"/>
+          </a:xfrm>
+          <a:prstGeom prst="rect">
+            <a:avLst/>
+          </a:prstGeom>
+        </p:spPr>
+      </p:pic>
     </p:spTree>
     <p:extLst>
       <p:ext uri="{BB962C8B-B14F-4D97-AF65-F5344CB8AC3E}">
@@ -17224,7 +17561,7 @@
 </p:sld>
 </file>
 
-<file path=ppt/slides/slide7.xml><?xml version="1.0" encoding="utf-8"?>
+<file path=ppt/slides/slide8.xml><?xml version="1.0" encoding="utf-8"?>
 <p:sld xmlns:a="http://schemas.openxmlformats.org/drawingml/2006/main" xmlns:r="http://schemas.openxmlformats.org/officeDocument/2006/relationships" xmlns:p="http://schemas.openxmlformats.org/presentationml/2006/main">
   <p:cSld>
     <p:spTree>
@@ -17286,8 +17623,8 @@
           </a:fontRef>
         </p:style>
       </p:cxnSp>
-      <mc:AlternateContent xmlns:mc="http://schemas.openxmlformats.org/markup-compatibility/2006">
-        <mc:Choice xmlns:p14="http://schemas.microsoft.com/office/powerpoint/2010/main" Requires="p14">
+      <mc:AlternateContent xmlns:mc="http://schemas.openxmlformats.org/markup-compatibility/2006" xmlns:p14="http://schemas.microsoft.com/office/powerpoint/2010/main">
+        <mc:Choice Requires="p14">
           <p:contentPart p14:bwMode="auto" r:id="rId2">
             <p14:nvContentPartPr>
               <p14:cNvPr id="42" name="Ink 41">
@@ -17306,7 +17643,7 @@
             </p14:xfrm>
           </p:contentPart>
         </mc:Choice>
-        <mc:Fallback>
+        <mc:Fallback xmlns="">
           <p:pic>
             <p:nvPicPr>
               <p:cNvPr id="42" name="Ink 41">
@@ -17352,7 +17689,7 @@
         <p:spPr>
           <a:xfrm>
             <a:off x="612648" y="1919376"/>
-            <a:ext cx="10579608" cy="625428"/>
+            <a:ext cx="10579608" cy="1569148"/>
           </a:xfrm>
           <a:prstGeom prst="rect">
             <a:avLst/>
@@ -17365,7 +17702,7 @@
           </a:bodyPr>
           <a:lstStyle/>
           <a:p>
-            <a:pPr>
+            <a:pPr algn="ctr">
               <a:lnSpc>
                 <a:spcPct val="115000"/>
               </a:lnSpc>
@@ -17374,7 +17711,7 @@
               </a:spcAft>
             </a:pPr>
             <a:r>
-              <a:rPr lang="en-IN" sz="3200" b="1" kern="100" dirty="0">
+              <a:rPr lang="en-IN" sz="4000" b="1" kern="100" dirty="0">
                 <a:solidFill>
                   <a:schemeClr val="accent6">
                     <a:lumMod val="60000"/>
@@ -17386,7 +17723,32 @@
                 <a:ea typeface="Calibri" panose="020F0502020204030204" pitchFamily="34" charset="0"/>
                 <a:cs typeface="Times New Roman" panose="02020603050405020304" pitchFamily="18" charset="0"/>
               </a:rPr>
-              <a:t>Lets understand 1 neuron</a:t>
+              <a:t>Lets understand mathematical model of</a:t>
+            </a:r>
+          </a:p>
+          <a:p>
+            <a:pPr algn="ctr">
+              <a:lnSpc>
+                <a:spcPct val="115000"/>
+              </a:lnSpc>
+              <a:spcAft>
+                <a:spcPts val="800"/>
+              </a:spcAft>
+            </a:pPr>
+            <a:r>
+              <a:rPr lang="en-IN" sz="4000" b="1" kern="100" dirty="0">
+                <a:solidFill>
+                  <a:schemeClr val="accent6">
+                    <a:lumMod val="60000"/>
+                    <a:lumOff val="40000"/>
+                  </a:schemeClr>
+                </a:solidFill>
+                <a:effectLst/>
+                <a:latin typeface="Calibri" panose="020F0502020204030204" pitchFamily="34" charset="0"/>
+                <a:ea typeface="Calibri" panose="020F0502020204030204" pitchFamily="34" charset="0"/>
+                <a:cs typeface="Times New Roman" panose="02020603050405020304" pitchFamily="18" charset="0"/>
+              </a:rPr>
+              <a:t>1 neuron</a:t>
             </a:r>
           </a:p>
         </p:txBody>
@@ -17404,7 +17766,7 @@
 </p:sld>
 </file>
 
-<file path=ppt/slides/slide8.xml><?xml version="1.0" encoding="utf-8"?>
+<file path=ppt/slides/slide9.xml><?xml version="1.0" encoding="utf-8"?>
 <p:sld xmlns:a="http://schemas.openxmlformats.org/drawingml/2006/main" xmlns:r="http://schemas.openxmlformats.org/officeDocument/2006/relationships" xmlns:p="http://schemas.openxmlformats.org/presentationml/2006/main">
   <p:cSld>
     <p:spTree>
@@ -17491,7 +17853,7 @@
                   </a:schemeClr>
                 </a:solidFill>
               </a:rPr>
-              <a:t>Neurons (Nodes)</a:t>
+              <a:t>Neuron (Node)</a:t>
             </a:r>
             <a:r>
               <a:rPr lang="en-IN" sz="2400" dirty="0">
@@ -17502,7 +17864,7 @@
                   </a:schemeClr>
                 </a:solidFill>
               </a:rPr>
-              <a:t>: Each layer contains multiple neurons that perform computations.</a:t>
+              <a:t>: It performs following computations.</a:t>
             </a:r>
             <a:endParaRPr lang="en-US" sz="2400" dirty="0">
               <a:solidFill>
@@ -17663,233 +18025,6 @@
     <p:extLst>
       <p:ext uri="{BB962C8B-B14F-4D97-AF65-F5344CB8AC3E}">
         <p14:creationId xmlns:p14="http://schemas.microsoft.com/office/powerpoint/2010/main" val="1024962938"/>
-      </p:ext>
-    </p:extLst>
-  </p:cSld>
-  <p:clrMapOvr>
-    <a:masterClrMapping/>
-  </p:clrMapOvr>
-</p:sld>
-</file>
-
-<file path=ppt/slides/slide9.xml><?xml version="1.0" encoding="utf-8"?>
-<p:sld xmlns:a="http://schemas.openxmlformats.org/drawingml/2006/main" xmlns:r="http://schemas.openxmlformats.org/officeDocument/2006/relationships" xmlns:p="http://schemas.openxmlformats.org/presentationml/2006/main">
-  <p:cSld>
-    <p:spTree>
-      <p:nvGrpSpPr>
-        <p:cNvPr id="1" name="">
-          <a:extLst>
-            <a:ext uri="{FF2B5EF4-FFF2-40B4-BE49-F238E27FC236}">
-              <a16:creationId xmlns:a16="http://schemas.microsoft.com/office/drawing/2014/main" id="{8A5B7A8B-4B7C-9CB3-BEDC-B7194BAA0671}"/>
-            </a:ext>
-          </a:extLst>
-        </p:cNvPr>
-        <p:cNvGrpSpPr/>
-        <p:nvPr/>
-      </p:nvGrpSpPr>
-      <p:grpSpPr>
-        <a:xfrm>
-          <a:off x="0" y="0"/>
-          <a:ext cx="0" cy="0"/>
-          <a:chOff x="0" y="0"/>
-          <a:chExt cx="0" cy="0"/>
-        </a:xfrm>
-      </p:grpSpPr>
-      <p:sp>
-        <p:nvSpPr>
-          <p:cNvPr id="6" name="TextBox 5">
-            <a:extLst>
-              <a:ext uri="{FF2B5EF4-FFF2-40B4-BE49-F238E27FC236}">
-                <a16:creationId xmlns:a16="http://schemas.microsoft.com/office/drawing/2014/main" id="{BB2F4960-A2C1-266F-5F11-F3F693A037F5}"/>
-              </a:ext>
-            </a:extLst>
-          </p:cNvPr>
-          <p:cNvSpPr txBox="1"/>
-          <p:nvPr/>
-        </p:nvSpPr>
-        <p:spPr>
-          <a:xfrm>
-            <a:off x="201167" y="79414"/>
-            <a:ext cx="11807951" cy="1569660"/>
-          </a:xfrm>
-          <a:prstGeom prst="rect">
-            <a:avLst/>
-          </a:prstGeom>
-          <a:noFill/>
-        </p:spPr>
-        <p:txBody>
-          <a:bodyPr wrap="square">
-            <a:spAutoFit/>
-          </a:bodyPr>
-          <a:lstStyle/>
-          <a:p>
-            <a:r>
-              <a:rPr lang="en-IN" sz="2400" dirty="0">
-                <a:solidFill>
-                  <a:schemeClr val="accent6">
-                    <a:lumMod val="60000"/>
-                    <a:lumOff val="40000"/>
-                  </a:schemeClr>
-                </a:solidFill>
-              </a:rPr>
-              <a:t>For each neuron, the </a:t>
-            </a:r>
-            <a:r>
-              <a:rPr lang="en-IN" sz="2400" b="1" dirty="0">
-                <a:solidFill>
-                  <a:schemeClr val="accent6">
-                    <a:lumMod val="60000"/>
-                    <a:lumOff val="40000"/>
-                  </a:schemeClr>
-                </a:solidFill>
-              </a:rPr>
-              <a:t>process</a:t>
-            </a:r>
-            <a:r>
-              <a:rPr lang="en-IN" sz="2400" dirty="0">
-                <a:solidFill>
-                  <a:schemeClr val="accent6">
-                    <a:lumMod val="60000"/>
-                    <a:lumOff val="40000"/>
-                  </a:schemeClr>
-                </a:solidFill>
-              </a:rPr>
-              <a:t> is</a:t>
-            </a:r>
-          </a:p>
-          <a:p>
-            <a:pPr marL="457200" lvl="0" indent="-457200">
-              <a:buFont typeface="+mj-lt"/>
-              <a:buAutoNum type="arabicPeriod"/>
-            </a:pPr>
-            <a:r>
-              <a:rPr lang="en-IN" sz="2400" dirty="0">
-                <a:solidFill>
-                  <a:schemeClr val="accent4">
-                    <a:lumMod val="60000"/>
-                    <a:lumOff val="40000"/>
-                  </a:schemeClr>
-                </a:solidFill>
-              </a:rPr>
-              <a:t>Take weighted sum of inputs and add a bias term ( i.e. calculate </a:t>
-            </a:r>
-            <a:r>
-              <a:rPr lang="en-IN" sz="2400" b="1" dirty="0">
-                <a:solidFill>
-                  <a:schemeClr val="accent4">
-                    <a:lumMod val="60000"/>
-                    <a:lumOff val="40000"/>
-                  </a:schemeClr>
-                </a:solidFill>
-              </a:rPr>
-              <a:t>Z </a:t>
-            </a:r>
-            <a:r>
-              <a:rPr lang="en-IN" sz="2400" dirty="0">
-                <a:solidFill>
-                  <a:schemeClr val="accent4">
-                    <a:lumMod val="60000"/>
-                    <a:lumOff val="40000"/>
-                  </a:schemeClr>
-                </a:solidFill>
-              </a:rPr>
-              <a:t>),</a:t>
-            </a:r>
-            <a:endParaRPr lang="en-US" sz="2400" dirty="0">
-              <a:solidFill>
-                <a:schemeClr val="accent4">
-                  <a:lumMod val="60000"/>
-                  <a:lumOff val="40000"/>
-                </a:schemeClr>
-              </a:solidFill>
-            </a:endParaRPr>
-          </a:p>
-          <a:p>
-            <a:pPr marL="457200" lvl="0" indent="-457200">
-              <a:buFont typeface="+mj-lt"/>
-              <a:buAutoNum type="arabicPeriod"/>
-            </a:pPr>
-            <a:r>
-              <a:rPr lang="en-IN" sz="2400" dirty="0">
-                <a:solidFill>
-                  <a:schemeClr val="accent6">
-                    <a:lumMod val="60000"/>
-                    <a:lumOff val="40000"/>
-                  </a:schemeClr>
-                </a:solidFill>
-              </a:rPr>
-              <a:t>Apply activation function</a:t>
-            </a:r>
-            <a:endParaRPr lang="en-US" sz="2400" dirty="0">
-              <a:solidFill>
-                <a:schemeClr val="accent6">
-                  <a:lumMod val="60000"/>
-                  <a:lumOff val="40000"/>
-                </a:schemeClr>
-              </a:solidFill>
-            </a:endParaRPr>
-          </a:p>
-          <a:p>
-            <a:pPr marL="457200" lvl="0" indent="-457200">
-              <a:buFont typeface="+mj-lt"/>
-              <a:buAutoNum type="arabicPeriod"/>
-            </a:pPr>
-            <a:r>
-              <a:rPr lang="en-IN" sz="2400" dirty="0">
-                <a:solidFill>
-                  <a:schemeClr val="accent6">
-                    <a:lumMod val="60000"/>
-                    <a:lumOff val="40000"/>
-                  </a:schemeClr>
-                </a:solidFill>
-              </a:rPr>
-              <a:t>Pass result to next neurons (next layer)</a:t>
-            </a:r>
-            <a:endParaRPr lang="en-US" sz="2400" dirty="0">
-              <a:solidFill>
-                <a:schemeClr val="accent6">
-                  <a:lumMod val="60000"/>
-                  <a:lumOff val="40000"/>
-                </a:schemeClr>
-              </a:solidFill>
-            </a:endParaRPr>
-          </a:p>
-        </p:txBody>
-      </p:sp>
-      <p:pic>
-        <p:nvPicPr>
-          <p:cNvPr id="2" name="Picture 1">
-            <a:extLst>
-              <a:ext uri="{FF2B5EF4-FFF2-40B4-BE49-F238E27FC236}">
-                <a16:creationId xmlns:a16="http://schemas.microsoft.com/office/drawing/2014/main" id="{D3482666-0E84-43A1-D536-9A3FBE46F08B}"/>
-              </a:ext>
-            </a:extLst>
-          </p:cNvPr>
-          <p:cNvPicPr>
-            <a:picLocks noChangeAspect="1"/>
-          </p:cNvPicPr>
-          <p:nvPr/>
-        </p:nvPicPr>
-        <p:blipFill>
-          <a:blip r:embed="rId2"/>
-          <a:stretch>
-            <a:fillRect/>
-          </a:stretch>
-        </p:blipFill>
-        <p:spPr>
-          <a:xfrm>
-            <a:off x="159024" y="1653475"/>
-            <a:ext cx="7502652" cy="3551050"/>
-          </a:xfrm>
-          <a:prstGeom prst="rect">
-            <a:avLst/>
-          </a:prstGeom>
-        </p:spPr>
-      </p:pic>
-    </p:spTree>
-    <p:extLst>
-      <p:ext uri="{BB962C8B-B14F-4D97-AF65-F5344CB8AC3E}">
-        <p14:creationId xmlns:p14="http://schemas.microsoft.com/office/powerpoint/2010/main" val="877306766"/>
       </p:ext>
     </p:extLst>
   </p:cSld>

--- a/deep_learning/1_ANN/2-ANN-CORE.pptx
+++ b/deep_learning/1_ANN/2-ANN-CORE.pptx
@@ -251,7 +251,7 @@
           <a:p>
             <a:fld id="{7BAEECA8-D063-486F-AE31-5020270C1449}" type="datetimeFigureOut">
               <a:rPr lang="en-US" smtClean="0"/>
-              <a:t>4/6/2026</a:t>
+              <a:t>5/4/2026</a:t>
             </a:fld>
             <a:endParaRPr lang="en-US"/>
           </a:p>
@@ -1326,15 +1326,15 @@
           <inkml:channelProperty channel="OE" name="resolution" value="1000" units="1/deg"/>
         </inkml:channelProperties>
       </inkml:inkSource>
-      <inkml:timestamp xml:id="ts0" timeString="2026-04-04T17:55:24.221"/>
+      <inkml:timestamp xml:id="ts0" timeString="2026-05-04T13:08:03.811"/>
     </inkml:context>
     <inkml:brush xml:id="br0">
-      <inkml:brushProperty name="width" value="0.2" units="cm"/>
-      <inkml:brushProperty name="height" value="0.2" units="cm"/>
+      <inkml:brushProperty name="width" value="0.1" units="cm"/>
+      <inkml:brushProperty name="height" value="0.1" units="cm"/>
       <inkml:brushProperty name="color" value="#FFC114"/>
     </inkml:brush>
   </inkml:definitions>
-  <inkml:trace contextRef="#ctx0" brushRef="#br0">1 0 4480 0 0,'0'0'-58'0'0,"16"20"-1094"0"0</inkml:trace>
+  <inkml:trace contextRef="#ctx0" brushRef="#br0">47 6 6813 0 0,'0'0'-335'0'0,"0"0"234"0"0,-1-1 1 0 0,1 1-1 0 0,-1-1 0 0 0,1 1 0 0 0,-1-1 1 0 0,1 1-1 0 0,-1 0 0 0 0,1-1 1 0 0,-1 1-1 0 0,1 0 0 0 0,-1-1 0 0 0,1 1 1 0 0,-1 0-1 0 0,0 0 0 0 0,1 0 1 0 0,-1 0-1 0 0,0-1 0 0 0,1 1 1 0 0,-1 0-1 0 0,1 0 0 0 0,-1 0 0 0 0,0 0 1 0 0,1 0-1 0 0,-2 0 0 0 0,0 2 131 0 0,0 0 0 0 0,0 0 0 0 0,0-1 0 0 0,0 1 0 0 0,1 0 0 0 0,-1 0 0 0 0,1 0 0 0 0,-1 1 0 0 0,1-1 0 0 0,-1 0 0 0 0,1 1 0 0 0,0-1 0 0 0,0 1 0 0 0,1-1 0 0 0,-1 1 0 0 0,-1 4 0 0 0,-4 13-139 0 0,5-19 117 0 0,1 1 76 0 0,0-2-64 0 0,1 0 0 0 0,-1 0-1 0 0,0 0 1 0 0,0 0 0 0 0,0 0-1 0 0,0 0 1 0 0,0 0-1 0 0,0 0 1 0 0,0 0 0 0 0,1 0-1 0 0,-1 0 1 0 0,0 0 0 0 0,0 0-1 0 0,0 0 1 0 0,0 0 0 0 0,0 0-1 0 0,0 0 1 0 0,1 0-1 0 0,-1 0 1 0 0,0 0 0 0 0,0 0-1 0 0,0 0 1 0 0,0 0 0 0 0,0 0-1 0 0,0 0 1 0 0,1 0 0 0 0,-1 0-1 0 0,0 0 1 0 0,0 0-1 0 0,0 0 1 0 0,0 1 0 0 0,0-1-1 0 0,0 0 1 0 0,0 0 0 0 0,0 0-1 0 0,0 0 1 0 0,0 0-1 0 0,1 0 1 0 0,-1 0 0 0 0,0 0-1 0 0,0 1 1 0 0,0-1 0 0 0,0 0-1 0 0,0 0 1 0 0,0 0 0 0 0,0 0-1 0 0,0 0 1 0 0,0 0-1 0 0,0 0 1 0 0,0 1 0 0 0,0-1-1 0 0,0 0 1 0 0,0 0 0 0 0,0 0-1 0 0,0 0 1 0 0,0 0 0 0 0,0 0-1 0 0,0 1 1 0 0,0-1-1 0 0,0 0 1 0 0,0 0 0 0 0,-1 0-1 0 0,1 0 1 0 0,0 0 0 0 0,0 0-1 0 0,0 0 1 0 0,0 1 0 0 0,1-2-99 0 0,0 0 141 0 0,1-1 1 0 0,-1 1-1 0 0,1 0 0 0 0,-1-1 0 0 0,0 1 0 0 0,0-1 1 0 0,1 1-1 0 0,-1-1 0 0 0,0 1 0 0 0,0-1 0 0 0,-1 0 1 0 0,1 0-1 0 0,0 0 0 0 0,0-2 0 0 0,-1 2-44 0 0,7-29-442 0 0,-10 29 1245 0 0,8 4-466 0 0,27 7-171 0 0,-25-9-168 0 0,137 8 42 0 0,-57-4-38 0 0,235 14 56 0 0,-250-14-41 0 0,-70-4-28 0 0,2 1-8 0 0,10 0 8 0 0,10 4 516 0 0,-14-3-1265 0 0</inkml:trace>
 </inkml:ink>
 </file>
 
@@ -1358,15 +1358,15 @@
           <inkml:channelProperty channel="OE" name="resolution" value="1000" units="1/deg"/>
         </inkml:channelProperties>
       </inkml:inkSource>
-      <inkml:timestamp xml:id="ts0" timeString="2026-04-04T17:55:24.221"/>
+      <inkml:timestamp xml:id="ts0" timeString="2026-05-04T13:08:04.233"/>
     </inkml:context>
     <inkml:brush xml:id="br0">
-      <inkml:brushProperty name="width" value="0.2" units="cm"/>
-      <inkml:brushProperty name="height" value="0.2" units="cm"/>
+      <inkml:brushProperty name="width" value="0.1" units="cm"/>
+      <inkml:brushProperty name="height" value="0.1" units="cm"/>
       <inkml:brushProperty name="color" value="#FFC114"/>
     </inkml:brush>
   </inkml:definitions>
-  <inkml:trace contextRef="#ctx0" brushRef="#br0">1 0 4480 0 0,'0'0'-58'0'0,"16"20"-1094"0"0</inkml:trace>
+  <inkml:trace contextRef="#ctx0" brushRef="#br0">192 45 4700 0 0,'-45'-24'97'0'0,"44"23"94"0"0,-22-9 847 0 0,8 0 1668 0 0,30 14-2697 0 0,38 10 3 0 0,0 2-1 0 0,74 34 1 0 0,-126-50-13 0 0,0 1-1 0 0,1-1 1 0 0,-1 1-1 0 0,0-1 1 0 0,-1 1-1 0 0,1-1 1 0 0,0 1-1 0 0,0 0 1 0 0,0-1-1 0 0,0 1 1 0 0,0 0-1 0 0,-1 0 1 0 0,1 0-1 0 0,0 0 1 0 0,-1-1-1 0 0,1 1 1 0 0,0 0-1 0 0,-1 0 1 0 0,1 0 0 0 0,-1 0-1 0 0,0 0 1 0 0,1 0-1 0 0,-1 1 1 0 0,0-1-1 0 0,0 0 1 0 0,1 0-1 0 0,-1 0 1 0 0,0 0-1 0 0,0 0 1 0 0,0 0-1 0 0,0 0 1 0 0,-1 1-1 0 0,1-1 1 0 0,0 0-1 0 0,0 0 1 0 0,-1 0-1 0 0,1 0 1 0 0,0 0-1 0 0,-1 0 1 0 0,1 0-1 0 0,-1 0 1 0 0,0 0-1 0 0,1 0 1 0 0,-1 0 0 0 0,0 0-1 0 0,1-1 1 0 0,-1 1-1 0 0,0 0 1 0 0,0 0-1 0 0,0-1 1 0 0,0 1-1 0 0,-1 0 1 0 0,-9 8 3 0 0,1-1 0 0 0,-2 0 0 0 0,-17 9 0 0 0,17-10-1 0 0,-87 50 66 0 0,-7 6-587 0 0,36-17-3357 0 0,58-36 1356 0 0</inkml:trace>
 </inkml:ink>
 </file>
 
@@ -1390,15 +1390,15 @@
           <inkml:channelProperty channel="OE" name="resolution" value="1000" units="1/deg"/>
         </inkml:channelProperties>
       </inkml:inkSource>
-      <inkml:timestamp xml:id="ts0" timeString="2026-04-04T12:06:40.637"/>
+      <inkml:timestamp xml:id="ts0" timeString="2026-05-04T13:08:06.077"/>
     </inkml:context>
     <inkml:brush xml:id="br0">
-      <inkml:brushProperty name="width" value="0.2" units="cm"/>
-      <inkml:brushProperty name="height" value="0.2" units="cm"/>
+      <inkml:brushProperty name="width" value="0.1" units="cm"/>
+      <inkml:brushProperty name="height" value="0.1" units="cm"/>
       <inkml:brushProperty name="color" value="#FFC114"/>
     </inkml:brush>
   </inkml:definitions>
-  <inkml:trace contextRef="#ctx0" brushRef="#br0">45 0 5805 0 0,'0'0'-337'0'0,"-7"1"-619"0"0,-23 4 774 0 0,23-4 1172 0 0,16 1-979 0 0,857 102 149 0 0,-767-95-152 0 0,-14-3 227 0 0,99 21 0 0 0,-182-26-219 0 0,37-6-2775 0 0,-28 2 1389 0 0</inkml:trace>
+  <inkml:trace contextRef="#ctx0" brushRef="#br0">74 55 5801 0 0,'0'0'-270'0'0,"0"0"249"0"0,0 0 0 0 0,0 1 0 0 0,0-1 0 0 0,0 0 0 0 0,-1 0-1 0 0,1 0 1 0 0,0 0 0 0 0,0 0 0 0 0,0 0 0 0 0,-1 0 0 0 0,1 0 0 0 0,0 0 0 0 0,0 0-1 0 0,0 0 1 0 0,-1 0 0 0 0,1 0 0 0 0,0 0 0 0 0,0 0 0 0 0,0 0 0 0 0,-1 0 0 0 0,1 0-1 0 0,0 0 1 0 0,0 0 0 0 0,0 0 0 0 0,-1 0 0 0 0,1 0 0 0 0,0 0 0 0 0,0-1 0 0 0,0 1-1 0 0,0 0 1 0 0,-1 0 0 0 0,1 0 0 0 0,0 0 0 0 0,0 0 0 0 0,0-1 0 0 0,0 1 0 0 0,0 0-1 0 0,-1 0 1 0 0,1 0 0 0 0,0 0 0 0 0,0-1 0 0 0,0 1 0 0 0,0 0 0 0 0,0 0 0 0 0,0 0-1 0 0,0-1 1 0 0,0 1 0 0 0,0 0 0 0 0,0 0 0 0 0,0 0 0 0 0,0-1 0 0 0,0 1 0 0 0,0 0-1 0 0,0 0 1 0 0,0-1 0 0 0,0 1 0 0 0,0 0 0 0 0,0 0 0 0 0,0 0 0 0 0,0 0-1 0 0,0-1 1 0 0,0 1 0 0 0,1 0 0 0 0,-1 0 0 0 0,0 0 0 0 0,0-1 0 0 0,0 1 0 0 0,0 0-1 0 0,1 0 1 0 0,-7 2 9 0 0,3-1-6 0 0,-1 0 0 0 0,0 1 0 0 0,1-1 0 0 0,-1 1-1 0 0,1 0 1 0 0,-1 0 0 0 0,1 0 0 0 0,0 1 0 0 0,0-1 0 0 0,0 1 0 0 0,0 0 0 0 0,0 0 0 0 0,1 0-1 0 0,-1 0 1 0 0,1 0 0 0 0,0 0 0 0 0,0 1 0 0 0,0-1 0 0 0,0 1 0 0 0,-2 6 0 0 0,4-9 19 0 0,0-1 0 0 0,0 1-1 0 0,-1 0 1 0 0,1-1 0 0 0,0 1 0 0 0,0-1 0 0 0,0 1 0 0 0,0-1 0 0 0,0 1 0 0 0,1 0 0 0 0,-1-1 0 0 0,0 1 0 0 0,0-1 0 0 0,0 1 0 0 0,0-1-1 0 0,1 1 1 0 0,-1-1 0 0 0,0 1 0 0 0,0-1 0 0 0,1 1 0 0 0,-1-1 0 0 0,0 1 0 0 0,1-1 0 0 0,-1 0 0 0 0,1 1 0 0 0,-1-1 0 0 0,1 0 0 0 0,-1 1-1 0 0,0-1 1 0 0,1 0 0 0 0,-1 1 0 0 0,1-1 0 0 0,-1 0 0 0 0,1 0 0 0 0,0 0 0 0 0,-1 1 0 0 0,2-1 0 0 0,17 2 40 0 0,-19-2-41 0 0,2 0 24 0 0,3-1 4 0 0,6-4 169 0 0,1 0 0 0 0,-1-1 0 0 0,0 0 0 0 0,15-11 0 0 0,-25 15-26 0 0,-4 8 601 0 0,-5 7-241 0 0,4-16-407 0 0,3-15 42 0 0,-4 3 144 0 0,3 4-209 0 0,21 7-77 0 0,80 4-15 0 0,354-7 51 0 0,-354 7 221 0 0,-96 0 106 0 0,-13-1-366 0 0,2 1-24 0 0,-21-1 75 0 0,-1-1 0 0 0,1-1 0 0 0,-54-13 0 0 0,61 8-12 0 0,19 7-31 0 0,-16-7 60 0 0,8 3-58 0 0,11 5-32 0 0,0 0 0 0 0,0 0 1 0 0,0 0-1 0 0,0 0 0 0 0,0 0 0 0 0,1 0 0 0 0,-1 0 0 0 0,0 0 0 0 0,0 0 0 0 0,0 0 0 0 0,0 0 0 0 0,0 0 0 0 0,0 0 1 0 0,0 0-1 0 0,0 0 0 0 0,0 0 0 0 0,0 0 0 0 0,0-1 0 0 0,0 1 0 0 0,0 0 0 0 0,0 0 0 0 0,0 0 0 0 0,0 0 0 0 0,0 0 0 0 0,0 0 1 0 0,0 0-1 0 0,0 0 0 0 0,0 0 0 0 0,0 0 0 0 0,0 0 0 0 0,0 0 0 0 0,0 0 0 0 0,0 0 0 0 0,0 0 0 0 0,0-1 0 0 0,0 1 1 0 0,0 0-1 0 0,0 0 0 0 0,0 0 0 0 0,0 0 0 0 0,0 0 0 0 0,0 0 0 0 0,0 0 0 0 0,0 0 0 0 0,0 0 0 0 0,0 0 0 0 0,24 1-39 0 0,0 0 0 0 0,0 2-1 0 0,-1 1 1 0 0,1 1-1 0 0,-1 1 1 0 0,44 17 0 0 0,-66-23 42 0 0,0 0 0 0 0,0 0-1 0 0,-1 1 1 0 0,1-1 0 0 0,0 0 0 0 0,-1 0 0 0 0,1 1 0 0 0,0-1 0 0 0,-1 1 0 0 0,1-1 0 0 0,0 1 0 0 0,-1-1-1 0 0,1 1 1 0 0,-1-1 0 0 0,1 1 0 0 0,-1-1 0 0 0,1 1 0 0 0,-1 0 0 0 0,0-1 0 0 0,1 1 0 0 0,-1 0 0 0 0,0-1-1 0 0,1 1 1 0 0,-1 0 0 0 0,0-1 0 0 0,0 1 0 0 0,0 0 0 0 0,1 0 0 0 0,-1-1 0 0 0,0 1 0 0 0,0 0 0 0 0,0 0-1 0 0,0-1 1 0 0,0 1 0 0 0,-1 0 0 0 0,1 0 0 0 0,0-1 0 0 0,0 1 0 0 0,0 0 0 0 0,-1 0 0 0 0,1-1 0 0 0,0 1-1 0 0,-1 0 1 0 0,1-1 0 0 0,-1 1 0 0 0,1 0 0 0 0,0-1 0 0 0,-1 1 0 0 0,1-1 0 0 0,-1 1 0 0 0,0-1 0 0 0,1 1-1 0 0,-1-1 1 0 0,0 1 0 0 0,-36 25 107 0 0,33-24-106 0 0,-69 38 160 0 0,7-3-1134 0 0,25-10-2746 0 0,32-19 1983 0 0</inkml:trace>
 </inkml:ink>
 </file>
 
@@ -1454,6 +1454,198 @@
           <inkml:channelProperty channel="OE" name="resolution" value="1000" units="1/deg"/>
         </inkml:channelProperties>
       </inkml:inkSource>
+      <inkml:timestamp xml:id="ts0" timeString="2026-05-04T13:08:07.143"/>
+    </inkml:context>
+    <inkml:brush xml:id="br0">
+      <inkml:brushProperty name="width" value="0.1" units="cm"/>
+      <inkml:brushProperty name="height" value="0.1" units="cm"/>
+      <inkml:brushProperty name="color" value="#FFC114"/>
+    </inkml:brush>
+  </inkml:definitions>
+  <inkml:trace contextRef="#ctx0" brushRef="#br0">240 33 4904 0 0,'-16'-30'-518'0'0,"11"29"511"0"0,-1 0 0 0 0,1 1-1 0 0,-1-1 1 0 0,1 1 0 0 0,-1 1-1 0 0,1-1 1 0 0,-1 1 0 0 0,1 0 0 0 0,0 0-1 0 0,-1 0 1 0 0,1 1 0 0 0,0 0-1 0 0,0 0 1 0 0,0 0 0 0 0,0 1-1 0 0,-6 3 1 0 0,0 1 13 0 0,-1 0-1 0 0,1 1 1 0 0,1 0-1 0 0,-1 1 1 0 0,-16 18-1 0 0,26-26-5 0 0,0 0 0 0 0,-1 1 0 0 0,1-1-1 0 0,0 1 1 0 0,0-1 0 0 0,0 1 0 0 0,0-1 0 0 0,0 1 0 0 0,0 0 0 0 0,0 0-1 0 0,1-1 1 0 0,-1 1 0 0 0,0 0 0 0 0,1 0 0 0 0,0 0 0 0 0,-1 0 0 0 0,1 0-1 0 0,0 0 1 0 0,0 3 0 0 0,1-4-1 0 0,-1 0 1 0 0,1 0-1 0 0,0 0 0 0 0,-1 0 1 0 0,1 0-1 0 0,0 0 1 0 0,0 0-1 0 0,-1 0 0 0 0,1 0 1 0 0,0-1-1 0 0,0 1 0 0 0,0 0 1 0 0,0-1-1 0 0,0 1 0 0 0,0 0 1 0 0,1-1-1 0 0,-1 0 0 0 0,0 1 1 0 0,0-1-1 0 0,0 0 0 0 0,0 1 1 0 0,3-1-1 0 0,1 1 8 0 0,1-1 0 0 0,-1 1 0 0 0,1-1 0 0 0,-1-1 0 0 0,1 1 0 0 0,-1-1 0 0 0,0 0-1 0 0,1 0 1 0 0,-1 0 0 0 0,0-1 0 0 0,1 0 0 0 0,4-3 0 0 0,-7 4 81 0 0,0-1-1 0 0,1 1 1 0 0,-1-1 0 0 0,-1 0-1 0 0,1-1 1 0 0,0 1 0 0 0,0 0-1 0 0,-1-1 1 0 0,1 1-1 0 0,-1-1 1 0 0,0 0 0 0 0,0 0-1 0 0,0 0 1 0 0,0 0 0 0 0,-1 0-1 0 0,1 0 1 0 0,-1-1 0 0 0,1 1-1 0 0,0-6 1 0 0,-2 7 85 0 0,-61-5 441 0 0,53 7-703 0 0,0 1 0 0 0,0 1 0 0 0,0-1 1 0 0,0 1-1 0 0,1 0 0 0 0,-1 1 0 0 0,0 0 0 0 0,1 0 1 0 0,0 1-1 0 0,0 0 0 0 0,0 0 0 0 0,0 0 1 0 0,-11 11-1 0 0</inkml:trace>
+</inkml:ink>
+</file>
+
+<file path=ppt/ink/ink41.xml><?xml version="1.0" encoding="utf-8"?>
+<inkml:ink xmlns:inkml="http://www.w3.org/2003/InkML">
+  <inkml:definitions>
+    <inkml:context xml:id="ctx0">
+      <inkml:inkSource xml:id="inkSrc0">
+        <inkml:traceFormat>
+          <inkml:channel name="X" type="integer" min="-2.14748E9" max="2.14748E9" units="cm"/>
+          <inkml:channel name="Y" type="integer" min="-2.14748E9" max="2.14748E9" units="cm"/>
+          <inkml:channel name="F" type="integer" max="32767" units="dev"/>
+          <inkml:channel name="OA" type="integer" max="360" units="deg"/>
+          <inkml:channel name="OE" type="integer" max="90" units="deg"/>
+        </inkml:traceFormat>
+        <inkml:channelProperties>
+          <inkml:channelProperty channel="X" name="resolution" value="1000" units="1/cm"/>
+          <inkml:channelProperty channel="Y" name="resolution" value="1000" units="1/cm"/>
+          <inkml:channelProperty channel="F" name="resolution" value="0" units="1/dev"/>
+          <inkml:channelProperty channel="OA" name="resolution" value="1000" units="1/deg"/>
+          <inkml:channelProperty channel="OE" name="resolution" value="1000" units="1/deg"/>
+        </inkml:channelProperties>
+      </inkml:inkSource>
+      <inkml:timestamp xml:id="ts0" timeString="2026-05-04T13:08:07.639"/>
+    </inkml:context>
+    <inkml:brush xml:id="br0">
+      <inkml:brushProperty name="width" value="0.1" units="cm"/>
+      <inkml:brushProperty name="height" value="0.1" units="cm"/>
+      <inkml:brushProperty name="color" value="#FFC114"/>
+    </inkml:brush>
+  </inkml:definitions>
+  <inkml:trace contextRef="#ctx0" brushRef="#br0">20 3 4368 0 0,'0'0'-167'0'0,"-20"-2"4"0"0,72 9 1209 0 0,47 1-1031 0 0,497 29 580 0 0,-573-36 3 0 0,-13 0-3789 0 0</inkml:trace>
+</inkml:ink>
+</file>
+
+<file path=ppt/ink/ink42.xml><?xml version="1.0" encoding="utf-8"?>
+<inkml:ink xmlns:inkml="http://www.w3.org/2003/InkML">
+  <inkml:definitions>
+    <inkml:context xml:id="ctx0">
+      <inkml:inkSource xml:id="inkSrc0">
+        <inkml:traceFormat>
+          <inkml:channel name="X" type="integer" min="-2.14748E9" max="2.14748E9" units="cm"/>
+          <inkml:channel name="Y" type="integer" min="-2.14748E9" max="2.14748E9" units="cm"/>
+          <inkml:channel name="F" type="integer" max="32767" units="dev"/>
+          <inkml:channel name="OA" type="integer" max="360" units="deg"/>
+          <inkml:channel name="OE" type="integer" max="90" units="deg"/>
+        </inkml:traceFormat>
+        <inkml:channelProperties>
+          <inkml:channelProperty channel="X" name="resolution" value="1000" units="1/cm"/>
+          <inkml:channelProperty channel="Y" name="resolution" value="1000" units="1/cm"/>
+          <inkml:channelProperty channel="F" name="resolution" value="0" units="1/dev"/>
+          <inkml:channelProperty channel="OA" name="resolution" value="1000" units="1/deg"/>
+          <inkml:channelProperty channel="OE" name="resolution" value="1000" units="1/deg"/>
+        </inkml:channelProperties>
+      </inkml:inkSource>
+      <inkml:timestamp xml:id="ts0" timeString="2026-05-04T13:08:08.185"/>
+    </inkml:context>
+    <inkml:brush xml:id="br0">
+      <inkml:brushProperty name="width" value="0.1" units="cm"/>
+      <inkml:brushProperty name="height" value="0.1" units="cm"/>
+      <inkml:brushProperty name="color" value="#FFC114"/>
+    </inkml:brush>
+  </inkml:definitions>
+  <inkml:trace contextRef="#ctx0" brushRef="#br0">33 62 4196 0 0,'-19'-38'216'0'0,"19"37"-27"0"0,-10-12 889 0 0,6 5-85 0 0,9 7-274 0 0,252 68-485 0 0,79 26-86 0 0,-335-93-136 0 0,1 1 0 0 0,-1-1 0 0 0,0 0 0 0 0,1 0 0 0 0,-1 1 0 0 0,0-1 0 0 0,0 1 0 0 0,0-1 0 0 0,0 1 0 0 0,1 0 0 0 0,-1-1 0 0 0,0 1 0 0 0,0 0 0 0 0,0 0-1 0 0,0 0 1 0 0,0 0 0 0 0,-1 0 0 0 0,1 0 0 0 0,0 0 0 0 0,0 0 0 0 0,-1 0 0 0 0,1 0 0 0 0,0 0 0 0 0,-1 0 0 0 0,1 1 0 0 0,-1-1 0 0 0,0 0 0 0 0,1 0 0 0 0,-1 1-1 0 0,0-1 1 0 0,0 0 0 0 0,0 0 0 0 0,0 1 0 0 0,0-1 0 0 0,0 0 0 0 0,0 1 0 0 0,0-1 0 0 0,0 0 0 0 0,0 0 0 0 0,-1 1 0 0 0,1-1 0 0 0,-1 0 0 0 0,1 0 0 0 0,-1 0 0 0 0,1 1-1 0 0,-1-1 1 0 0,0 0 0 0 0,0 0 0 0 0,1 0 0 0 0,-1 0 0 0 0,0 0 0 0 0,0 0 0 0 0,0 0 0 0 0,-2 1 0 0 0,-8 8 110 0 0,0 1-1 0 0,0-2 1 0 0,-23 15-1 0 0,24-17-90 0 0,-232 142 789 0 0,97-64-424 0 0,102-61-202 0 0,-1-2-1152 0 0,20-4-4068 0 0</inkml:trace>
+</inkml:ink>
+</file>
+
+<file path=ppt/ink/ink43.xml><?xml version="1.0" encoding="utf-8"?>
+<inkml:ink xmlns:inkml="http://www.w3.org/2003/InkML">
+  <inkml:definitions>
+    <inkml:context xml:id="ctx0">
+      <inkml:inkSource xml:id="inkSrc0">
+        <inkml:traceFormat>
+          <inkml:channel name="X" type="integer" min="-2.14748E9" max="2.14748E9" units="cm"/>
+          <inkml:channel name="Y" type="integer" min="-2.14748E9" max="2.14748E9" units="cm"/>
+          <inkml:channel name="F" type="integer" max="32767" units="dev"/>
+          <inkml:channel name="OA" type="integer" max="360" units="deg"/>
+          <inkml:channel name="OE" type="integer" max="90" units="deg"/>
+        </inkml:traceFormat>
+        <inkml:channelProperties>
+          <inkml:channelProperty channel="X" name="resolution" value="1000" units="1/cm"/>
+          <inkml:channelProperty channel="Y" name="resolution" value="1000" units="1/cm"/>
+          <inkml:channelProperty channel="F" name="resolution" value="0" units="1/dev"/>
+          <inkml:channelProperty channel="OA" name="resolution" value="1000" units="1/deg"/>
+          <inkml:channelProperty channel="OE" name="resolution" value="1000" units="1/deg"/>
+        </inkml:channelProperties>
+      </inkml:inkSource>
+      <inkml:timestamp xml:id="ts0" timeString="2026-04-04T17:55:24.221"/>
+    </inkml:context>
+    <inkml:brush xml:id="br0">
+      <inkml:brushProperty name="width" value="0.2" units="cm"/>
+      <inkml:brushProperty name="height" value="0.2" units="cm"/>
+      <inkml:brushProperty name="color" value="#FFC114"/>
+    </inkml:brush>
+  </inkml:definitions>
+  <inkml:trace contextRef="#ctx0" brushRef="#br0">1 0 4480 0 0,'0'0'-58'0'0,"16"20"-1094"0"0</inkml:trace>
+</inkml:ink>
+</file>
+
+<file path=ppt/ink/ink44.xml><?xml version="1.0" encoding="utf-8"?>
+<inkml:ink xmlns:inkml="http://www.w3.org/2003/InkML">
+  <inkml:definitions>
+    <inkml:context xml:id="ctx0">
+      <inkml:inkSource xml:id="inkSrc0">
+        <inkml:traceFormat>
+          <inkml:channel name="X" type="integer" min="-2.14748E9" max="2.14748E9" units="cm"/>
+          <inkml:channel name="Y" type="integer" min="-2.14748E9" max="2.14748E9" units="cm"/>
+          <inkml:channel name="F" type="integer" max="32767" units="dev"/>
+          <inkml:channel name="OA" type="integer" max="360" units="deg"/>
+          <inkml:channel name="OE" type="integer" max="90" units="deg"/>
+        </inkml:traceFormat>
+        <inkml:channelProperties>
+          <inkml:channelProperty channel="X" name="resolution" value="1000" units="1/cm"/>
+          <inkml:channelProperty channel="Y" name="resolution" value="1000" units="1/cm"/>
+          <inkml:channelProperty channel="F" name="resolution" value="0" units="1/dev"/>
+          <inkml:channelProperty channel="OA" name="resolution" value="1000" units="1/deg"/>
+          <inkml:channelProperty channel="OE" name="resolution" value="1000" units="1/deg"/>
+        </inkml:channelProperties>
+      </inkml:inkSource>
+      <inkml:timestamp xml:id="ts0" timeString="2026-04-04T17:55:24.221"/>
+    </inkml:context>
+    <inkml:brush xml:id="br0">
+      <inkml:brushProperty name="width" value="0.2" units="cm"/>
+      <inkml:brushProperty name="height" value="0.2" units="cm"/>
+      <inkml:brushProperty name="color" value="#FFC114"/>
+    </inkml:brush>
+  </inkml:definitions>
+  <inkml:trace contextRef="#ctx0" brushRef="#br0">1 0 4480 0 0,'0'0'-58'0'0,"16"20"-1094"0"0</inkml:trace>
+</inkml:ink>
+</file>
+
+<file path=ppt/ink/ink45.xml><?xml version="1.0" encoding="utf-8"?>
+<inkml:ink xmlns:inkml="http://www.w3.org/2003/InkML">
+  <inkml:definitions>
+    <inkml:context xml:id="ctx0">
+      <inkml:inkSource xml:id="inkSrc0">
+        <inkml:traceFormat>
+          <inkml:channel name="X" type="integer" min="-2.14748E9" max="2.14748E9" units="cm"/>
+          <inkml:channel name="Y" type="integer" min="-2.14748E9" max="2.14748E9" units="cm"/>
+          <inkml:channel name="F" type="integer" max="32767" units="dev"/>
+          <inkml:channel name="OA" type="integer" max="360" units="deg"/>
+          <inkml:channel name="OE" type="integer" max="90" units="deg"/>
+        </inkml:traceFormat>
+        <inkml:channelProperties>
+          <inkml:channelProperty channel="X" name="resolution" value="1000" units="1/cm"/>
+          <inkml:channelProperty channel="Y" name="resolution" value="1000" units="1/cm"/>
+          <inkml:channelProperty channel="F" name="resolution" value="0" units="1/dev"/>
+          <inkml:channelProperty channel="OA" name="resolution" value="1000" units="1/deg"/>
+          <inkml:channelProperty channel="OE" name="resolution" value="1000" units="1/deg"/>
+        </inkml:channelProperties>
+      </inkml:inkSource>
+      <inkml:timestamp xml:id="ts0" timeString="2026-04-04T12:06:40.637"/>
+    </inkml:context>
+    <inkml:brush xml:id="br0">
+      <inkml:brushProperty name="width" value="0.2" units="cm"/>
+      <inkml:brushProperty name="height" value="0.2" units="cm"/>
+      <inkml:brushProperty name="color" value="#FFC114"/>
+    </inkml:brush>
+  </inkml:definitions>
+  <inkml:trace contextRef="#ctx0" brushRef="#br0">45 0 5805 0 0,'0'0'-337'0'0,"-7"1"-619"0"0,-23 4 774 0 0,23-4 1172 0 0,16 1-979 0 0,857 102 149 0 0,-767-95-152 0 0,-14-3 227 0 0,99 21 0 0 0,-182-26-219 0 0,37-6-2775 0 0,-28 2 1389 0 0</inkml:trace>
+</inkml:ink>
+</file>
+
+<file path=ppt/ink/ink46.xml><?xml version="1.0" encoding="utf-8"?>
+<inkml:ink xmlns:inkml="http://www.w3.org/2003/InkML">
+  <inkml:definitions>
+    <inkml:context xml:id="ctx0">
+      <inkml:inkSource xml:id="inkSrc0">
+        <inkml:traceFormat>
+          <inkml:channel name="X" type="integer" min="-2.14748E9" max="2.14748E9" units="cm"/>
+          <inkml:channel name="Y" type="integer" min="-2.14748E9" max="2.14748E9" units="cm"/>
+          <inkml:channel name="F" type="integer" max="32767" units="dev"/>
+          <inkml:channel name="OA" type="integer" max="360" units="deg"/>
+          <inkml:channel name="OE" type="integer" max="90" units="deg"/>
+        </inkml:traceFormat>
+        <inkml:channelProperties>
+          <inkml:channelProperty channel="X" name="resolution" value="1000" units="1/cm"/>
+          <inkml:channelProperty channel="Y" name="resolution" value="1000" units="1/cm"/>
+          <inkml:channelProperty channel="F" name="resolution" value="0" units="1/dev"/>
+          <inkml:channelProperty channel="OA" name="resolution" value="1000" units="1/deg"/>
+          <inkml:channelProperty channel="OE" name="resolution" value="1000" units="1/deg"/>
+        </inkml:channelProperties>
+      </inkml:inkSource>
       <inkml:timestamp xml:id="ts0" timeString="2026-04-04T12:06:41.404"/>
     </inkml:context>
     <inkml:brush xml:id="br0">
@@ -1466,7 +1658,7 @@
 </inkml:ink>
 </file>
 
-<file path=ppt/ink/ink41.xml><?xml version="1.0" encoding="utf-8"?>
+<file path=ppt/ink/ink47.xml><?xml version="1.0" encoding="utf-8"?>
 <inkml:ink xmlns:inkml="http://www.w3.org/2003/InkML">
   <inkml:definitions>
     <inkml:context xml:id="ctx0">
@@ -1498,7 +1690,7 @@
 </inkml:ink>
 </file>
 
-<file path=ppt/ink/ink42.xml><?xml version="1.0" encoding="utf-8"?>
+<file path=ppt/ink/ink48.xml><?xml version="1.0" encoding="utf-8"?>
 <inkml:ink xmlns:inkml="http://www.w3.org/2003/InkML">
   <inkml:definitions>
     <inkml:context xml:id="ctx0">
@@ -1530,7 +1722,7 @@
 </inkml:ink>
 </file>
 
-<file path=ppt/ink/ink43.xml><?xml version="1.0" encoding="utf-8"?>
+<file path=ppt/ink/ink49.xml><?xml version="1.0" encoding="utf-8"?>
 <inkml:ink xmlns:inkml="http://www.w3.org/2003/InkML">
   <inkml:definitions>
     <inkml:context xml:id="ctx0">
@@ -1559,38 +1751,6 @@
     </inkml:brush>
   </inkml:definitions>
   <inkml:trace contextRef="#ctx0" brushRef="#br0">14 1 3716 0 0,'0'0'-79'0'0,"-11"0"14"0"0,8 0 151 0 0,10-1 406 0 0,187 3-441 0 0,235 32 0 0 0,-374-28-45 0 0,37 3 30 0 0,251 34 373 0 0,-264-35 195 0 0,-76-8-564 0 0,0 1-209 0 0,1-1-1 0 0,0 1 0 0 0,-1-1 1 0 0,1 0-1 0 0,0 0 1 0 0,0 0-1 0 0,-1 0 1 0 0,1-1-1 0 0,0 0 1 0 0,5-1-1 0 0,-3 1-939 0 0,7-1 592 0 0</inkml:trace>
-</inkml:ink>
-</file>
-
-<file path=ppt/ink/ink44.xml><?xml version="1.0" encoding="utf-8"?>
-<inkml:ink xmlns:inkml="http://www.w3.org/2003/InkML">
-  <inkml:definitions>
-    <inkml:context xml:id="ctx0">
-      <inkml:inkSource xml:id="inkSrc0">
-        <inkml:traceFormat>
-          <inkml:channel name="X" type="integer" min="-2.14748E9" max="2.14748E9" units="cm"/>
-          <inkml:channel name="Y" type="integer" min="-2.14748E9" max="2.14748E9" units="cm"/>
-          <inkml:channel name="F" type="integer" max="32767" units="dev"/>
-          <inkml:channel name="OA" type="integer" max="360" units="deg"/>
-          <inkml:channel name="OE" type="integer" max="90" units="deg"/>
-        </inkml:traceFormat>
-        <inkml:channelProperties>
-          <inkml:channelProperty channel="X" name="resolution" value="1000" units="1/cm"/>
-          <inkml:channelProperty channel="Y" name="resolution" value="1000" units="1/cm"/>
-          <inkml:channelProperty channel="F" name="resolution" value="0" units="1/dev"/>
-          <inkml:channelProperty channel="OA" name="resolution" value="1000" units="1/deg"/>
-          <inkml:channelProperty channel="OE" name="resolution" value="1000" units="1/deg"/>
-        </inkml:channelProperties>
-      </inkml:inkSource>
-      <inkml:timestamp xml:id="ts0" timeString="2026-04-04T12:06:44.647"/>
-    </inkml:context>
-    <inkml:brush xml:id="br0">
-      <inkml:brushProperty name="width" value="0.2" units="cm"/>
-      <inkml:brushProperty name="height" value="0.2" units="cm"/>
-      <inkml:brushProperty name="color" value="#FFC114"/>
-    </inkml:brush>
-  </inkml:definitions>
-  <inkml:trace contextRef="#ctx0" brushRef="#br0">37 31 3176 0 0,'-37'-31'1527'0'0,"204"94"157"0"0,-103-36-1676 0 0,-22-10-35 0 0,0 1-1 0 0,-1 2 1 0 0,62 41-1 0 0,-103-60 28 0 0,1-1-1 0 0,0 0 0 0 0,-1 1 1 0 0,1-1-1 0 0,0 1 1 0 0,-1-1-1 0 0,1 1 1 0 0,-1-1-1 0 0,1 1 0 0 0,-1-1 1 0 0,1 1-1 0 0,-1-1 1 0 0,0 1-1 0 0,1 0 0 0 0,-1-1 1 0 0,0 1-1 0 0,1 0 1 0 0,-1-1-1 0 0,0 1 0 0 0,0 0 1 0 0,1 0-1 0 0,-1-1 1 0 0,0 1-1 0 0,0 0 1 0 0,0 0-1 0 0,0-1 0 0 0,0 1 1 0 0,0 0-1 0 0,0 0 1 0 0,0-1-1 0 0,-1 1 0 0 0,1 0 1 0 0,0 0-1 0 0,0-1 1 0 0,-1 1-1 0 0,1 0 0 0 0,0-1 1 0 0,-1 1-1 0 0,0 0 1 0 0,-16 14-23 0 0,16-15 26 0 0,-20 12 57 0 0,0-2 0 0 0,-1-1 0 0 0,0-1 0 0 0,0 0 0 0 0,-31 5 0 0 0,24-6-1270 0 0,0 2 0 0 0,-28 11 0 0 0</inkml:trace>
 </inkml:ink>
 </file>
 
@@ -1623,6 +1783,38 @@
     </inkml:brush>
   </inkml:definitions>
   <inkml:trace contextRef="#ctx0" brushRef="#br0">14 24 5945 0 0,'-5'-15'-1141'0'0,"-2"7"293"0"0,6 27 840 0 0,0 0 1 0 0,2 0 0 0 0,0 0 0 0 0,0 0-1 0 0,2-1 1 0 0,1 1 0 0 0,7 26-1 0 0,7 40 37 0 0,5 35-52 0 0,73 222-1 0 0,-10-45 95 0 0,35 327 28 0 0,-107-540-95 0 0,1 42 40 0 0,-2 242 1 0 0,-8-104-37 0 0,2-154-1 0 0,6-1 0 0 0,4 0 0 0 0,58 192 0 0 0,-23-124-8 0 0,28 81-16 0 0,117 356 15 0 0,-137-385-63 0 0,-30-96 59 0 0,23 121 19 0 0,-17-72-23 0 0,-12-65 49 0 0,36 139-2 0 0,-19-120-83 0 0,44 136-30 0 0,114 273 16 0 0,-157-433 35 0 0,-12-32-16 0 0,34 133 0 0 0,-17-43-16 0 0,-41-148 37 0 0,28 72 40 0 0,82 161-1 0 0,-64-149-12 0 0,17 42 3 0 0,-31-68 54 0 0,-18-53 5511 0 0,5-200-3538 0 0,-14-23-1463 0 0,-12 192-556 0 0,-1-2-14 0 0,-8-24-349 0 0,5 26-448 0 0,1 37-781 0 0,3-9 1637 0 0,-9 63-433 0 0,4 0 1 0 0,5 92-1 0 0,2-92 185 0 0,-12-23 386 0 0,10-64-191 0 0,0 1 1 0 0,-1 0-1 0 0,1-1 0 0 0,0 1 0 0 0,-1 0 0 0 0,1-1 1 0 0,-1 0-1 0 0,1 1 0 0 0,0-1 0 0 0,-1 0 0 0 0,1 0 1 0 0,-1 0-1 0 0,1 0 0 0 0,-1 0 0 0 0,1 0 0 0 0,-1 0 1 0 0,-2-1-1 0 0,-27-1 117 0 0,-35-14 252 0 0,0-2 0 0 0,-99-42 0 0 0,95 31 113 0 0,68 29-456 0 0,-6-5-377 0 0,0 0 1 0 0,0-1-1 0 0,-13-12 0 0 0,14 12-220 0 0</inkml:trace>
+</inkml:ink>
+</file>
+
+<file path=ppt/ink/ink50.xml><?xml version="1.0" encoding="utf-8"?>
+<inkml:ink xmlns:inkml="http://www.w3.org/2003/InkML">
+  <inkml:definitions>
+    <inkml:context xml:id="ctx0">
+      <inkml:inkSource xml:id="inkSrc0">
+        <inkml:traceFormat>
+          <inkml:channel name="X" type="integer" min="-2.14748E9" max="2.14748E9" units="cm"/>
+          <inkml:channel name="Y" type="integer" min="-2.14748E9" max="2.14748E9" units="cm"/>
+          <inkml:channel name="F" type="integer" max="32767" units="dev"/>
+          <inkml:channel name="OA" type="integer" max="360" units="deg"/>
+          <inkml:channel name="OE" type="integer" max="90" units="deg"/>
+        </inkml:traceFormat>
+        <inkml:channelProperties>
+          <inkml:channelProperty channel="X" name="resolution" value="1000" units="1/cm"/>
+          <inkml:channelProperty channel="Y" name="resolution" value="1000" units="1/cm"/>
+          <inkml:channelProperty channel="F" name="resolution" value="0" units="1/dev"/>
+          <inkml:channelProperty channel="OA" name="resolution" value="1000" units="1/deg"/>
+          <inkml:channelProperty channel="OE" name="resolution" value="1000" units="1/deg"/>
+        </inkml:channelProperties>
+      </inkml:inkSource>
+      <inkml:timestamp xml:id="ts0" timeString="2026-04-04T12:06:44.647"/>
+    </inkml:context>
+    <inkml:brush xml:id="br0">
+      <inkml:brushProperty name="width" value="0.2" units="cm"/>
+      <inkml:brushProperty name="height" value="0.2" units="cm"/>
+      <inkml:brushProperty name="color" value="#FFC114"/>
+    </inkml:brush>
+  </inkml:definitions>
+  <inkml:trace contextRef="#ctx0" brushRef="#br0">37 31 3176 0 0,'-37'-31'1527'0'0,"204"94"157"0"0,-103-36-1676 0 0,-22-10-35 0 0,0 1-1 0 0,-1 2 1 0 0,62 41-1 0 0,-103-60 28 0 0,1-1-1 0 0,0 0 0 0 0,-1 1 1 0 0,1-1-1 0 0,0 1 1 0 0,-1-1-1 0 0,1 1 1 0 0,-1-1-1 0 0,1 1 0 0 0,-1-1 1 0 0,1 1-1 0 0,-1-1 1 0 0,0 1-1 0 0,1 0 0 0 0,-1-1 1 0 0,0 1-1 0 0,1 0 1 0 0,-1-1-1 0 0,0 1 0 0 0,0 0 1 0 0,1 0-1 0 0,-1-1 1 0 0,0 1-1 0 0,0 0 1 0 0,0 0-1 0 0,0-1 0 0 0,0 1 1 0 0,0 0-1 0 0,0 0 1 0 0,0-1-1 0 0,-1 1 0 0 0,1 0 1 0 0,0 0-1 0 0,0-1 1 0 0,-1 1-1 0 0,1 0 0 0 0,0-1 1 0 0,-1 1-1 0 0,0 0 1 0 0,-16 14-23 0 0,16-15 26 0 0,-20 12 57 0 0,0-2 0 0 0,-1-1 0 0 0,0-1 0 0 0,0 0 0 0 0,-31 5 0 0 0,24-6-1270 0 0,0 2 0 0 0,-28 11 0 0 0</inkml:trace>
 </inkml:ink>
 </file>
 
@@ -1836,7 +2028,7 @@
           <a:p>
             <a:fld id="{CB233BD1-3BA8-448D-9D08-7846095EA517}" type="datetimeFigureOut">
               <a:rPr lang="en-US" smtClean="0"/>
-              <a:t>4/6/2026</a:t>
+              <a:t>5/4/2026</a:t>
             </a:fld>
             <a:endParaRPr lang="en-US"/>
           </a:p>
@@ -2250,7 +2442,7 @@
           <a:p>
             <a:fld id="{6383FAE1-13DE-4511-8C1B-C8AFB720664C}" type="datetimeFigureOut">
               <a:rPr lang="en-US" smtClean="0"/>
-              <a:t>4/6/2026</a:t>
+              <a:t>5/4/2026</a:t>
             </a:fld>
             <a:endParaRPr lang="en-US"/>
           </a:p>
@@ -2448,7 +2640,7 @@
           <a:p>
             <a:fld id="{6383FAE1-13DE-4511-8C1B-C8AFB720664C}" type="datetimeFigureOut">
               <a:rPr lang="en-US" smtClean="0"/>
-              <a:t>4/6/2026</a:t>
+              <a:t>5/4/2026</a:t>
             </a:fld>
             <a:endParaRPr lang="en-US"/>
           </a:p>
@@ -2656,7 +2848,7 @@
           <a:p>
             <a:fld id="{6383FAE1-13DE-4511-8C1B-C8AFB720664C}" type="datetimeFigureOut">
               <a:rPr lang="en-US" smtClean="0"/>
-              <a:t>4/6/2026</a:t>
+              <a:t>5/4/2026</a:t>
             </a:fld>
             <a:endParaRPr lang="en-US"/>
           </a:p>
@@ -2854,7 +3046,7 @@
           <a:p>
             <a:fld id="{6383FAE1-13DE-4511-8C1B-C8AFB720664C}" type="datetimeFigureOut">
               <a:rPr lang="en-US" smtClean="0"/>
-              <a:t>4/6/2026</a:t>
+              <a:t>5/4/2026</a:t>
             </a:fld>
             <a:endParaRPr lang="en-US"/>
           </a:p>
@@ -3129,7 +3321,7 @@
           <a:p>
             <a:fld id="{6383FAE1-13DE-4511-8C1B-C8AFB720664C}" type="datetimeFigureOut">
               <a:rPr lang="en-US" smtClean="0"/>
-              <a:t>4/6/2026</a:t>
+              <a:t>5/4/2026</a:t>
             </a:fld>
             <a:endParaRPr lang="en-US"/>
           </a:p>
@@ -3394,7 +3586,7 @@
           <a:p>
             <a:fld id="{6383FAE1-13DE-4511-8C1B-C8AFB720664C}" type="datetimeFigureOut">
               <a:rPr lang="en-US" smtClean="0"/>
-              <a:t>4/6/2026</a:t>
+              <a:t>5/4/2026</a:t>
             </a:fld>
             <a:endParaRPr lang="en-US"/>
           </a:p>
@@ -3806,7 +3998,7 @@
           <a:p>
             <a:fld id="{6383FAE1-13DE-4511-8C1B-C8AFB720664C}" type="datetimeFigureOut">
               <a:rPr lang="en-US" smtClean="0"/>
-              <a:t>4/6/2026</a:t>
+              <a:t>5/4/2026</a:t>
             </a:fld>
             <a:endParaRPr lang="en-US"/>
           </a:p>
@@ -3947,7 +4139,7 @@
           <a:p>
             <a:fld id="{6383FAE1-13DE-4511-8C1B-C8AFB720664C}" type="datetimeFigureOut">
               <a:rPr lang="en-US" smtClean="0"/>
-              <a:t>4/6/2026</a:t>
+              <a:t>5/4/2026</a:t>
             </a:fld>
             <a:endParaRPr lang="en-US"/>
           </a:p>
@@ -4060,7 +4252,7 @@
           <a:p>
             <a:fld id="{6383FAE1-13DE-4511-8C1B-C8AFB720664C}" type="datetimeFigureOut">
               <a:rPr lang="en-US" smtClean="0"/>
-              <a:t>4/6/2026</a:t>
+              <a:t>5/4/2026</a:t>
             </a:fld>
             <a:endParaRPr lang="en-US"/>
           </a:p>
@@ -4371,7 +4563,7 @@
           <a:p>
             <a:fld id="{6383FAE1-13DE-4511-8C1B-C8AFB720664C}" type="datetimeFigureOut">
               <a:rPr lang="en-US" smtClean="0"/>
-              <a:t>4/6/2026</a:t>
+              <a:t>5/4/2026</a:t>
             </a:fld>
             <a:endParaRPr lang="en-US"/>
           </a:p>
@@ -4662,7 +4854,7 @@
           <a:p>
             <a:fld id="{6383FAE1-13DE-4511-8C1B-C8AFB720664C}" type="datetimeFigureOut">
               <a:rPr lang="en-US" smtClean="0"/>
-              <a:t>4/6/2026</a:t>
+              <a:t>5/4/2026</a:t>
             </a:fld>
             <a:endParaRPr lang="en-US"/>
           </a:p>
@@ -4906,7 +5098,7 @@
           <a:p>
             <a:fld id="{6383FAE1-13DE-4511-8C1B-C8AFB720664C}" type="datetimeFigureOut">
               <a:rPr lang="en-US" smtClean="0"/>
-              <a:t>4/6/2026</a:t>
+              <a:t>5/4/2026</a:t>
             </a:fld>
             <a:endParaRPr lang="en-US"/>
           </a:p>
@@ -5727,12 +5919,133 @@
           </a:p>
         </p:txBody>
       </p:sp>
+      <p:graphicFrame>
+        <p:nvGraphicFramePr>
+          <p:cNvPr id="2" name="Table 1">
+            <a:extLst>
+              <a:ext uri="{FF2B5EF4-FFF2-40B4-BE49-F238E27FC236}">
+                <a16:creationId xmlns:a16="http://schemas.microsoft.com/office/drawing/2014/main" id="{00CB1001-291E-B23C-F98C-6C5423D9F1F3}"/>
+              </a:ext>
+            </a:extLst>
+          </p:cNvPr>
+          <p:cNvGraphicFramePr>
+            <a:graphicFrameLocks noGrp="1"/>
+          </p:cNvGraphicFramePr>
+          <p:nvPr>
+            <p:extLst>
+              <p:ext uri="{D42A27DB-BD31-4B8C-83A1-F6EECF244321}">
+                <p14:modId xmlns:p14="http://schemas.microsoft.com/office/powerpoint/2010/main" val="2958056949"/>
+              </p:ext>
+            </p:extLst>
+          </p:nvPr>
+        </p:nvGraphicFramePr>
+        <p:xfrm>
+          <a:off x="82295" y="1727648"/>
+          <a:ext cx="3246120" cy="741680"/>
+        </p:xfrm>
+        <a:graphic>
+          <a:graphicData uri="http://schemas.openxmlformats.org/drawingml/2006/table">
+            <a:tbl>
+              <a:tblPr firstRow="1" bandRow="1">
+                <a:tableStyleId>{5C22544A-7EE6-4342-B048-85BDC9FD1C3A}</a:tableStyleId>
+              </a:tblPr>
+              <a:tblGrid>
+                <a:gridCol w="1414272">
+                  <a:extLst>
+                    <a:ext uri="{9D8B030D-6E8A-4147-A177-3AD203B41FA5}">
+                      <a16:colId xmlns:a16="http://schemas.microsoft.com/office/drawing/2014/main" val="1035831539"/>
+                    </a:ext>
+                  </a:extLst>
+                </a:gridCol>
+                <a:gridCol w="1831848">
+                  <a:extLst>
+                    <a:ext uri="{9D8B030D-6E8A-4147-A177-3AD203B41FA5}">
+                      <a16:colId xmlns:a16="http://schemas.microsoft.com/office/drawing/2014/main" val="826056215"/>
+                    </a:ext>
+                  </a:extLst>
+                </a:gridCol>
+              </a:tblGrid>
+              <a:tr h="370840">
+                <a:tc>
+                  <a:txBody>
+                    <a:bodyPr/>
+                    <a:lstStyle/>
+                    <a:p>
+                      <a:pPr algn="ctr"/>
+                      <a:r>
+                        <a:rPr lang="en-US" dirty="0" err="1"/>
+                        <a:t>Study_hours</a:t>
+                      </a:r>
+                      <a:endParaRPr lang="en-US" dirty="0"/>
+                    </a:p>
+                  </a:txBody>
+                  <a:tcPr/>
+                </a:tc>
+                <a:tc>
+                  <a:txBody>
+                    <a:bodyPr/>
+                    <a:lstStyle/>
+                    <a:p>
+                      <a:pPr algn="ctr"/>
+                      <a:r>
+                        <a:rPr lang="en-US" dirty="0"/>
+                        <a:t>distance</a:t>
+                      </a:r>
+                    </a:p>
+                  </a:txBody>
+                  <a:tcPr/>
+                </a:tc>
+                <a:extLst>
+                  <a:ext uri="{0D108BD9-81ED-4DB2-BD59-A6C34878D82A}">
+                    <a16:rowId xmlns:a16="http://schemas.microsoft.com/office/drawing/2014/main" val="3072801255"/>
+                  </a:ext>
+                </a:extLst>
+              </a:tr>
+              <a:tr h="370840">
+                <a:tc>
+                  <a:txBody>
+                    <a:bodyPr/>
+                    <a:lstStyle/>
+                    <a:p>
+                      <a:pPr algn="ctr"/>
+                      <a:r>
+                        <a:rPr lang="en-US" dirty="0"/>
+                        <a:t>2</a:t>
+                      </a:r>
+                    </a:p>
+                  </a:txBody>
+                  <a:tcPr/>
+                </a:tc>
+                <a:tc>
+                  <a:txBody>
+                    <a:bodyPr/>
+                    <a:lstStyle/>
+                    <a:p>
+                      <a:pPr algn="ctr"/>
+                      <a:r>
+                        <a:rPr lang="en-US" dirty="0"/>
+                        <a:t>5</a:t>
+                      </a:r>
+                    </a:p>
+                  </a:txBody>
+                  <a:tcPr/>
+                </a:tc>
+                <a:extLst>
+                  <a:ext uri="{0D108BD9-81ED-4DB2-BD59-A6C34878D82A}">
+                    <a16:rowId xmlns:a16="http://schemas.microsoft.com/office/drawing/2014/main" val="3959947749"/>
+                  </a:ext>
+                </a:extLst>
+              </a:tr>
+            </a:tbl>
+          </a:graphicData>
+        </a:graphic>
+      </p:graphicFrame>
       <p:pic>
         <p:nvPicPr>
-          <p:cNvPr id="4" name="Picture 3">
-            <a:extLst>
-              <a:ext uri="{FF2B5EF4-FFF2-40B4-BE49-F238E27FC236}">
-                <a16:creationId xmlns:a16="http://schemas.microsoft.com/office/drawing/2014/main" id="{BE278EE1-8926-4098-6F68-4907F3059B0C}"/>
+          <p:cNvPr id="5" name="Picture 4">
+            <a:extLst>
+              <a:ext uri="{FF2B5EF4-FFF2-40B4-BE49-F238E27FC236}">
+                <a16:creationId xmlns:a16="http://schemas.microsoft.com/office/drawing/2014/main" id="{1627FA17-4E50-9BE0-A434-9E8378FC2BEC}"/>
               </a:ext>
             </a:extLst>
           </p:cNvPr>
@@ -5749,8 +6062,8 @@
         </p:blipFill>
         <p:spPr>
           <a:xfrm>
-            <a:off x="201167" y="1649074"/>
-            <a:ext cx="7506748" cy="3991532"/>
+            <a:off x="201167" y="2547902"/>
+            <a:ext cx="7074053" cy="3615154"/>
           </a:xfrm>
           <a:prstGeom prst="rect">
             <a:avLst/>
@@ -5956,10 +6269,10 @@
       </p:sp>
       <p:pic>
         <p:nvPicPr>
-          <p:cNvPr id="4" name="Picture 3">
-            <a:extLst>
-              <a:ext uri="{FF2B5EF4-FFF2-40B4-BE49-F238E27FC236}">
-                <a16:creationId xmlns:a16="http://schemas.microsoft.com/office/drawing/2014/main" id="{703D809D-AD5A-D77D-5F74-69E6E7B37F65}"/>
+          <p:cNvPr id="5" name="Picture 4">
+            <a:extLst>
+              <a:ext uri="{FF2B5EF4-FFF2-40B4-BE49-F238E27FC236}">
+                <a16:creationId xmlns:a16="http://schemas.microsoft.com/office/drawing/2014/main" id="{E79E0E5E-83ED-652D-CBB9-CD0402BF594B}"/>
               </a:ext>
             </a:extLst>
           </p:cNvPr>
@@ -5976,20 +6289,141 @@
         </p:blipFill>
         <p:spPr>
           <a:xfrm>
-            <a:off x="201167" y="1649074"/>
-            <a:ext cx="7506748" cy="3991532"/>
+            <a:off x="8144165" y="2601075"/>
+            <a:ext cx="3846668" cy="2761711"/>
           </a:xfrm>
           <a:prstGeom prst="rect">
             <a:avLst/>
           </a:prstGeom>
         </p:spPr>
       </p:pic>
+      <p:graphicFrame>
+        <p:nvGraphicFramePr>
+          <p:cNvPr id="3" name="Table 2">
+            <a:extLst>
+              <a:ext uri="{FF2B5EF4-FFF2-40B4-BE49-F238E27FC236}">
+                <a16:creationId xmlns:a16="http://schemas.microsoft.com/office/drawing/2014/main" id="{66E6FEE0-8328-726F-3F14-99A2D38D22C5}"/>
+              </a:ext>
+            </a:extLst>
+          </p:cNvPr>
+          <p:cNvGraphicFramePr>
+            <a:graphicFrameLocks noGrp="1"/>
+          </p:cNvGraphicFramePr>
+          <p:nvPr>
+            <p:extLst>
+              <p:ext uri="{D42A27DB-BD31-4B8C-83A1-F6EECF244321}">
+                <p14:modId xmlns:p14="http://schemas.microsoft.com/office/powerpoint/2010/main" val="194886001"/>
+              </p:ext>
+            </p:extLst>
+          </p:nvPr>
+        </p:nvGraphicFramePr>
+        <p:xfrm>
+          <a:off x="82295" y="1727648"/>
+          <a:ext cx="3246120" cy="741680"/>
+        </p:xfrm>
+        <a:graphic>
+          <a:graphicData uri="http://schemas.openxmlformats.org/drawingml/2006/table">
+            <a:tbl>
+              <a:tblPr firstRow="1" bandRow="1">
+                <a:tableStyleId>{5C22544A-7EE6-4342-B048-85BDC9FD1C3A}</a:tableStyleId>
+              </a:tblPr>
+              <a:tblGrid>
+                <a:gridCol w="1414272">
+                  <a:extLst>
+                    <a:ext uri="{9D8B030D-6E8A-4147-A177-3AD203B41FA5}">
+                      <a16:colId xmlns:a16="http://schemas.microsoft.com/office/drawing/2014/main" val="1035831539"/>
+                    </a:ext>
+                  </a:extLst>
+                </a:gridCol>
+                <a:gridCol w="1831848">
+                  <a:extLst>
+                    <a:ext uri="{9D8B030D-6E8A-4147-A177-3AD203B41FA5}">
+                      <a16:colId xmlns:a16="http://schemas.microsoft.com/office/drawing/2014/main" val="826056215"/>
+                    </a:ext>
+                  </a:extLst>
+                </a:gridCol>
+              </a:tblGrid>
+              <a:tr h="370840">
+                <a:tc>
+                  <a:txBody>
+                    <a:bodyPr/>
+                    <a:lstStyle/>
+                    <a:p>
+                      <a:pPr algn="ctr"/>
+                      <a:r>
+                        <a:rPr lang="en-US" dirty="0" err="1"/>
+                        <a:t>Study_hours</a:t>
+                      </a:r>
+                      <a:endParaRPr lang="en-US" dirty="0"/>
+                    </a:p>
+                  </a:txBody>
+                  <a:tcPr/>
+                </a:tc>
+                <a:tc>
+                  <a:txBody>
+                    <a:bodyPr/>
+                    <a:lstStyle/>
+                    <a:p>
+                      <a:pPr algn="ctr"/>
+                      <a:r>
+                        <a:rPr lang="en-US" dirty="0"/>
+                        <a:t>distance</a:t>
+                      </a:r>
+                    </a:p>
+                  </a:txBody>
+                  <a:tcPr/>
+                </a:tc>
+                <a:extLst>
+                  <a:ext uri="{0D108BD9-81ED-4DB2-BD59-A6C34878D82A}">
+                    <a16:rowId xmlns:a16="http://schemas.microsoft.com/office/drawing/2014/main" val="3072801255"/>
+                  </a:ext>
+                </a:extLst>
+              </a:tr>
+              <a:tr h="370840">
+                <a:tc>
+                  <a:txBody>
+                    <a:bodyPr/>
+                    <a:lstStyle/>
+                    <a:p>
+                      <a:pPr algn="ctr"/>
+                      <a:r>
+                        <a:rPr lang="en-US" dirty="0"/>
+                        <a:t>2</a:t>
+                      </a:r>
+                    </a:p>
+                  </a:txBody>
+                  <a:tcPr/>
+                </a:tc>
+                <a:tc>
+                  <a:txBody>
+                    <a:bodyPr/>
+                    <a:lstStyle/>
+                    <a:p>
+                      <a:pPr algn="ctr"/>
+                      <a:r>
+                        <a:rPr lang="en-US" dirty="0"/>
+                        <a:t>5</a:t>
+                      </a:r>
+                    </a:p>
+                  </a:txBody>
+                  <a:tcPr/>
+                </a:tc>
+                <a:extLst>
+                  <a:ext uri="{0D108BD9-81ED-4DB2-BD59-A6C34878D82A}">
+                    <a16:rowId xmlns:a16="http://schemas.microsoft.com/office/drawing/2014/main" val="3959947749"/>
+                  </a:ext>
+                </a:extLst>
+              </a:tr>
+            </a:tbl>
+          </a:graphicData>
+        </a:graphic>
+      </p:graphicFrame>
       <p:pic>
         <p:nvPicPr>
-          <p:cNvPr id="5" name="Picture 4">
-            <a:extLst>
-              <a:ext uri="{FF2B5EF4-FFF2-40B4-BE49-F238E27FC236}">
-                <a16:creationId xmlns:a16="http://schemas.microsoft.com/office/drawing/2014/main" id="{E79E0E5E-83ED-652D-CBB9-CD0402BF594B}"/>
+          <p:cNvPr id="6" name="Picture 5">
+            <a:extLst>
+              <a:ext uri="{FF2B5EF4-FFF2-40B4-BE49-F238E27FC236}">
+                <a16:creationId xmlns:a16="http://schemas.microsoft.com/office/drawing/2014/main" id="{FFDF675D-CE78-523B-8120-FE20E580B7DE}"/>
               </a:ext>
             </a:extLst>
           </p:cNvPr>
@@ -6006,8 +6440,8 @@
         </p:blipFill>
         <p:spPr>
           <a:xfrm>
-            <a:off x="8144165" y="2487168"/>
-            <a:ext cx="3846668" cy="2761711"/>
+            <a:off x="201167" y="2601075"/>
+            <a:ext cx="6995865" cy="3575196"/>
           </a:xfrm>
           <a:prstGeom prst="rect">
             <a:avLst/>
@@ -6897,7 +7331,7 @@
         </p:blipFill>
         <p:spPr>
           <a:xfrm>
-            <a:off x="4402559" y="839910"/>
+            <a:off x="4402559" y="897789"/>
             <a:ext cx="5858693" cy="1914792"/>
           </a:xfrm>
           <a:prstGeom prst="rect">
@@ -6966,7 +7400,7 @@
                   </a:schemeClr>
                 </a:solidFill>
               </a:rPr>
-              <a:t>Each neuron applies a non-linear function (like </a:t>
+              <a:t>Each neuron applies a activation function (non-linear function- like </a:t>
             </a:r>
             <a:r>
               <a:rPr lang="en-IN" sz="2400" dirty="0" err="1">
@@ -7023,7 +7457,7 @@
         </p:blipFill>
         <p:spPr>
           <a:xfrm>
-            <a:off x="3866229" y="4843131"/>
+            <a:off x="4498646" y="4837013"/>
             <a:ext cx="6931354" cy="2020987"/>
           </a:xfrm>
           <a:prstGeom prst="rect">
@@ -7053,7 +7487,7 @@
         </p:blipFill>
         <p:spPr>
           <a:xfrm>
-            <a:off x="4559710" y="2812581"/>
+            <a:off x="4559710" y="2894877"/>
             <a:ext cx="6172513" cy="2030550"/>
           </a:xfrm>
           <a:prstGeom prst="rect">
@@ -7786,7 +8220,7 @@
                   </a:schemeClr>
                 </a:solidFill>
               </a:rPr>
-              <a:t>Natural language processing</a:t>
+              <a:t>Natural language processing – Google translate, text completion, etc.</a:t>
             </a:r>
             <a:endParaRPr lang="en-US" sz="2400" dirty="0">
               <a:solidFill>
@@ -7836,7 +8270,7 @@
                   </a:schemeClr>
                 </a:solidFill>
               </a:rPr>
-              <a:t>Function approximation</a:t>
+              <a:t>Function approximation - </a:t>
             </a:r>
             <a:endParaRPr lang="en-US" sz="2400" dirty="0">
               <a:solidFill>
@@ -7900,7 +8334,7 @@
         <p:spPr>
           <a:xfrm>
             <a:off x="301752" y="245102"/>
-            <a:ext cx="10405872" cy="1200329"/>
+            <a:ext cx="10405872" cy="1938992"/>
           </a:xfrm>
           <a:prstGeom prst="rect">
             <a:avLst/>
@@ -7965,8 +8399,14 @@
                   </a:schemeClr>
                 </a:solidFill>
               </a:rPr>
-              <a:t>In </a:t>
-            </a:r>
+              <a:t>The number of neurons in output layer:</a:t>
+            </a:r>
+          </a:p>
+          <a:p>
+            <a:pPr marL="342900" indent="-342900">
+              <a:buFont typeface="Arial" panose="020B0604020202020204" pitchFamily="34" charset="0"/>
+              <a:buChar char="•"/>
+            </a:pPr>
             <a:r>
               <a:rPr lang="en-US" sz="2400" b="1" dirty="0">
                 <a:solidFill>
@@ -7976,7 +8416,7 @@
                   </a:schemeClr>
                 </a:solidFill>
               </a:rPr>
-              <a:t>regression</a:t>
+              <a:t>Predict number</a:t>
             </a:r>
             <a:r>
               <a:rPr lang="en-US" sz="2400" dirty="0">
@@ -7987,15 +8427,48 @@
                   </a:schemeClr>
                 </a:solidFill>
               </a:rPr>
-              <a:t> problem, output layer has 1 neuron. </a:t>
-            </a:r>
-          </a:p>
-          <a:p>
-            <a:pPr marL="457200" indent="-457200">
-              <a:buFont typeface="+mj-lt"/>
-              <a:buAutoNum type="arabicPeriod"/>
+              <a:t>: (</a:t>
+            </a:r>
+            <a:r>
+              <a:rPr lang="en-US" sz="2400" b="1" dirty="0">
+                <a:solidFill>
+                  <a:schemeClr val="accent6">
+                    <a:lumMod val="60000"/>
+                    <a:lumOff val="40000"/>
+                  </a:schemeClr>
+                </a:solidFill>
+              </a:rPr>
+              <a:t>Regression</a:t>
+            </a:r>
+            <a:r>
+              <a:rPr lang="en-US" sz="2400" dirty="0">
+                <a:solidFill>
+                  <a:schemeClr val="accent6">
+                    <a:lumMod val="60000"/>
+                    <a:lumOff val="40000"/>
+                  </a:schemeClr>
+                </a:solidFill>
+              </a:rPr>
+              <a:t> problem). Output layer has 1 neuron. </a:t>
+            </a:r>
+          </a:p>
+          <a:p>
+            <a:pPr marL="342900" indent="-342900">
+              <a:buFont typeface="Arial" panose="020B0604020202020204" pitchFamily="34" charset="0"/>
+              <a:buChar char="•"/>
             </a:pPr>
             <a:r>
+              <a:rPr lang="en-US" sz="2400" b="1" dirty="0">
+                <a:solidFill>
+                  <a:schemeClr val="accent6">
+                    <a:lumMod val="60000"/>
+                    <a:lumOff val="40000"/>
+                  </a:schemeClr>
+                </a:solidFill>
+              </a:rPr>
+              <a:t>Predict Class</a:t>
+            </a:r>
+            <a:r>
               <a:rPr lang="en-US" sz="2400" dirty="0">
                 <a:solidFill>
                   <a:schemeClr val="accent6">
@@ -8004,7 +8477,7 @@
                   </a:schemeClr>
                 </a:solidFill>
               </a:rPr>
-              <a:t>In </a:t>
+              <a:t>: (</a:t>
             </a:r>
             <a:r>
               <a:rPr lang="en-US" sz="2400" b="1" dirty="0">
@@ -8015,7 +8488,7 @@
                   </a:schemeClr>
                 </a:solidFill>
               </a:rPr>
-              <a:t>binary classification</a:t>
+              <a:t>Classification </a:t>
             </a:r>
             <a:r>
               <a:rPr lang="en-US" sz="2400" dirty="0">
@@ -8026,7 +8499,42 @@
                   </a:schemeClr>
                 </a:solidFill>
               </a:rPr>
-              <a:t>, output layer has 1 neuron: value -&gt; 0/1</a:t>
+              <a:t>problem</a:t>
+            </a:r>
+            <a:r>
+              <a:rPr lang="en-US" sz="2400" b="1" dirty="0">
+                <a:solidFill>
+                  <a:schemeClr val="accent6">
+                    <a:lumMod val="60000"/>
+                    <a:lumOff val="40000"/>
+                  </a:schemeClr>
+                </a:solidFill>
+              </a:rPr>
+              <a:t>).</a:t>
+            </a:r>
+            <a:r>
+              <a:rPr lang="en-US" sz="2400" dirty="0">
+                <a:solidFill>
+                  <a:schemeClr val="accent6">
+                    <a:lumMod val="60000"/>
+                    <a:lumOff val="40000"/>
+                  </a:schemeClr>
+                </a:solidFill>
+              </a:rPr>
+              <a:t>  Output layer has 1 or more  neurons.</a:t>
+            </a:r>
+          </a:p>
+          <a:p>
+            <a:r>
+              <a:rPr lang="en-US" sz="2400" dirty="0">
+                <a:solidFill>
+                  <a:schemeClr val="accent6">
+                    <a:lumMod val="60000"/>
+                    <a:lumOff val="40000"/>
+                  </a:schemeClr>
+                </a:solidFill>
+              </a:rPr>
+              <a:t>In  Binary -&gt; only 1 out neuron -&gt; value is between 0 – 1 (probability of class 1)</a:t>
             </a:r>
           </a:p>
         </p:txBody>
@@ -8059,7 +8567,7 @@
         </p:blipFill>
         <p:spPr>
           <a:xfrm rot="16200000">
-            <a:off x="5843424" y="997208"/>
+            <a:off x="5882527" y="1838671"/>
             <a:ext cx="4252853" cy="5670472"/>
           </a:xfrm>
           <a:prstGeom prst="rect">
@@ -8081,8 +8589,8 @@
         </p:nvSpPr>
         <p:spPr>
           <a:xfrm>
-            <a:off x="128016" y="2670048"/>
-            <a:ext cx="4507992" cy="1938992"/>
+            <a:off x="137160" y="2971800"/>
+            <a:ext cx="4507992" cy="2677656"/>
           </a:xfrm>
           <a:prstGeom prst="rect">
             <a:avLst/>
@@ -8094,6 +8602,29 @@
             <a:spAutoFit/>
           </a:bodyPr>
           <a:lstStyle/>
+          <a:p>
+            <a:r>
+              <a:rPr lang="en-US" sz="2400" b="1" dirty="0">
+                <a:solidFill>
+                  <a:schemeClr val="accent6">
+                    <a:lumMod val="60000"/>
+                    <a:lumOff val="40000"/>
+                  </a:schemeClr>
+                </a:solidFill>
+              </a:rPr>
+              <a:t>Predict Salary</a:t>
+            </a:r>
+          </a:p>
+          <a:p>
+            <a:endParaRPr lang="en-US" sz="2400" dirty="0">
+              <a:solidFill>
+                <a:schemeClr val="accent6">
+                  <a:lumMod val="60000"/>
+                  <a:lumOff val="40000"/>
+                </a:schemeClr>
+              </a:solidFill>
+            </a:endParaRPr>
+          </a:p>
           <a:p>
             <a:r>
               <a:rPr lang="en-US" sz="2400" dirty="0">
@@ -8230,7 +8761,7 @@
         </p:blipFill>
         <p:spPr>
           <a:xfrm rot="16200000">
-            <a:off x="5843424" y="997208"/>
+            <a:off x="6154321" y="726799"/>
             <a:ext cx="4252853" cy="5670472"/>
           </a:xfrm>
           <a:prstGeom prst="rect">
@@ -8252,8 +8783,8 @@
         </p:nvSpPr>
         <p:spPr>
           <a:xfrm>
-            <a:off x="128016" y="2670048"/>
-            <a:ext cx="4507992" cy="1938992"/>
+            <a:off x="219456" y="1435608"/>
+            <a:ext cx="4837176" cy="3416320"/>
           </a:xfrm>
           <a:prstGeom prst="rect">
             <a:avLst/>
@@ -8267,15 +8798,15 @@
           <a:lstStyle/>
           <a:p>
             <a:r>
-              <a:rPr lang="en-US" sz="2400" dirty="0">
-                <a:solidFill>
-                  <a:schemeClr val="accent6">
-                    <a:lumMod val="60000"/>
-                    <a:lumOff val="40000"/>
-                  </a:schemeClr>
-                </a:solidFill>
-              </a:rPr>
-              <a:t>Here the number of features = 3</a:t>
+              <a:rPr lang="en-US" sz="2400" b="1" dirty="0">
+                <a:solidFill>
+                  <a:schemeClr val="accent6">
+                    <a:lumMod val="60000"/>
+                    <a:lumOff val="40000"/>
+                  </a:schemeClr>
+                </a:solidFill>
+              </a:rPr>
+              <a:t>Predict Class</a:t>
             </a:r>
           </a:p>
           <a:p>
@@ -8298,7 +8829,7 @@
                   </a:schemeClr>
                 </a:solidFill>
               </a:rPr>
-              <a:t>Input: Age, Experience, Skillset</a:t>
+              <a:t>Here the number of features = 3</a:t>
             </a:r>
           </a:p>
           <a:p>
@@ -8321,8 +8852,57 @@
                   </a:schemeClr>
                 </a:solidFill>
               </a:rPr>
+              <a:t>Input: Age, Experience, Skillset</a:t>
+            </a:r>
+          </a:p>
+          <a:p>
+            <a:endParaRPr lang="en-US" sz="2400" dirty="0">
+              <a:solidFill>
+                <a:schemeClr val="accent6">
+                  <a:lumMod val="60000"/>
+                  <a:lumOff val="40000"/>
+                </a:schemeClr>
+              </a:solidFill>
+            </a:endParaRPr>
+          </a:p>
+          <a:p>
+            <a:r>
+              <a:rPr lang="en-US" sz="2400" dirty="0">
+                <a:solidFill>
+                  <a:schemeClr val="accent6">
+                    <a:lumMod val="60000"/>
+                    <a:lumOff val="40000"/>
+                  </a:schemeClr>
+                </a:solidFill>
+              </a:rPr>
               <a:t>Output: </a:t>
             </a:r>
+          </a:p>
+          <a:p>
+            <a:r>
+              <a:rPr lang="en-US" sz="2400" dirty="0">
+                <a:solidFill>
+                  <a:schemeClr val="accent6">
+                    <a:lumMod val="60000"/>
+                    <a:lumOff val="40000"/>
+                  </a:schemeClr>
+                </a:solidFill>
+              </a:rPr>
+              <a:t>Probability of being happy (84%)</a:t>
+            </a:r>
+          </a:p>
+          <a:p>
+            <a:r>
+              <a:rPr lang="en-US" sz="2400" dirty="0">
+                <a:solidFill>
+                  <a:schemeClr val="accent6">
+                    <a:lumMod val="60000"/>
+                    <a:lumOff val="40000"/>
+                  </a:schemeClr>
+                </a:solidFill>
+              </a:rPr>
+              <a:t>-&gt; </a:t>
+            </a:r>
             <a:r>
               <a:rPr lang="en-US" sz="2400" b="1" u="sng" dirty="0">
                 <a:solidFill>
@@ -8332,7 +8912,7 @@
                   </a:schemeClr>
                 </a:solidFill>
               </a:rPr>
-              <a:t>Happy (Classification)</a:t>
+              <a:t>Happy -&gt; 1</a:t>
             </a:r>
           </a:p>
         </p:txBody>
@@ -8462,7 +9042,7 @@
                   </a:schemeClr>
                 </a:solidFill>
               </a:rPr>
-              <a:t>, output layer has number of classes neurons.</a:t>
+              <a:t>, output layer has number-of-classes neurons.</a:t>
             </a:r>
           </a:p>
           <a:p>
@@ -8485,7 +9065,29 @@
                   </a:schemeClr>
                 </a:solidFill>
               </a:rPr>
-              <a:t>Suppose a NN predicts the size of shirt based on age and height of a customer: </a:t>
+              <a:t>Suppose a NN predicts the size of shirt based on </a:t>
+            </a:r>
+            <a:r>
+              <a:rPr lang="en-US" sz="2400" b="1" dirty="0">
+                <a:solidFill>
+                  <a:schemeClr val="accent6">
+                    <a:lumMod val="60000"/>
+                    <a:lumOff val="40000"/>
+                  </a:schemeClr>
+                </a:solidFill>
+              </a:rPr>
+              <a:t>age and height </a:t>
+            </a:r>
+            <a:r>
+              <a:rPr lang="en-US" sz="2400" dirty="0">
+                <a:solidFill>
+                  <a:schemeClr val="accent6">
+                    <a:lumMod val="60000"/>
+                    <a:lumOff val="40000"/>
+                  </a:schemeClr>
+                </a:solidFill>
+              </a:rPr>
+              <a:t>of a customer: </a:t>
             </a:r>
           </a:p>
           <a:p>
@@ -9263,16 +9865,6 @@
             </a:r>
           </a:p>
           <a:p>
-            <a:endParaRPr lang="en-US" sz="2400" dirty="0">
-              <a:solidFill>
-                <a:schemeClr val="accent6">
-                  <a:lumMod val="60000"/>
-                  <a:lumOff val="40000"/>
-                </a:schemeClr>
-              </a:solidFill>
-            </a:endParaRPr>
-          </a:p>
-          <a:p>
             <a:r>
               <a:rPr lang="en-IN" sz="2400" dirty="0">
                 <a:solidFill>
@@ -9305,6 +9897,19 @@
                 </a:solidFill>
               </a:rPr>
               <a:t>:</a:t>
+            </a:r>
+          </a:p>
+          <a:p>
+            <a:r>
+              <a:rPr lang="en-IN" sz="2400" dirty="0">
+                <a:solidFill>
+                  <a:schemeClr val="accent6">
+                    <a:lumMod val="60000"/>
+                    <a:lumOff val="40000"/>
+                  </a:schemeClr>
+                </a:solidFill>
+              </a:rPr>
+              <a:t>For example in image recognition</a:t>
             </a:r>
             <a:endParaRPr lang="en-US" sz="2400" dirty="0">
               <a:solidFill>
@@ -9548,8 +10153,8 @@
         </p:nvSpPr>
         <p:spPr>
           <a:xfrm>
-            <a:off x="7204036" y="3241761"/>
-            <a:ext cx="2181303" cy="400110"/>
+            <a:off x="7692503" y="3396282"/>
+            <a:ext cx="2713500" cy="400110"/>
           </a:xfrm>
           <a:prstGeom prst="rect">
             <a:avLst/>
@@ -9571,7 +10176,7 @@
                   </a:schemeClr>
                 </a:solidFill>
               </a:rPr>
-              <a:t>Prediction target y`</a:t>
+              <a:t>Prediction target y`  (20)</a:t>
             </a:r>
           </a:p>
         </p:txBody>
@@ -9590,8 +10195,8 @@
         </p:nvSpPr>
         <p:spPr>
           <a:xfrm>
-            <a:off x="7114340" y="5605113"/>
-            <a:ext cx="2254463" cy="400110"/>
+            <a:off x="7848562" y="5097281"/>
+            <a:ext cx="2844368" cy="400110"/>
           </a:xfrm>
           <a:prstGeom prst="rect">
             <a:avLst/>
@@ -9613,7 +10218,7 @@
                   </a:schemeClr>
                 </a:solidFill>
               </a:rPr>
-              <a:t>True/Actual target y</a:t>
+              <a:t>True/Actual target y   (43)</a:t>
             </a:r>
           </a:p>
         </p:txBody>
@@ -10146,8 +10751,8 @@
         </p:nvSpPr>
         <p:spPr>
           <a:xfrm rot="18561064">
-            <a:off x="6550222" y="2182705"/>
-            <a:ext cx="353489" cy="1230231"/>
+            <a:off x="6678957" y="2121783"/>
+            <a:ext cx="353489" cy="1563193"/>
           </a:xfrm>
           <a:prstGeom prst="downArrow">
             <a:avLst/>
@@ -10194,12 +10799,15 @@
           <p:nvPr/>
         </p:nvSpPr>
         <p:spPr>
-          <a:xfrm rot="2623109">
-            <a:off x="6673364" y="3678794"/>
-            <a:ext cx="353489" cy="1230231"/>
+          <a:xfrm rot="3139831">
+            <a:off x="6753792" y="3514279"/>
+            <a:ext cx="353489" cy="1809674"/>
           </a:xfrm>
           <a:prstGeom prst="downArrow">
-            <a:avLst/>
+            <a:avLst>
+              <a:gd name="adj1" fmla="val 41376"/>
+              <a:gd name="adj2" fmla="val 50000"/>
+            </a:avLst>
           </a:prstGeom>
           <a:solidFill>
             <a:schemeClr val="accent4"/>
@@ -10243,9 +10851,9 @@
           <p:nvPr/>
         </p:nvSpPr>
         <p:spPr>
-          <a:xfrm rot="6647679">
-            <a:off x="6531838" y="5201301"/>
-            <a:ext cx="353489" cy="810154"/>
+          <a:xfrm rot="5400000">
+            <a:off x="6905509" y="4715532"/>
+            <a:ext cx="353489" cy="1329350"/>
           </a:xfrm>
           <a:prstGeom prst="downArrow">
             <a:avLst/>
@@ -10439,100 +11047,6 @@
       </p:pic>
       <p:sp>
         <p:nvSpPr>
-          <p:cNvPr id="4" name="TextBox 3"/>
-          <p:cNvSpPr txBox="1"/>
-          <p:nvPr/>
-        </p:nvSpPr>
-        <p:spPr>
-          <a:xfrm>
-            <a:off x="7204036" y="3241761"/>
-            <a:ext cx="1556645" cy="400110"/>
-          </a:xfrm>
-          <a:prstGeom prst="rect">
-            <a:avLst/>
-          </a:prstGeom>
-          <a:noFill/>
-        </p:spPr>
-        <p:txBody>
-          <a:bodyPr wrap="none" rtlCol="0">
-            <a:spAutoFit/>
-          </a:bodyPr>
-          <a:lstStyle/>
-          <a:p>
-            <a:r>
-              <a:rPr lang="en-US" sz="2000" dirty="0">
-                <a:solidFill>
-                  <a:schemeClr val="accent6">
-                    <a:lumMod val="60000"/>
-                    <a:lumOff val="40000"/>
-                  </a:schemeClr>
-                </a:solidFill>
-              </a:rPr>
-              <a:t>Prediction </a:t>
-            </a:r>
-            <a:r>
-              <a:rPr lang="en-US" sz="2000" b="1" dirty="0">
-                <a:solidFill>
-                  <a:schemeClr val="accent6">
-                    <a:lumMod val="60000"/>
-                    <a:lumOff val="40000"/>
-                  </a:schemeClr>
-                </a:solidFill>
-              </a:rPr>
-              <a:t>y`</a:t>
-            </a:r>
-          </a:p>
-        </p:txBody>
-      </p:sp>
-      <p:sp>
-        <p:nvSpPr>
-          <p:cNvPr id="6" name="TextBox 5"/>
-          <p:cNvSpPr txBox="1"/>
-          <p:nvPr/>
-        </p:nvSpPr>
-        <p:spPr>
-          <a:xfrm>
-            <a:off x="7114340" y="5605113"/>
-            <a:ext cx="1501950" cy="400110"/>
-          </a:xfrm>
-          <a:prstGeom prst="rect">
-            <a:avLst/>
-          </a:prstGeom>
-          <a:noFill/>
-        </p:spPr>
-        <p:txBody>
-          <a:bodyPr wrap="none" rtlCol="0">
-            <a:spAutoFit/>
-          </a:bodyPr>
-          <a:lstStyle/>
-          <a:p>
-            <a:r>
-              <a:rPr lang="en-US" sz="2000" dirty="0">
-                <a:solidFill>
-                  <a:schemeClr val="accent6">
-                    <a:lumMod val="60000"/>
-                    <a:lumOff val="40000"/>
-                  </a:schemeClr>
-                </a:solidFill>
-              </a:rPr>
-              <a:t>True target </a:t>
-            </a:r>
-            <a:r>
-              <a:rPr lang="en-US" sz="2000" b="1" dirty="0">
-                <a:solidFill>
-                  <a:schemeClr val="accent6">
-                    <a:lumMod val="60000"/>
-                    <a:lumOff val="40000"/>
-                  </a:schemeClr>
-                </a:solidFill>
-              </a:rPr>
-              <a:t>y</a:t>
-            </a:r>
-          </a:p>
-        </p:txBody>
-      </p:sp>
-      <p:sp>
-        <p:nvSpPr>
           <p:cNvPr id="7" name="Oval 6"/>
           <p:cNvSpPr/>
           <p:nvPr/>
@@ -10978,106 +11492,8 @@
         </p:nvSpPr>
         <p:spPr>
           <a:xfrm rot="18561064">
-            <a:off x="6550222" y="2182705"/>
-            <a:ext cx="353489" cy="1230231"/>
-          </a:xfrm>
-          <a:prstGeom prst="downArrow">
-            <a:avLst/>
-          </a:prstGeom>
-          <a:solidFill>
-            <a:schemeClr val="accent4"/>
-          </a:solidFill>
-        </p:spPr>
-        <p:style>
-          <a:lnRef idx="2">
-            <a:schemeClr val="accent1">
-              <a:shade val="15000"/>
-            </a:schemeClr>
-          </a:lnRef>
-          <a:fillRef idx="1">
-            <a:schemeClr val="accent1"/>
-          </a:fillRef>
-          <a:effectRef idx="0">
-            <a:schemeClr val="accent1"/>
-          </a:effectRef>
-          <a:fontRef idx="minor">
-            <a:schemeClr val="lt1"/>
-          </a:fontRef>
-        </p:style>
-        <p:txBody>
-          <a:bodyPr rtlCol="0" anchor="ctr"/>
-          <a:lstStyle/>
-          <a:p>
-            <a:pPr algn="ctr"/>
-            <a:endParaRPr lang="en-US"/>
-          </a:p>
-        </p:txBody>
-      </p:sp>
-      <p:sp>
-        <p:nvSpPr>
-          <p:cNvPr id="13" name="Arrow: Down 12">
-            <a:extLst>
-              <a:ext uri="{FF2B5EF4-FFF2-40B4-BE49-F238E27FC236}">
-                <a16:creationId xmlns:a16="http://schemas.microsoft.com/office/drawing/2014/main" id="{456DAC81-09B6-4587-D0F3-CDD62C88F7ED}"/>
-              </a:ext>
-            </a:extLst>
-          </p:cNvPr>
-          <p:cNvSpPr/>
-          <p:nvPr/>
-        </p:nvSpPr>
-        <p:spPr>
-          <a:xfrm rot="2623109">
-            <a:off x="6673364" y="3678794"/>
-            <a:ext cx="353489" cy="1230231"/>
-          </a:xfrm>
-          <a:prstGeom prst="downArrow">
-            <a:avLst/>
-          </a:prstGeom>
-          <a:solidFill>
-            <a:schemeClr val="accent4"/>
-          </a:solidFill>
-        </p:spPr>
-        <p:style>
-          <a:lnRef idx="2">
-            <a:schemeClr val="accent1">
-              <a:shade val="15000"/>
-            </a:schemeClr>
-          </a:lnRef>
-          <a:fillRef idx="1">
-            <a:schemeClr val="accent1"/>
-          </a:fillRef>
-          <a:effectRef idx="0">
-            <a:schemeClr val="accent1"/>
-          </a:effectRef>
-          <a:fontRef idx="minor">
-            <a:schemeClr val="lt1"/>
-          </a:fontRef>
-        </p:style>
-        <p:txBody>
-          <a:bodyPr rtlCol="0" anchor="ctr"/>
-          <a:lstStyle/>
-          <a:p>
-            <a:pPr algn="ctr"/>
-            <a:endParaRPr lang="en-US"/>
-          </a:p>
-        </p:txBody>
-      </p:sp>
-      <p:sp>
-        <p:nvSpPr>
-          <p:cNvPr id="14" name="Arrow: Down 13">
-            <a:extLst>
-              <a:ext uri="{FF2B5EF4-FFF2-40B4-BE49-F238E27FC236}">
-                <a16:creationId xmlns:a16="http://schemas.microsoft.com/office/drawing/2014/main" id="{8001C4C0-A0D2-B328-1A7F-76F7B66AE2F7}"/>
-              </a:ext>
-            </a:extLst>
-          </p:cNvPr>
-          <p:cNvSpPr/>
-          <p:nvPr/>
-        </p:nvSpPr>
-        <p:spPr>
-          <a:xfrm rot="6647679">
-            <a:off x="6531838" y="5201301"/>
-            <a:ext cx="353489" cy="810154"/>
+            <a:off x="6691352" y="2115919"/>
+            <a:ext cx="353489" cy="1595250"/>
           </a:xfrm>
           <a:prstGeom prst="downArrow">
             <a:avLst/>
@@ -11176,6 +11592,191 @@
           <a:xfrm rot="10800000">
             <a:off x="759411" y="3641871"/>
             <a:ext cx="353489" cy="906934"/>
+          </a:xfrm>
+          <a:prstGeom prst="downArrow">
+            <a:avLst/>
+          </a:prstGeom>
+          <a:solidFill>
+            <a:schemeClr val="accent4"/>
+          </a:solidFill>
+        </p:spPr>
+        <p:style>
+          <a:lnRef idx="2">
+            <a:schemeClr val="accent1">
+              <a:shade val="15000"/>
+            </a:schemeClr>
+          </a:lnRef>
+          <a:fillRef idx="1">
+            <a:schemeClr val="accent1"/>
+          </a:fillRef>
+          <a:effectRef idx="0">
+            <a:schemeClr val="accent1"/>
+          </a:effectRef>
+          <a:fontRef idx="minor">
+            <a:schemeClr val="lt1"/>
+          </a:fontRef>
+        </p:style>
+        <p:txBody>
+          <a:bodyPr rtlCol="0" anchor="ctr"/>
+          <a:lstStyle/>
+          <a:p>
+            <a:pPr algn="ctr"/>
+            <a:endParaRPr lang="en-US"/>
+          </a:p>
+        </p:txBody>
+      </p:sp>
+      <p:sp>
+        <p:nvSpPr>
+          <p:cNvPr id="9" name="TextBox 8">
+            <a:extLst>
+              <a:ext uri="{FF2B5EF4-FFF2-40B4-BE49-F238E27FC236}">
+                <a16:creationId xmlns:a16="http://schemas.microsoft.com/office/drawing/2014/main" id="{3A93AAB0-71EC-012E-D297-4DD5AA441B35}"/>
+              </a:ext>
+            </a:extLst>
+          </p:cNvPr>
+          <p:cNvSpPr txBox="1"/>
+          <p:nvPr/>
+        </p:nvSpPr>
+        <p:spPr>
+          <a:xfrm>
+            <a:off x="7692503" y="3396282"/>
+            <a:ext cx="2713500" cy="400110"/>
+          </a:xfrm>
+          <a:prstGeom prst="rect">
+            <a:avLst/>
+          </a:prstGeom>
+          <a:noFill/>
+        </p:spPr>
+        <p:txBody>
+          <a:bodyPr wrap="none" rtlCol="0">
+            <a:spAutoFit/>
+          </a:bodyPr>
+          <a:lstStyle/>
+          <a:p>
+            <a:r>
+              <a:rPr lang="en-US" sz="2000" dirty="0">
+                <a:solidFill>
+                  <a:schemeClr val="accent6">
+                    <a:lumMod val="60000"/>
+                    <a:lumOff val="40000"/>
+                  </a:schemeClr>
+                </a:solidFill>
+              </a:rPr>
+              <a:t>Prediction target y`  (20)</a:t>
+            </a:r>
+          </a:p>
+        </p:txBody>
+      </p:sp>
+      <p:sp>
+        <p:nvSpPr>
+          <p:cNvPr id="10" name="TextBox 9">
+            <a:extLst>
+              <a:ext uri="{FF2B5EF4-FFF2-40B4-BE49-F238E27FC236}">
+                <a16:creationId xmlns:a16="http://schemas.microsoft.com/office/drawing/2014/main" id="{15F088CD-BDC5-BBCB-EF91-94DC36662FFE}"/>
+              </a:ext>
+            </a:extLst>
+          </p:cNvPr>
+          <p:cNvSpPr txBox="1"/>
+          <p:nvPr/>
+        </p:nvSpPr>
+        <p:spPr>
+          <a:xfrm>
+            <a:off x="7848562" y="5097281"/>
+            <a:ext cx="2844368" cy="400110"/>
+          </a:xfrm>
+          <a:prstGeom prst="rect">
+            <a:avLst/>
+          </a:prstGeom>
+          <a:noFill/>
+        </p:spPr>
+        <p:txBody>
+          <a:bodyPr wrap="none" rtlCol="0">
+            <a:spAutoFit/>
+          </a:bodyPr>
+          <a:lstStyle/>
+          <a:p>
+            <a:r>
+              <a:rPr lang="en-US" sz="2000" dirty="0">
+                <a:solidFill>
+                  <a:schemeClr val="accent6">
+                    <a:lumMod val="60000"/>
+                    <a:lumOff val="40000"/>
+                  </a:schemeClr>
+                </a:solidFill>
+              </a:rPr>
+              <a:t>True/Actual target y   (43)</a:t>
+            </a:r>
+          </a:p>
+        </p:txBody>
+      </p:sp>
+      <p:sp>
+        <p:nvSpPr>
+          <p:cNvPr id="15" name="Arrow: Down 14">
+            <a:extLst>
+              <a:ext uri="{FF2B5EF4-FFF2-40B4-BE49-F238E27FC236}">
+                <a16:creationId xmlns:a16="http://schemas.microsoft.com/office/drawing/2014/main" id="{4C1CBA18-3802-CDED-0688-70DAE1CEA66F}"/>
+              </a:ext>
+            </a:extLst>
+          </p:cNvPr>
+          <p:cNvSpPr/>
+          <p:nvPr/>
+        </p:nvSpPr>
+        <p:spPr>
+          <a:xfrm rot="3139831">
+            <a:off x="6753792" y="3514279"/>
+            <a:ext cx="353489" cy="1809674"/>
+          </a:xfrm>
+          <a:prstGeom prst="downArrow">
+            <a:avLst>
+              <a:gd name="adj1" fmla="val 41376"/>
+              <a:gd name="adj2" fmla="val 50000"/>
+            </a:avLst>
+          </a:prstGeom>
+          <a:solidFill>
+            <a:schemeClr val="accent4"/>
+          </a:solidFill>
+        </p:spPr>
+        <p:style>
+          <a:lnRef idx="2">
+            <a:schemeClr val="accent1">
+              <a:shade val="15000"/>
+            </a:schemeClr>
+          </a:lnRef>
+          <a:fillRef idx="1">
+            <a:schemeClr val="accent1"/>
+          </a:fillRef>
+          <a:effectRef idx="0">
+            <a:schemeClr val="accent1"/>
+          </a:effectRef>
+          <a:fontRef idx="minor">
+            <a:schemeClr val="lt1"/>
+          </a:fontRef>
+        </p:style>
+        <p:txBody>
+          <a:bodyPr rtlCol="0" anchor="ctr"/>
+          <a:lstStyle/>
+          <a:p>
+            <a:pPr algn="ctr"/>
+            <a:endParaRPr lang="en-US"/>
+          </a:p>
+        </p:txBody>
+      </p:sp>
+      <p:sp>
+        <p:nvSpPr>
+          <p:cNvPr id="18" name="Arrow: Down 17">
+            <a:extLst>
+              <a:ext uri="{FF2B5EF4-FFF2-40B4-BE49-F238E27FC236}">
+                <a16:creationId xmlns:a16="http://schemas.microsoft.com/office/drawing/2014/main" id="{AA92BCEE-A3E7-0039-70AA-3590E66E7141}"/>
+              </a:ext>
+            </a:extLst>
+          </p:cNvPr>
+          <p:cNvSpPr/>
+          <p:nvPr/>
+        </p:nvSpPr>
+        <p:spPr>
+          <a:xfrm rot="5400000">
+            <a:off x="6905509" y="4715532"/>
+            <a:ext cx="353489" cy="1329350"/>
           </a:xfrm>
           <a:prstGeom prst="downArrow">
             <a:avLst/>
@@ -14646,8 +15247,8 @@
         </p:blipFill>
         <p:spPr>
           <a:xfrm>
-            <a:off x="1985045" y="1576790"/>
-            <a:ext cx="6939499" cy="3704420"/>
+            <a:off x="1404675" y="1664208"/>
+            <a:ext cx="7327846" cy="3911726"/>
           </a:xfrm>
           <a:prstGeom prst="rect">
             <a:avLst/>
@@ -17338,6 +17939,354 @@
           </mc:Fallback>
         </mc:AlternateContent>
       </p:grpSp>
+      <p:grpSp>
+        <p:nvGrpSpPr>
+          <p:cNvPr id="22" name="Group 21">
+            <a:extLst>
+              <a:ext uri="{FF2B5EF4-FFF2-40B4-BE49-F238E27FC236}">
+                <a16:creationId xmlns:a16="http://schemas.microsoft.com/office/drawing/2014/main" id="{0AD7E2BA-0151-960A-D2D6-E6400A4165C6}"/>
+              </a:ext>
+            </a:extLst>
+          </p:cNvPr>
+          <p:cNvGrpSpPr/>
+          <p:nvPr/>
+        </p:nvGrpSpPr>
+        <p:grpSpPr>
+          <a:xfrm>
+            <a:off x="345744" y="1945008"/>
+            <a:ext cx="342360" cy="128520"/>
+            <a:chOff x="345744" y="1945008"/>
+            <a:chExt cx="342360" cy="128520"/>
+          </a:xfrm>
+        </p:grpSpPr>
+        <mc:AlternateContent xmlns:mc="http://schemas.openxmlformats.org/markup-compatibility/2006" xmlns:p14="http://schemas.microsoft.com/office/powerpoint/2010/main">
+          <mc:Choice Requires="p14">
+            <p:contentPart p14:bwMode="auto" r:id="rId75">
+              <p14:nvContentPartPr>
+                <p14:cNvPr id="5" name="Ink 4">
+                  <a:extLst>
+                    <a:ext uri="{FF2B5EF4-FFF2-40B4-BE49-F238E27FC236}">
+                      <a16:creationId xmlns:a16="http://schemas.microsoft.com/office/drawing/2014/main" id="{D9494B42-75FB-C37B-E5FF-4B69D425D54A}"/>
+                    </a:ext>
+                  </a:extLst>
+                </p14:cNvPr>
+                <p14:cNvContentPartPr/>
+                <p14:nvPr/>
+              </p14:nvContentPartPr>
+              <p14:xfrm>
+                <a:off x="345744" y="1981008"/>
+                <a:ext cx="269640" cy="25200"/>
+              </p14:xfrm>
+            </p:contentPart>
+          </mc:Choice>
+          <mc:Fallback xmlns="">
+            <p:pic>
+              <p:nvPicPr>
+                <p:cNvPr id="5" name="Ink 4">
+                  <a:extLst>
+                    <a:ext uri="{FF2B5EF4-FFF2-40B4-BE49-F238E27FC236}">
+                      <a16:creationId xmlns:a16="http://schemas.microsoft.com/office/drawing/2014/main" id="{D9494B42-75FB-C37B-E5FF-4B69D425D54A}"/>
+                    </a:ext>
+                  </a:extLst>
+                </p:cNvPr>
+                <p:cNvPicPr/>
+                <p:nvPr/>
+              </p:nvPicPr>
+              <p:blipFill>
+                <a:blip r:embed="rId76"/>
+                <a:stretch>
+                  <a:fillRect/>
+                </a:stretch>
+              </p:blipFill>
+              <p:spPr>
+                <a:xfrm>
+                  <a:off x="327744" y="1963008"/>
+                  <a:ext cx="305280" cy="60840"/>
+                </a:xfrm>
+                <a:prstGeom prst="rect">
+                  <a:avLst/>
+                </a:prstGeom>
+              </p:spPr>
+            </p:pic>
+          </mc:Fallback>
+        </mc:AlternateContent>
+        <mc:AlternateContent xmlns:mc="http://schemas.openxmlformats.org/markup-compatibility/2006" xmlns:p14="http://schemas.microsoft.com/office/powerpoint/2010/main">
+          <mc:Choice Requires="p14">
+            <p:contentPart p14:bwMode="auto" r:id="rId77">
+              <p14:nvContentPartPr>
+                <p14:cNvPr id="20" name="Ink 19">
+                  <a:extLst>
+                    <a:ext uri="{FF2B5EF4-FFF2-40B4-BE49-F238E27FC236}">
+                      <a16:creationId xmlns:a16="http://schemas.microsoft.com/office/drawing/2014/main" id="{E1F654CB-0A5A-B561-452C-4525470D8FAE}"/>
+                    </a:ext>
+                  </a:extLst>
+                </p14:cNvPr>
+                <p14:cNvContentPartPr/>
+                <p14:nvPr/>
+              </p14:nvContentPartPr>
+              <p14:xfrm>
+                <a:off x="553104" y="1945008"/>
+                <a:ext cx="135000" cy="128520"/>
+              </p14:xfrm>
+            </p:contentPart>
+          </mc:Choice>
+          <mc:Fallback xmlns="">
+            <p:pic>
+              <p:nvPicPr>
+                <p:cNvPr id="20" name="Ink 19">
+                  <a:extLst>
+                    <a:ext uri="{FF2B5EF4-FFF2-40B4-BE49-F238E27FC236}">
+                      <a16:creationId xmlns:a16="http://schemas.microsoft.com/office/drawing/2014/main" id="{E1F654CB-0A5A-B561-452C-4525470D8FAE}"/>
+                    </a:ext>
+                  </a:extLst>
+                </p:cNvPr>
+                <p:cNvPicPr/>
+                <p:nvPr/>
+              </p:nvPicPr>
+              <p:blipFill>
+                <a:blip r:embed="rId78"/>
+                <a:stretch>
+                  <a:fillRect/>
+                </a:stretch>
+              </p:blipFill>
+              <p:spPr>
+                <a:xfrm>
+                  <a:off x="535104" y="1927008"/>
+                  <a:ext cx="170640" cy="164160"/>
+                </a:xfrm>
+                <a:prstGeom prst="rect">
+                  <a:avLst/>
+                </a:prstGeom>
+              </p:spPr>
+            </p:pic>
+          </mc:Fallback>
+        </mc:AlternateContent>
+      </p:grpSp>
+      <mc:AlternateContent xmlns:mc="http://schemas.openxmlformats.org/markup-compatibility/2006" xmlns:p14="http://schemas.microsoft.com/office/powerpoint/2010/main">
+        <mc:Choice Requires="p14">
+          <p:contentPart p14:bwMode="auto" r:id="rId79">
+            <p14:nvContentPartPr>
+              <p14:cNvPr id="27" name="Ink 26">
+                <a:extLst>
+                  <a:ext uri="{FF2B5EF4-FFF2-40B4-BE49-F238E27FC236}">
+                    <a16:creationId xmlns:a16="http://schemas.microsoft.com/office/drawing/2014/main" id="{1FB684B3-1C00-F246-C975-C28490968216}"/>
+                  </a:ext>
+                </a:extLst>
+              </p14:cNvPr>
+              <p14:cNvContentPartPr/>
+              <p14:nvPr/>
+            </p14:nvContentPartPr>
+            <p14:xfrm>
+              <a:off x="360504" y="3259368"/>
+              <a:ext cx="273960" cy="77760"/>
+            </p14:xfrm>
+          </p:contentPart>
+        </mc:Choice>
+        <mc:Fallback xmlns="">
+          <p:pic>
+            <p:nvPicPr>
+              <p:cNvPr id="27" name="Ink 26">
+                <a:extLst>
+                  <a:ext uri="{FF2B5EF4-FFF2-40B4-BE49-F238E27FC236}">
+                    <a16:creationId xmlns:a16="http://schemas.microsoft.com/office/drawing/2014/main" id="{1FB684B3-1C00-F246-C975-C28490968216}"/>
+                  </a:ext>
+                </a:extLst>
+              </p:cNvPr>
+              <p:cNvPicPr/>
+              <p:nvPr/>
+            </p:nvPicPr>
+            <p:blipFill>
+              <a:blip r:embed="rId80"/>
+              <a:stretch>
+                <a:fillRect/>
+              </a:stretch>
+            </p:blipFill>
+            <p:spPr>
+              <a:xfrm>
+                <a:off x="342504" y="3241728"/>
+                <a:ext cx="309600" cy="113400"/>
+              </a:xfrm>
+              <a:prstGeom prst="rect">
+                <a:avLst/>
+              </a:prstGeom>
+            </p:spPr>
+          </p:pic>
+        </mc:Fallback>
+      </mc:AlternateContent>
+      <p:grpSp>
+        <p:nvGrpSpPr>
+          <p:cNvPr id="71" name="Group 70">
+            <a:extLst>
+              <a:ext uri="{FF2B5EF4-FFF2-40B4-BE49-F238E27FC236}">
+                <a16:creationId xmlns:a16="http://schemas.microsoft.com/office/drawing/2014/main" id="{0D0E224A-2E48-3F45-2EDC-CD8E0B440C45}"/>
+              </a:ext>
+            </a:extLst>
+          </p:cNvPr>
+          <p:cNvGrpSpPr/>
+          <p:nvPr/>
+        </p:nvGrpSpPr>
+        <p:grpSpPr>
+          <a:xfrm>
+            <a:off x="340344" y="4560768"/>
+            <a:ext cx="438120" cy="207000"/>
+            <a:chOff x="340344" y="4560768"/>
+            <a:chExt cx="438120" cy="207000"/>
+          </a:xfrm>
+        </p:grpSpPr>
+        <mc:AlternateContent xmlns:mc="http://schemas.openxmlformats.org/markup-compatibility/2006" xmlns:p14="http://schemas.microsoft.com/office/powerpoint/2010/main">
+          <mc:Choice Requires="p14">
+            <p:contentPart p14:bwMode="auto" r:id="rId81">
+              <p14:nvContentPartPr>
+                <p14:cNvPr id="34" name="Ink 33">
+                  <a:extLst>
+                    <a:ext uri="{FF2B5EF4-FFF2-40B4-BE49-F238E27FC236}">
+                      <a16:creationId xmlns:a16="http://schemas.microsoft.com/office/drawing/2014/main" id="{604153D3-39DD-F5EE-50EB-75BD9DB4BCD5}"/>
+                    </a:ext>
+                  </a:extLst>
+                </p14:cNvPr>
+                <p14:cNvContentPartPr/>
+                <p14:nvPr/>
+              </p14:nvContentPartPr>
+              <p14:xfrm>
+                <a:off x="340344" y="4621968"/>
+                <a:ext cx="86760" cy="51480"/>
+              </p14:xfrm>
+            </p:contentPart>
+          </mc:Choice>
+          <mc:Fallback xmlns="">
+            <p:pic>
+              <p:nvPicPr>
+                <p:cNvPr id="34" name="Ink 33">
+                  <a:extLst>
+                    <a:ext uri="{FF2B5EF4-FFF2-40B4-BE49-F238E27FC236}">
+                      <a16:creationId xmlns:a16="http://schemas.microsoft.com/office/drawing/2014/main" id="{604153D3-39DD-F5EE-50EB-75BD9DB4BCD5}"/>
+                    </a:ext>
+                  </a:extLst>
+                </p:cNvPr>
+                <p:cNvPicPr/>
+                <p:nvPr/>
+              </p:nvPicPr>
+              <p:blipFill>
+                <a:blip r:embed="rId82"/>
+                <a:stretch>
+                  <a:fillRect/>
+                </a:stretch>
+              </p:blipFill>
+              <p:spPr>
+                <a:xfrm>
+                  <a:off x="322344" y="4603968"/>
+                  <a:ext cx="122400" cy="87120"/>
+                </a:xfrm>
+                <a:prstGeom prst="rect">
+                  <a:avLst/>
+                </a:prstGeom>
+              </p:spPr>
+            </p:pic>
+          </mc:Fallback>
+        </mc:AlternateContent>
+        <mc:AlternateContent xmlns:mc="http://schemas.openxmlformats.org/markup-compatibility/2006" xmlns:p14="http://schemas.microsoft.com/office/powerpoint/2010/main">
+          <mc:Choice Requires="p14">
+            <p:contentPart p14:bwMode="auto" r:id="rId83">
+              <p14:nvContentPartPr>
+                <p14:cNvPr id="36" name="Ink 35">
+                  <a:extLst>
+                    <a:ext uri="{FF2B5EF4-FFF2-40B4-BE49-F238E27FC236}">
+                      <a16:creationId xmlns:a16="http://schemas.microsoft.com/office/drawing/2014/main" id="{9188AAC9-4EC8-5737-9F9C-6996F7C08B10}"/>
+                    </a:ext>
+                  </a:extLst>
+                </p14:cNvPr>
+                <p14:cNvContentPartPr/>
+                <p14:nvPr/>
+              </p14:nvContentPartPr>
+              <p14:xfrm>
+                <a:off x="345384" y="4656888"/>
+                <a:ext cx="281160" cy="19800"/>
+              </p14:xfrm>
+            </p:contentPart>
+          </mc:Choice>
+          <mc:Fallback xmlns="">
+            <p:pic>
+              <p:nvPicPr>
+                <p:cNvPr id="36" name="Ink 35">
+                  <a:extLst>
+                    <a:ext uri="{FF2B5EF4-FFF2-40B4-BE49-F238E27FC236}">
+                      <a16:creationId xmlns:a16="http://schemas.microsoft.com/office/drawing/2014/main" id="{9188AAC9-4EC8-5737-9F9C-6996F7C08B10}"/>
+                    </a:ext>
+                  </a:extLst>
+                </p:cNvPr>
+                <p:cNvPicPr/>
+                <p:nvPr/>
+              </p:nvPicPr>
+              <p:blipFill>
+                <a:blip r:embed="rId84"/>
+                <a:stretch>
+                  <a:fillRect/>
+                </a:stretch>
+              </p:blipFill>
+              <p:spPr>
+                <a:xfrm>
+                  <a:off x="327384" y="4639248"/>
+                  <a:ext cx="316800" cy="55440"/>
+                </a:xfrm>
+                <a:prstGeom prst="rect">
+                  <a:avLst/>
+                </a:prstGeom>
+              </p:spPr>
+            </p:pic>
+          </mc:Fallback>
+        </mc:AlternateContent>
+        <mc:AlternateContent xmlns:mc="http://schemas.openxmlformats.org/markup-compatibility/2006" xmlns:p14="http://schemas.microsoft.com/office/powerpoint/2010/main">
+          <mc:Choice Requires="p14">
+            <p:contentPart p14:bwMode="auto" r:id="rId85">
+              <p14:nvContentPartPr>
+                <p14:cNvPr id="58" name="Ink 57">
+                  <a:extLst>
+                    <a:ext uri="{FF2B5EF4-FFF2-40B4-BE49-F238E27FC236}">
+                      <a16:creationId xmlns:a16="http://schemas.microsoft.com/office/drawing/2014/main" id="{E2C9C4FE-DCE4-FD0B-A805-77E7C3A73B6E}"/>
+                    </a:ext>
+                  </a:extLst>
+                </p14:cNvPr>
+                <p14:cNvContentPartPr/>
+                <p14:nvPr/>
+              </p14:nvContentPartPr>
+              <p14:xfrm>
+                <a:off x="553104" y="4560768"/>
+                <a:ext cx="225360" cy="207000"/>
+              </p14:xfrm>
+            </p:contentPart>
+          </mc:Choice>
+          <mc:Fallback xmlns="">
+            <p:pic>
+              <p:nvPicPr>
+                <p:cNvPr id="58" name="Ink 57">
+                  <a:extLst>
+                    <a:ext uri="{FF2B5EF4-FFF2-40B4-BE49-F238E27FC236}">
+                      <a16:creationId xmlns:a16="http://schemas.microsoft.com/office/drawing/2014/main" id="{E2C9C4FE-DCE4-FD0B-A805-77E7C3A73B6E}"/>
+                    </a:ext>
+                  </a:extLst>
+                </p:cNvPr>
+                <p:cNvPicPr/>
+                <p:nvPr/>
+              </p:nvPicPr>
+              <p:blipFill>
+                <a:blip r:embed="rId86"/>
+                <a:stretch>
+                  <a:fillRect/>
+                </a:stretch>
+              </p:blipFill>
+              <p:spPr>
+                <a:xfrm>
+                  <a:off x="535104" y="4543128"/>
+                  <a:ext cx="261000" cy="242640"/>
+                </a:xfrm>
+                <a:prstGeom prst="rect">
+                  <a:avLst/>
+                </a:prstGeom>
+              </p:spPr>
+            </p:pic>
+          </mc:Fallback>
+        </mc:AlternateContent>
+      </p:grpSp>
     </p:spTree>
     <p:extLst>
       <p:ext uri="{BB962C8B-B14F-4D97-AF65-F5344CB8AC3E}">
@@ -17804,7 +18753,7 @@
         <p:spPr>
           <a:xfrm>
             <a:off x="201168" y="42838"/>
-            <a:ext cx="11228832" cy="1200329"/>
+            <a:ext cx="11228832" cy="461665"/>
           </a:xfrm>
           <a:prstGeom prst="rect">
             <a:avLst/>
@@ -17817,33 +18766,6 @@
           </a:bodyPr>
           <a:lstStyle/>
           <a:p>
-            <a:r>
-              <a:rPr lang="en-IN" sz="2400" b="1" dirty="0">
-                <a:solidFill>
-                  <a:schemeClr val="accent6">
-                    <a:lumMod val="60000"/>
-                    <a:lumOff val="40000"/>
-                  </a:schemeClr>
-                </a:solidFill>
-              </a:rPr>
-              <a:t>Key Components</a:t>
-            </a:r>
-          </a:p>
-          <a:p>
-            <a:endParaRPr lang="en-US" sz="2400" dirty="0">
-              <a:solidFill>
-                <a:schemeClr val="accent6">
-                  <a:lumMod val="60000"/>
-                  <a:lumOff val="40000"/>
-                </a:schemeClr>
-              </a:solidFill>
-            </a:endParaRPr>
-          </a:p>
-          <a:p>
-            <a:pPr marL="342900" indent="-342900">
-              <a:buFont typeface="Arial" panose="020B0604020202020204" pitchFamily="34" charset="0"/>
-              <a:buChar char="•"/>
-            </a:pPr>
             <a:r>
               <a:rPr lang="en-IN" sz="2400" b="1" dirty="0">
                 <a:solidFill>
@@ -17899,7 +18821,7 @@
         </p:blipFill>
         <p:spPr>
           <a:xfrm>
-            <a:off x="1719365" y="1302603"/>
+            <a:off x="1838237" y="713231"/>
             <a:ext cx="6665109" cy="2715769"/>
           </a:xfrm>
           <a:prstGeom prst="rect">
@@ -17963,7 +18885,7 @@
         </p:nvSpPr>
         <p:spPr>
           <a:xfrm>
-            <a:off x="24384" y="2519596"/>
+            <a:off x="137160" y="1422316"/>
             <a:ext cx="1667316" cy="461665"/>
           </a:xfrm>
           <a:prstGeom prst="rect">
@@ -18013,7 +18935,7 @@
         </p:blipFill>
         <p:spPr>
           <a:xfrm>
-            <a:off x="2368296" y="4159767"/>
+            <a:off x="2825496" y="4240788"/>
             <a:ext cx="4224777" cy="2574374"/>
           </a:xfrm>
           <a:prstGeom prst="rect">
@@ -18021,6 +18943,55 @@
           </a:prstGeom>
         </p:spPr>
       </p:pic>
+      <p:sp>
+        <p:nvSpPr>
+          <p:cNvPr id="2" name="Arrow: Down 1">
+            <a:extLst>
+              <a:ext uri="{FF2B5EF4-FFF2-40B4-BE49-F238E27FC236}">
+                <a16:creationId xmlns:a16="http://schemas.microsoft.com/office/drawing/2014/main" id="{46468120-8074-2B51-DC4C-E8A44C15D0DB}"/>
+              </a:ext>
+            </a:extLst>
+          </p:cNvPr>
+          <p:cNvSpPr/>
+          <p:nvPr/>
+        </p:nvSpPr>
+        <p:spPr>
+          <a:xfrm>
+            <a:off x="4572000" y="3538728"/>
+            <a:ext cx="365760" cy="521208"/>
+          </a:xfrm>
+          <a:prstGeom prst="downArrow">
+            <a:avLst/>
+          </a:prstGeom>
+          <a:solidFill>
+            <a:srgbClr val="FFFF00"/>
+          </a:solidFill>
+        </p:spPr>
+        <p:style>
+          <a:lnRef idx="2">
+            <a:schemeClr val="accent1">
+              <a:shade val="15000"/>
+            </a:schemeClr>
+          </a:lnRef>
+          <a:fillRef idx="1">
+            <a:schemeClr val="accent1"/>
+          </a:fillRef>
+          <a:effectRef idx="0">
+            <a:schemeClr val="accent1"/>
+          </a:effectRef>
+          <a:fontRef idx="minor">
+            <a:schemeClr val="lt1"/>
+          </a:fontRef>
+        </p:style>
+        <p:txBody>
+          <a:bodyPr rtlCol="0" anchor="ctr"/>
+          <a:lstStyle/>
+          <a:p>
+            <a:pPr algn="ctr"/>
+            <a:endParaRPr lang="en-US"/>
+          </a:p>
+        </p:txBody>
+      </p:sp>
     </p:spTree>
     <p:extLst>
       <p:ext uri="{BB962C8B-B14F-4D97-AF65-F5344CB8AC3E}">
